--- a/ViewingContextPipeline_Overview.pptx
+++ b/ViewingContextPipeline_Overview.pptx
@@ -2,13 +2,13 @@
 <file path=ppt/presentation.xml><?xml version="1.0" encoding="utf-8"?>
 <p:presentation xmlns:p="http://schemas.openxmlformats.org/presentationml/2006/main">
   <p:sldMasterIdLst>
-    <p:sldMasterId xmlns:r="http://schemas.openxmlformats.org/officeDocument/2006/relationships" id="2147483648" r:id="R58ec943eb0984ac7"/>
+    <p:sldMasterId xmlns:r="http://schemas.openxmlformats.org/officeDocument/2006/relationships" id="2147483648" r:id="R6fd816c1bdbc4ae5"/>
   </p:sldMasterIdLst>
   <p:notesMasterIdLst>
-    <p:notesMasterId xmlns:r="http://schemas.openxmlformats.org/officeDocument/2006/relationships" r:id="R6e7d6d82195d4411"/>
+    <p:notesMasterId xmlns:r="http://schemas.openxmlformats.org/officeDocument/2006/relationships" r:id="Rd4e777d7feef4488"/>
   </p:notesMasterIdLst>
   <p:sldIdLst>
-    <p:sldId xmlns:r="http://schemas.openxmlformats.org/officeDocument/2006/relationships" id="256" r:id="Ree9cb4604b66476a"/>
+    <p:sldId xmlns:r="http://schemas.openxmlformats.org/officeDocument/2006/relationships" id="256" r:id="R862154eb34e94455"/>
   </p:sldIdLst>
   <p:sldSz cx="12192000" cy="6858000"/>
   <p:notesSz cx="6858000" cy="9144000"/>
@@ -447,7 +447,7 @@
           </a:p>
           <a:p xmlns:a="http://schemas.openxmlformats.org/drawingml/2006/main">
             <a:r>
-              <a:t>- Internal repository README.md, pipeline runner, and current extraction/validation contracts (2026-08-24).</a:t>
+              <a:t>- Internal repository config/pipeline.yaml, src/extraction/steps.py, src/validation/recommendation.py, and README.md (2026-08-27).</a:t>
             </a:r>
           </a:p>
           <a:p xmlns:a="http://schemas.openxmlformats.org/drawingml/2006/main">
@@ -520,7 +520,7 @@
   </p:cSld>
   <p:clrMap bg1="lt1" tx1="dk1" bg2="lt2" tx2="dk2" accent1="accent1" accent2="accent2" accent3="accent3" accent4="accent4" accent5="accent5" accent6="accent6" hlink="hlink" folHlink="folHlink"/>
   <p:sldLayoutIdLst>
-    <p:sldLayoutId xmlns:r="http://schemas.openxmlformats.org/officeDocument/2006/relationships" id="2147483649" r:id="R4cac61b1eca844cd"/>
+    <p:sldLayoutId xmlns:r="http://schemas.openxmlformats.org/officeDocument/2006/relationships" id="2147483649" r:id="R38127c28a79c4d2f"/>
   </p:sldLayoutIdLst>
   <p:txStyles>
     <p:titleStyle>
@@ -1101,6 +1101,7 @@
           <a:lstStyle xmlns:a="http://schemas.openxmlformats.org/drawingml/2006/main"/>
           <a:p xmlns:a="http://schemas.openxmlformats.org/drawingml/2006/main">
             <a:pPr algn="l">
+              <a:buNone/>
               <a:defRPr sz="2625" b="1">
                 <a:solidFill>
                   <a:srgbClr val="111827"/>
@@ -1119,7 +1120,7 @@
                 <a:ea typeface="Arial"/>
                 <a:cs typeface="Arial"/>
               </a:rPr>
-              <a:t>같은 visual evidence로 Graph·Description 공정 비교</a:t>
+              <a:t>같은 visual evidence로 4개 SASRec arm을 공정 비교</a:t>
             </a:r>
           </a:p>
         </p:txBody>
@@ -1141,7 +1142,7 @@
         <p:spPr>
           <a:xfrm xmlns:a="http://schemas.openxmlformats.org/drawingml/2006/main">
             <a:off x="457200" y="714375"/>
-            <a:ext cx="7239000" cy="266700"/>
+            <a:ext cx="8572500" cy="266700"/>
           </a:xfrm>
           <a:prstGeom xmlns:a="http://schemas.openxmlformats.org/drawingml/2006/main" prst="rect">
             <a:avLst/>
@@ -1159,6 +1160,7 @@
           <a:lstStyle xmlns:a="http://schemas.openxmlformats.org/drawingml/2006/main"/>
           <a:p xmlns:a="http://schemas.openxmlformats.org/drawingml/2006/main">
             <a:pPr algn="l">
+              <a:buNone/>
               <a:defRPr sz="1275">
                 <a:solidFill>
                   <a:srgbClr val="667085"/>
@@ -1177,7 +1179,7 @@
                 <a:ea typeface="Arial"/>
                 <a:cs typeface="Arial"/>
               </a:rPr>
-              <a:t>MicroLens-100K  ·  visual-only  ·  fixed 30s  ·  Qwen3-VL-2B</a:t>
+              <a:t>MicroLens-100K  ·  visual-only  ·  fixed 30s  ·  Qwen3-VL-2B + Gemini 3.7 Flash</a:t>
             </a:r>
           </a:p>
         </p:txBody>
@@ -1217,6 +1219,7 @@
           <a:lstStyle xmlns:a="http://schemas.openxmlformats.org/drawingml/2006/main"/>
           <a:p xmlns:a="http://schemas.openxmlformats.org/drawingml/2006/main">
             <a:pPr algn="r">
+              <a:buNone/>
               <a:defRPr sz="975" b="1">
                 <a:solidFill>
                   <a:srgbClr val="667085"/>
@@ -1275,6 +1278,7 @@
           <a:lstStyle xmlns:a="http://schemas.openxmlformats.org/drawingml/2006/main"/>
           <a:p xmlns:a="http://schemas.openxmlformats.org/drawingml/2006/main">
             <a:pPr algn="l">
+              <a:buNone/>
               <a:defRPr sz="1125" b="1">
                 <a:solidFill>
                   <a:srgbClr val="667085"/>
@@ -1333,6 +1337,7 @@
           <a:lstStyle xmlns:a="http://schemas.openxmlformats.org/drawingml/2006/main"/>
           <a:p xmlns:a="http://schemas.openxmlformats.org/drawingml/2006/main">
             <a:pPr algn="l">
+              <a:buNone/>
               <a:defRPr sz="1125" b="1">
                 <a:solidFill>
                   <a:srgbClr val="667085"/>
@@ -1391,6 +1396,7 @@
           <a:lstStyle xmlns:a="http://schemas.openxmlformats.org/drawingml/2006/main"/>
           <a:p xmlns:a="http://schemas.openxmlformats.org/drawingml/2006/main">
             <a:pPr algn="l">
+              <a:buNone/>
               <a:defRPr sz="1125" b="1">
                 <a:solidFill>
                   <a:srgbClr val="667085"/>
@@ -1449,6 +1455,7 @@
           <a:lstStyle xmlns:a="http://schemas.openxmlformats.org/drawingml/2006/main"/>
           <a:p xmlns:a="http://schemas.openxmlformats.org/drawingml/2006/main">
             <a:pPr algn="l">
+              <a:buNone/>
               <a:defRPr sz="1125" b="1">
                 <a:solidFill>
                   <a:srgbClr val="667085"/>
@@ -1733,8 +1740,8 @@
         </p:nvSpPr>
         <p:spPr>
           <a:xfrm xmlns:a="http://schemas.openxmlformats.org/drawingml/2006/main">
-            <a:off x="2266950" y="2752725"/>
-            <a:ext cx="685800" cy="104775"/>
+            <a:off x="2266950" y="2590800"/>
+            <a:ext cx="685800" cy="85725"/>
           </a:xfrm>
           <a:prstGeom xmlns:a="http://schemas.openxmlformats.org/drawingml/2006/main" prst="rightArrow">
             <a:avLst/>
@@ -1752,22 +1759,121 @@
       </p:sp>
       <p:sp>
         <p:nvSpPr>
-          <p:cNvPr id="16" name="input-to-description">
-            <a:extLst xmlns:a="http://schemas.openxmlformats.org/drawingml/2006/main">
-              <a:ext uri="{FF2B5EF4-FFF2-40B4-BE49-F238E27FC236}">
-                <a16:creationId xmlns:a16="http://schemas.microsoft.com/office/drawing/2014/main" id="{25D7CDD2-F5C5-4193-9AB8-CE836E02821F}"/>
-              </a:ext>
-            </a:extLst>
-          </p:cNvPr>
-          <p:cNvSpPr>
-            <a:spLocks xmlns:a="http://schemas.openxmlformats.org/drawingml/2006/main" noGrp="1"/>
-          </p:cNvSpPr>
-          <p:nvPr/>
-        </p:nvSpPr>
-        <p:spPr>
-          <a:xfrm xmlns:a="http://schemas.openxmlformats.org/drawingml/2006/main">
-            <a:off x="2266950" y="4657725"/>
-            <a:ext cx="685800" cy="104775"/>
+          <p:cNvPr id="17" name="graph-step-1">
+            <a:extLst xmlns:a="http://schemas.openxmlformats.org/drawingml/2006/main">
+              <a:ext uri="{FF2B5EF4-FFF2-40B4-BE49-F238E27FC236}">
+                <a16:creationId xmlns:a16="http://schemas.microsoft.com/office/drawing/2014/main" id="{6D9ED615-98FC-46CD-95A8-5DD1B70A05C5}"/>
+              </a:ext>
+            </a:extLst>
+          </p:cNvPr>
+          <p:cNvSpPr>
+            <a:spLocks xmlns:a="http://schemas.openxmlformats.org/drawingml/2006/main" noGrp="1"/>
+          </p:cNvSpPr>
+          <p:nvPr/>
+        </p:nvSpPr>
+        <p:spPr>
+          <a:xfrm xmlns:a="http://schemas.openxmlformats.org/drawingml/2006/main">
+            <a:off x="3733800" y="2590800"/>
+            <a:ext cx="142875" cy="66675"/>
+          </a:xfrm>
+          <a:prstGeom xmlns:a="http://schemas.openxmlformats.org/drawingml/2006/main" prst="rightArrow">
+            <a:avLst/>
+          </a:prstGeom>
+          <a:solidFill xmlns:a="http://schemas.openxmlformats.org/drawingml/2006/main">
+            <a:srgbClr val="168765"/>
+          </a:solidFill>
+          <a:ln xmlns:a="http://schemas.openxmlformats.org/drawingml/2006/main" w="0">
+            <a:solidFill>
+              <a:srgbClr val="168765"/>
+            </a:solidFill>
+            <a:prstDash val="solid"/>
+          </a:ln>
+        </p:spPr>
+      </p:sp>
+      <p:sp>
+        <p:nvSpPr>
+          <p:cNvPr id="18" name="graph-step-2">
+            <a:extLst xmlns:a="http://schemas.openxmlformats.org/drawingml/2006/main">
+              <a:ext uri="{FF2B5EF4-FFF2-40B4-BE49-F238E27FC236}">
+                <a16:creationId xmlns:a16="http://schemas.microsoft.com/office/drawing/2014/main" id="{6B8D9688-B4B5-486B-9C47-9A700535E5FA}"/>
+              </a:ext>
+            </a:extLst>
+          </p:cNvPr>
+          <p:cNvSpPr>
+            <a:spLocks xmlns:a="http://schemas.openxmlformats.org/drawingml/2006/main" noGrp="1"/>
+          </p:cNvSpPr>
+          <p:nvPr/>
+        </p:nvSpPr>
+        <p:spPr>
+          <a:xfrm xmlns:a="http://schemas.openxmlformats.org/drawingml/2006/main">
+            <a:off x="4657725" y="2590800"/>
+            <a:ext cx="142875" cy="66675"/>
+          </a:xfrm>
+          <a:prstGeom xmlns:a="http://schemas.openxmlformats.org/drawingml/2006/main" prst="rightArrow">
+            <a:avLst/>
+          </a:prstGeom>
+          <a:solidFill xmlns:a="http://schemas.openxmlformats.org/drawingml/2006/main">
+            <a:srgbClr val="168765"/>
+          </a:solidFill>
+          <a:ln xmlns:a="http://schemas.openxmlformats.org/drawingml/2006/main" w="0">
+            <a:solidFill>
+              <a:srgbClr val="168765"/>
+            </a:solidFill>
+            <a:prstDash val="solid"/>
+          </a:ln>
+        </p:spPr>
+      </p:sp>
+      <p:sp>
+        <p:nvSpPr>
+          <p:cNvPr id="19" name="graph-step-3">
+            <a:extLst xmlns:a="http://schemas.openxmlformats.org/drawingml/2006/main">
+              <a:ext uri="{FF2B5EF4-FFF2-40B4-BE49-F238E27FC236}">
+                <a16:creationId xmlns:a16="http://schemas.microsoft.com/office/drawing/2014/main" id="{1BB46EDE-A0F1-48F0-8427-CD75F5515DFC}"/>
+              </a:ext>
+            </a:extLst>
+          </p:cNvPr>
+          <p:cNvSpPr>
+            <a:spLocks xmlns:a="http://schemas.openxmlformats.org/drawingml/2006/main" noGrp="1"/>
+          </p:cNvSpPr>
+          <p:nvPr/>
+        </p:nvSpPr>
+        <p:spPr>
+          <a:xfrm xmlns:a="http://schemas.openxmlformats.org/drawingml/2006/main">
+            <a:off x="5581650" y="2590800"/>
+            <a:ext cx="142875" cy="66675"/>
+          </a:xfrm>
+          <a:prstGeom xmlns:a="http://schemas.openxmlformats.org/drawingml/2006/main" prst="rightArrow">
+            <a:avLst/>
+          </a:prstGeom>
+          <a:solidFill xmlns:a="http://schemas.openxmlformats.org/drawingml/2006/main">
+            <a:srgbClr val="168765"/>
+          </a:solidFill>
+          <a:ln xmlns:a="http://schemas.openxmlformats.org/drawingml/2006/main" w="0">
+            <a:solidFill>
+              <a:srgbClr val="168765"/>
+            </a:solidFill>
+            <a:prstDash val="solid"/>
+          </a:ln>
+        </p:spPr>
+      </p:sp>
+      <p:sp>
+        <p:nvSpPr>
+          <p:cNvPr id="20" name="desc-step-1">
+            <a:extLst xmlns:a="http://schemas.openxmlformats.org/drawingml/2006/main">
+              <a:ext uri="{FF2B5EF4-FFF2-40B4-BE49-F238E27FC236}">
+                <a16:creationId xmlns:a16="http://schemas.microsoft.com/office/drawing/2014/main" id="{2BE8BD4D-1620-40B4-82F5-2B2A932E01E8}"/>
+              </a:ext>
+            </a:extLst>
+          </p:cNvPr>
+          <p:cNvSpPr>
+            <a:spLocks xmlns:a="http://schemas.openxmlformats.org/drawingml/2006/main" noGrp="1"/>
+          </p:cNvSpPr>
+          <p:nvPr/>
+        </p:nvSpPr>
+        <p:spPr>
+          <a:xfrm xmlns:a="http://schemas.openxmlformats.org/drawingml/2006/main">
+            <a:off x="3733800" y="4657725"/>
+            <a:ext cx="142875" cy="85725"/>
           </a:xfrm>
           <a:prstGeom xmlns:a="http://schemas.openxmlformats.org/drawingml/2006/main" prst="rightArrow">
             <a:avLst/>
@@ -1785,22 +1891,88 @@
       </p:sp>
       <p:sp>
         <p:nvSpPr>
-          <p:cNvPr id="17" name="graph-step-1">
-            <a:extLst xmlns:a="http://schemas.openxmlformats.org/drawingml/2006/main">
-              <a:ext uri="{FF2B5EF4-FFF2-40B4-BE49-F238E27FC236}">
-                <a16:creationId xmlns:a16="http://schemas.microsoft.com/office/drawing/2014/main" id="{6D9ED615-98FC-46CD-95A8-5DD1B70A05C5}"/>
-              </a:ext>
-            </a:extLst>
-          </p:cNvPr>
-          <p:cNvSpPr>
-            <a:spLocks xmlns:a="http://schemas.openxmlformats.org/drawingml/2006/main" noGrp="1"/>
-          </p:cNvSpPr>
-          <p:nvPr/>
-        </p:nvSpPr>
-        <p:spPr>
-          <a:xfrm xmlns:a="http://schemas.openxmlformats.org/drawingml/2006/main">
-            <a:off x="3733800" y="2752725"/>
+          <p:cNvPr id="21" name="desc-step-2">
+            <a:extLst xmlns:a="http://schemas.openxmlformats.org/drawingml/2006/main">
+              <a:ext uri="{FF2B5EF4-FFF2-40B4-BE49-F238E27FC236}">
+                <a16:creationId xmlns:a16="http://schemas.microsoft.com/office/drawing/2014/main" id="{3597897F-5478-43E6-AD68-704E8DBB7D9C}"/>
+              </a:ext>
+            </a:extLst>
+          </p:cNvPr>
+          <p:cNvSpPr>
+            <a:spLocks xmlns:a="http://schemas.openxmlformats.org/drawingml/2006/main" noGrp="1"/>
+          </p:cNvSpPr>
+          <p:nvPr/>
+        </p:nvSpPr>
+        <p:spPr>
+          <a:xfrm xmlns:a="http://schemas.openxmlformats.org/drawingml/2006/main">
+            <a:off x="4657725" y="4657725"/>
             <a:ext cx="142875" cy="85725"/>
+          </a:xfrm>
+          <a:prstGeom xmlns:a="http://schemas.openxmlformats.org/drawingml/2006/main" prst="rightArrow">
+            <a:avLst/>
+          </a:prstGeom>
+          <a:solidFill xmlns:a="http://schemas.openxmlformats.org/drawingml/2006/main">
+            <a:srgbClr val="2F78E8"/>
+          </a:solidFill>
+          <a:ln xmlns:a="http://schemas.openxmlformats.org/drawingml/2006/main" w="0">
+            <a:solidFill>
+              <a:srgbClr val="2F78E8"/>
+            </a:solidFill>
+            <a:prstDash val="solid"/>
+          </a:ln>
+        </p:spPr>
+      </p:sp>
+      <p:sp>
+        <p:nvSpPr>
+          <p:cNvPr id="22" name="desc-step-3">
+            <a:extLst xmlns:a="http://schemas.openxmlformats.org/drawingml/2006/main">
+              <a:ext uri="{FF2B5EF4-FFF2-40B4-BE49-F238E27FC236}">
+                <a16:creationId xmlns:a16="http://schemas.microsoft.com/office/drawing/2014/main" id="{C1E7ABB8-8F7D-4B69-AC2F-6833927253E4}"/>
+              </a:ext>
+            </a:extLst>
+          </p:cNvPr>
+          <p:cNvSpPr>
+            <a:spLocks xmlns:a="http://schemas.openxmlformats.org/drawingml/2006/main" noGrp="1"/>
+          </p:cNvSpPr>
+          <p:nvPr/>
+        </p:nvSpPr>
+        <p:spPr>
+          <a:xfrm xmlns:a="http://schemas.openxmlformats.org/drawingml/2006/main">
+            <a:off x="5581650" y="4657725"/>
+            <a:ext cx="142875" cy="85725"/>
+          </a:xfrm>
+          <a:prstGeom xmlns:a="http://schemas.openxmlformats.org/drawingml/2006/main" prst="rightArrow">
+            <a:avLst/>
+          </a:prstGeom>
+          <a:solidFill xmlns:a="http://schemas.openxmlformats.org/drawingml/2006/main">
+            <a:srgbClr val="2F78E8"/>
+          </a:solidFill>
+          <a:ln xmlns:a="http://schemas.openxmlformats.org/drawingml/2006/main" w="0">
+            <a:solidFill>
+              <a:srgbClr val="2F78E8"/>
+            </a:solidFill>
+            <a:prstDash val="solid"/>
+          </a:ln>
+        </p:spPr>
+      </p:sp>
+      <p:sp>
+        <p:nvSpPr>
+          <p:cNvPr id="23" name="graph-to-rec">
+            <a:extLst xmlns:a="http://schemas.openxmlformats.org/drawingml/2006/main">
+              <a:ext uri="{FF2B5EF4-FFF2-40B4-BE49-F238E27FC236}">
+                <a16:creationId xmlns:a16="http://schemas.microsoft.com/office/drawing/2014/main" id="{CDF23197-584B-4946-B28B-EF4FCCCDC3EE}"/>
+              </a:ext>
+            </a:extLst>
+          </p:cNvPr>
+          <p:cNvSpPr>
+            <a:spLocks xmlns:a="http://schemas.openxmlformats.org/drawingml/2006/main" noGrp="1"/>
+          </p:cNvSpPr>
+          <p:nvPr/>
+        </p:nvSpPr>
+        <p:spPr>
+          <a:xfrm xmlns:a="http://schemas.openxmlformats.org/drawingml/2006/main">
+            <a:off x="7010400" y="2562225"/>
+            <a:ext cx="723900" cy="85725"/>
           </a:xfrm>
           <a:prstGeom xmlns:a="http://schemas.openxmlformats.org/drawingml/2006/main" prst="rightArrow">
             <a:avLst/>
@@ -1818,24 +1990,90 @@
       </p:sp>
       <p:sp>
         <p:nvSpPr>
-          <p:cNvPr id="18" name="graph-step-2">
-            <a:extLst xmlns:a="http://schemas.openxmlformats.org/drawingml/2006/main">
-              <a:ext uri="{FF2B5EF4-FFF2-40B4-BE49-F238E27FC236}">
-                <a16:creationId xmlns:a16="http://schemas.microsoft.com/office/drawing/2014/main" id="{6B8D9688-B4B5-486B-9C47-9A700535E5FA}"/>
-              </a:ext>
-            </a:extLst>
-          </p:cNvPr>
-          <p:cNvSpPr>
-            <a:spLocks xmlns:a="http://schemas.openxmlformats.org/drawingml/2006/main" noGrp="1"/>
-          </p:cNvSpPr>
-          <p:nvPr/>
-        </p:nvSpPr>
-        <p:spPr>
-          <a:xfrm xmlns:a="http://schemas.openxmlformats.org/drawingml/2006/main">
-            <a:off x="4657725" y="2752725"/>
-            <a:ext cx="142875" cy="85725"/>
+          <p:cNvPr id="24" name="desc-to-rec">
+            <a:extLst xmlns:a="http://schemas.openxmlformats.org/drawingml/2006/main">
+              <a:ext uri="{FF2B5EF4-FFF2-40B4-BE49-F238E27FC236}">
+                <a16:creationId xmlns:a16="http://schemas.microsoft.com/office/drawing/2014/main" id="{ADE6D2A2-682B-4499-B3DF-B415A7ED8256}"/>
+              </a:ext>
+            </a:extLst>
+          </p:cNvPr>
+          <p:cNvSpPr>
+            <a:spLocks xmlns:a="http://schemas.openxmlformats.org/drawingml/2006/main" noGrp="1"/>
+          </p:cNvSpPr>
+          <p:nvPr/>
+        </p:nvSpPr>
+        <p:spPr>
+          <a:xfrm xmlns:a="http://schemas.openxmlformats.org/drawingml/2006/main">
+            <a:off x="7010400" y="4629150"/>
+            <a:ext cx="723900" cy="85725"/>
           </a:xfrm>
           <a:prstGeom xmlns:a="http://schemas.openxmlformats.org/drawingml/2006/main" prst="rightArrow">
+            <a:avLst/>
+          </a:prstGeom>
+          <a:solidFill xmlns:a="http://schemas.openxmlformats.org/drawingml/2006/main">
+            <a:srgbClr val="2F78E8"/>
+          </a:solidFill>
+          <a:ln xmlns:a="http://schemas.openxmlformats.org/drawingml/2006/main" w="0">
+            <a:solidFill>
+              <a:srgbClr val="2F78E8"/>
+            </a:solidFill>
+            <a:prstDash val="solid"/>
+          </a:ln>
+        </p:spPr>
+      </p:sp>
+      <p:sp>
+        <p:nvSpPr>
+          <p:cNvPr id="25" name="id-bypass">
+            <a:extLst xmlns:a="http://schemas.openxmlformats.org/drawingml/2006/main">
+              <a:ext uri="{FF2B5EF4-FFF2-40B4-BE49-F238E27FC236}">
+                <a16:creationId xmlns:a16="http://schemas.microsoft.com/office/drawing/2014/main" id="{2538F674-78DB-45BB-A9DB-75F9B952568B}"/>
+              </a:ext>
+            </a:extLst>
+          </p:cNvPr>
+          <p:cNvSpPr>
+            <a:spLocks xmlns:a="http://schemas.openxmlformats.org/drawingml/2006/main" noGrp="1"/>
+          </p:cNvSpPr>
+          <p:nvPr/>
+        </p:nvSpPr>
+        <p:spPr>
+          <a:xfrm xmlns:a="http://schemas.openxmlformats.org/drawingml/2006/main">
+            <a:off x="2266950" y="4000500"/>
+            <a:ext cx="5467350" cy="76200"/>
+          </a:xfrm>
+          <a:prstGeom xmlns:a="http://schemas.openxmlformats.org/drawingml/2006/main" prst="rightArrow">
+            <a:avLst/>
+          </a:prstGeom>
+          <a:solidFill xmlns:a="http://schemas.openxmlformats.org/drawingml/2006/main">
+            <a:srgbClr val="8D95A1"/>
+          </a:solidFill>
+          <a:ln xmlns:a="http://schemas.openxmlformats.org/drawingml/2006/main" w="0">
+            <a:solidFill>
+              <a:srgbClr val="8D95A1"/>
+            </a:solidFill>
+            <a:prstDash val="solid"/>
+          </a:ln>
+        </p:spPr>
+      </p:sp>
+      <p:sp>
+        <p:nvSpPr>
+          <p:cNvPr id="26" name="graph-embed-to-sasrec">
+            <a:extLst xmlns:a="http://schemas.openxmlformats.org/drawingml/2006/main">
+              <a:ext uri="{FF2B5EF4-FFF2-40B4-BE49-F238E27FC236}">
+                <a16:creationId xmlns:a16="http://schemas.microsoft.com/office/drawing/2014/main" id="{A3716D83-10C6-4AEF-B2EF-282DC8C36802}"/>
+              </a:ext>
+            </a:extLst>
+          </p:cNvPr>
+          <p:cNvSpPr>
+            <a:spLocks xmlns:a="http://schemas.openxmlformats.org/drawingml/2006/main" noGrp="1"/>
+          </p:cNvSpPr>
+          <p:nvPr/>
+        </p:nvSpPr>
+        <p:spPr>
+          <a:xfrm xmlns:a="http://schemas.openxmlformats.org/drawingml/2006/main">
+            <a:off x="8620125" y="2752725"/>
+            <a:ext cx="95250" cy="57150"/>
+          </a:xfrm>
+          <a:prstGeom xmlns:a="http://schemas.openxmlformats.org/drawingml/2006/main" prst="downArrow">
             <a:avLst/>
           </a:prstGeom>
           <a:solidFill xmlns:a="http://schemas.openxmlformats.org/drawingml/2006/main">
@@ -1851,57 +2089,24 @@
       </p:sp>
       <p:sp>
         <p:nvSpPr>
-          <p:cNvPr id="19" name="graph-step-3">
-            <a:extLst xmlns:a="http://schemas.openxmlformats.org/drawingml/2006/main">
-              <a:ext uri="{FF2B5EF4-FFF2-40B4-BE49-F238E27FC236}">
-                <a16:creationId xmlns:a16="http://schemas.microsoft.com/office/drawing/2014/main" id="{1BB46EDE-A0F1-48F0-8427-CD75F5515DFC}"/>
-              </a:ext>
-            </a:extLst>
-          </p:cNvPr>
-          <p:cNvSpPr>
-            <a:spLocks xmlns:a="http://schemas.openxmlformats.org/drawingml/2006/main" noGrp="1"/>
-          </p:cNvSpPr>
-          <p:nvPr/>
-        </p:nvSpPr>
-        <p:spPr>
-          <a:xfrm xmlns:a="http://schemas.openxmlformats.org/drawingml/2006/main">
-            <a:off x="5581650" y="2752725"/>
-            <a:ext cx="142875" cy="85725"/>
-          </a:xfrm>
-          <a:prstGeom xmlns:a="http://schemas.openxmlformats.org/drawingml/2006/main" prst="rightArrow">
-            <a:avLst/>
-          </a:prstGeom>
-          <a:solidFill xmlns:a="http://schemas.openxmlformats.org/drawingml/2006/main">
-            <a:srgbClr val="168765"/>
-          </a:solidFill>
-          <a:ln xmlns:a="http://schemas.openxmlformats.org/drawingml/2006/main" w="0">
-            <a:solidFill>
-              <a:srgbClr val="168765"/>
-            </a:solidFill>
-            <a:prstDash val="solid"/>
-          </a:ln>
-        </p:spPr>
-      </p:sp>
-      <p:sp>
-        <p:nvSpPr>
-          <p:cNvPr id="20" name="desc-step-1">
-            <a:extLst xmlns:a="http://schemas.openxmlformats.org/drawingml/2006/main">
-              <a:ext uri="{FF2B5EF4-FFF2-40B4-BE49-F238E27FC236}">
-                <a16:creationId xmlns:a16="http://schemas.microsoft.com/office/drawing/2014/main" id="{2BE8BD4D-1620-40B4-82F5-2B2A932E01E8}"/>
-              </a:ext>
-            </a:extLst>
-          </p:cNvPr>
-          <p:cNvSpPr>
-            <a:spLocks xmlns:a="http://schemas.openxmlformats.org/drawingml/2006/main" noGrp="1"/>
-          </p:cNvSpPr>
-          <p:nvPr/>
-        </p:nvSpPr>
-        <p:spPr>
-          <a:xfrm xmlns:a="http://schemas.openxmlformats.org/drawingml/2006/main">
-            <a:off x="3733800" y="4657725"/>
-            <a:ext cx="142875" cy="85725"/>
-          </a:xfrm>
-          <a:prstGeom xmlns:a="http://schemas.openxmlformats.org/drawingml/2006/main" prst="rightArrow">
+          <p:cNvPr id="27" name="desc-embed-to-sasrec">
+            <a:extLst xmlns:a="http://schemas.openxmlformats.org/drawingml/2006/main">
+              <a:ext uri="{FF2B5EF4-FFF2-40B4-BE49-F238E27FC236}">
+                <a16:creationId xmlns:a16="http://schemas.microsoft.com/office/drawing/2014/main" id="{A8FFFB18-CE68-4F3F-9524-574789F37C5B}"/>
+              </a:ext>
+            </a:extLst>
+          </p:cNvPr>
+          <p:cNvSpPr>
+            <a:spLocks xmlns:a="http://schemas.openxmlformats.org/drawingml/2006/main" noGrp="1"/>
+          </p:cNvSpPr>
+          <p:nvPr/>
+        </p:nvSpPr>
+        <p:spPr>
+          <a:xfrm xmlns:a="http://schemas.openxmlformats.org/drawingml/2006/main">
+            <a:off x="8620125" y="4800600"/>
+            <a:ext cx="95250" cy="57150"/>
+          </a:xfrm>
+          <a:prstGeom xmlns:a="http://schemas.openxmlformats.org/drawingml/2006/main" prst="downArrow">
             <a:avLst/>
           </a:prstGeom>
           <a:solidFill xmlns:a="http://schemas.openxmlformats.org/drawingml/2006/main">
@@ -1915,246 +2120,15 @@
           </a:ln>
         </p:spPr>
       </p:sp>
-      <p:sp>
-        <p:nvSpPr>
-          <p:cNvPr id="21" name="desc-step-2">
-            <a:extLst xmlns:a="http://schemas.openxmlformats.org/drawingml/2006/main">
-              <a:ext uri="{FF2B5EF4-FFF2-40B4-BE49-F238E27FC236}">
-                <a16:creationId xmlns:a16="http://schemas.microsoft.com/office/drawing/2014/main" id="{3597897F-5478-43E6-AD68-704E8DBB7D9C}"/>
-              </a:ext>
-            </a:extLst>
-          </p:cNvPr>
-          <p:cNvSpPr>
-            <a:spLocks xmlns:a="http://schemas.openxmlformats.org/drawingml/2006/main" noGrp="1"/>
-          </p:cNvSpPr>
-          <p:nvPr/>
-        </p:nvSpPr>
-        <p:spPr>
-          <a:xfrm xmlns:a="http://schemas.openxmlformats.org/drawingml/2006/main">
-            <a:off x="4657725" y="4657725"/>
-            <a:ext cx="142875" cy="85725"/>
-          </a:xfrm>
-          <a:prstGeom xmlns:a="http://schemas.openxmlformats.org/drawingml/2006/main" prst="rightArrow">
-            <a:avLst/>
-          </a:prstGeom>
-          <a:solidFill xmlns:a="http://schemas.openxmlformats.org/drawingml/2006/main">
-            <a:srgbClr val="2F78E8"/>
-          </a:solidFill>
-          <a:ln xmlns:a="http://schemas.openxmlformats.org/drawingml/2006/main" w="0">
-            <a:solidFill>
-              <a:srgbClr val="2F78E8"/>
-            </a:solidFill>
-            <a:prstDash val="solid"/>
-          </a:ln>
-        </p:spPr>
-      </p:sp>
-      <p:sp>
-        <p:nvSpPr>
-          <p:cNvPr id="22" name="desc-step-3">
-            <a:extLst xmlns:a="http://schemas.openxmlformats.org/drawingml/2006/main">
-              <a:ext uri="{FF2B5EF4-FFF2-40B4-BE49-F238E27FC236}">
-                <a16:creationId xmlns:a16="http://schemas.microsoft.com/office/drawing/2014/main" id="{C1E7ABB8-8F7D-4B69-AC2F-6833927253E4}"/>
-              </a:ext>
-            </a:extLst>
-          </p:cNvPr>
-          <p:cNvSpPr>
-            <a:spLocks xmlns:a="http://schemas.openxmlformats.org/drawingml/2006/main" noGrp="1"/>
-          </p:cNvSpPr>
-          <p:nvPr/>
-        </p:nvSpPr>
-        <p:spPr>
-          <a:xfrm xmlns:a="http://schemas.openxmlformats.org/drawingml/2006/main">
-            <a:off x="5581650" y="4657725"/>
-            <a:ext cx="142875" cy="85725"/>
-          </a:xfrm>
-          <a:prstGeom xmlns:a="http://schemas.openxmlformats.org/drawingml/2006/main" prst="rightArrow">
-            <a:avLst/>
-          </a:prstGeom>
-          <a:solidFill xmlns:a="http://schemas.openxmlformats.org/drawingml/2006/main">
-            <a:srgbClr val="2F78E8"/>
-          </a:solidFill>
-          <a:ln xmlns:a="http://schemas.openxmlformats.org/drawingml/2006/main" w="0">
-            <a:solidFill>
-              <a:srgbClr val="2F78E8"/>
-            </a:solidFill>
-            <a:prstDash val="solid"/>
-          </a:ln>
-        </p:spPr>
-      </p:sp>
-      <p:sp>
-        <p:nvSpPr>
-          <p:cNvPr id="23" name="graph-to-rec">
-            <a:extLst xmlns:a="http://schemas.openxmlformats.org/drawingml/2006/main">
-              <a:ext uri="{FF2B5EF4-FFF2-40B4-BE49-F238E27FC236}">
-                <a16:creationId xmlns:a16="http://schemas.microsoft.com/office/drawing/2014/main" id="{CDF23197-584B-4946-B28B-EF4FCCCDC3EE}"/>
-              </a:ext>
-            </a:extLst>
-          </p:cNvPr>
-          <p:cNvSpPr>
-            <a:spLocks xmlns:a="http://schemas.openxmlformats.org/drawingml/2006/main" noGrp="1"/>
-          </p:cNvSpPr>
-          <p:nvPr/>
-        </p:nvSpPr>
-        <p:spPr>
-          <a:xfrm xmlns:a="http://schemas.openxmlformats.org/drawingml/2006/main">
-            <a:off x="7010400" y="2286000"/>
-            <a:ext cx="723900" cy="104775"/>
-          </a:xfrm>
-          <a:prstGeom xmlns:a="http://schemas.openxmlformats.org/drawingml/2006/main" prst="rightArrow">
-            <a:avLst/>
-          </a:prstGeom>
-          <a:solidFill xmlns:a="http://schemas.openxmlformats.org/drawingml/2006/main">
-            <a:srgbClr val="168765"/>
-          </a:solidFill>
-          <a:ln xmlns:a="http://schemas.openxmlformats.org/drawingml/2006/main" w="0">
-            <a:solidFill>
-              <a:srgbClr val="168765"/>
-            </a:solidFill>
-            <a:prstDash val="solid"/>
-          </a:ln>
-        </p:spPr>
-      </p:sp>
-      <p:sp>
-        <p:nvSpPr>
-          <p:cNvPr id="24" name="desc-to-rec">
-            <a:extLst xmlns:a="http://schemas.openxmlformats.org/drawingml/2006/main">
-              <a:ext uri="{FF2B5EF4-FFF2-40B4-BE49-F238E27FC236}">
-                <a16:creationId xmlns:a16="http://schemas.microsoft.com/office/drawing/2014/main" id="{ADE6D2A2-682B-4499-B3DF-B415A7ED8256}"/>
-              </a:ext>
-            </a:extLst>
-          </p:cNvPr>
-          <p:cNvSpPr>
-            <a:spLocks xmlns:a="http://schemas.openxmlformats.org/drawingml/2006/main" noGrp="1"/>
-          </p:cNvSpPr>
-          <p:nvPr/>
-        </p:nvSpPr>
-        <p:spPr>
-          <a:xfrm xmlns:a="http://schemas.openxmlformats.org/drawingml/2006/main">
-            <a:off x="7010400" y="4191000"/>
-            <a:ext cx="723900" cy="104775"/>
-          </a:xfrm>
-          <a:prstGeom xmlns:a="http://schemas.openxmlformats.org/drawingml/2006/main" prst="rightArrow">
-            <a:avLst/>
-          </a:prstGeom>
-          <a:solidFill xmlns:a="http://schemas.openxmlformats.org/drawingml/2006/main">
-            <a:srgbClr val="2F78E8"/>
-          </a:solidFill>
-          <a:ln xmlns:a="http://schemas.openxmlformats.org/drawingml/2006/main" w="0">
-            <a:solidFill>
-              <a:srgbClr val="2F78E8"/>
-            </a:solidFill>
-            <a:prstDash val="solid"/>
-          </a:ln>
-        </p:spPr>
-      </p:sp>
-      <p:sp>
-        <p:nvSpPr>
-          <p:cNvPr id="25" name="id-bypass">
-            <a:extLst xmlns:a="http://schemas.openxmlformats.org/drawingml/2006/main">
-              <a:ext uri="{FF2B5EF4-FFF2-40B4-BE49-F238E27FC236}">
-                <a16:creationId xmlns:a16="http://schemas.microsoft.com/office/drawing/2014/main" id="{2538F674-78DB-45BB-A9DB-75F9B952568B}"/>
-              </a:ext>
-            </a:extLst>
-          </p:cNvPr>
-          <p:cNvSpPr>
-            <a:spLocks xmlns:a="http://schemas.openxmlformats.org/drawingml/2006/main" noGrp="1"/>
-          </p:cNvSpPr>
-          <p:nvPr/>
-        </p:nvSpPr>
-        <p:spPr>
-          <a:xfrm xmlns:a="http://schemas.openxmlformats.org/drawingml/2006/main">
-            <a:off x="2266950" y="3705225"/>
-            <a:ext cx="5467350" cy="85725"/>
-          </a:xfrm>
-          <a:prstGeom xmlns:a="http://schemas.openxmlformats.org/drawingml/2006/main" prst="rightArrow">
-            <a:avLst/>
-          </a:prstGeom>
-          <a:solidFill xmlns:a="http://schemas.openxmlformats.org/drawingml/2006/main">
-            <a:srgbClr val="8D95A1"/>
-          </a:solidFill>
-          <a:ln xmlns:a="http://schemas.openxmlformats.org/drawingml/2006/main" w="0">
-            <a:solidFill>
-              <a:srgbClr val="8D95A1"/>
-            </a:solidFill>
-            <a:prstDash val="solid"/>
-          </a:ln>
-        </p:spPr>
-      </p:sp>
-      <p:sp>
-        <p:nvSpPr>
-          <p:cNvPr id="26" name="graph-embed-to-sasrec">
-            <a:extLst xmlns:a="http://schemas.openxmlformats.org/drawingml/2006/main">
-              <a:ext uri="{FF2B5EF4-FFF2-40B4-BE49-F238E27FC236}">
-                <a16:creationId xmlns:a16="http://schemas.microsoft.com/office/drawing/2014/main" id="{A3716D83-10C6-4AEF-B2EF-282DC8C36802}"/>
-              </a:ext>
-            </a:extLst>
-          </p:cNvPr>
-          <p:cNvSpPr>
-            <a:spLocks xmlns:a="http://schemas.openxmlformats.org/drawingml/2006/main" noGrp="1"/>
-          </p:cNvSpPr>
-          <p:nvPr/>
-        </p:nvSpPr>
-        <p:spPr>
-          <a:xfrm xmlns:a="http://schemas.openxmlformats.org/drawingml/2006/main">
-            <a:off x="8620125" y="2505075"/>
-            <a:ext cx="95250" cy="171450"/>
-          </a:xfrm>
-          <a:prstGeom xmlns:a="http://schemas.openxmlformats.org/drawingml/2006/main" prst="downArrow">
-            <a:avLst/>
-          </a:prstGeom>
-          <a:solidFill xmlns:a="http://schemas.openxmlformats.org/drawingml/2006/main">
-            <a:srgbClr val="168765"/>
-          </a:solidFill>
-          <a:ln xmlns:a="http://schemas.openxmlformats.org/drawingml/2006/main" w="0">
-            <a:solidFill>
-              <a:srgbClr val="168765"/>
-            </a:solidFill>
-            <a:prstDash val="solid"/>
-          </a:ln>
-        </p:spPr>
-      </p:sp>
-      <p:sp>
-        <p:nvSpPr>
-          <p:cNvPr id="27" name="desc-embed-to-sasrec">
-            <a:extLst xmlns:a="http://schemas.openxmlformats.org/drawingml/2006/main">
-              <a:ext uri="{FF2B5EF4-FFF2-40B4-BE49-F238E27FC236}">
-                <a16:creationId xmlns:a16="http://schemas.microsoft.com/office/drawing/2014/main" id="{A8FFFB18-CE68-4F3F-9524-574789F37C5B}"/>
-              </a:ext>
-            </a:extLst>
-          </p:cNvPr>
-          <p:cNvSpPr>
-            <a:spLocks xmlns:a="http://schemas.openxmlformats.org/drawingml/2006/main" noGrp="1"/>
-          </p:cNvSpPr>
-          <p:nvPr/>
-        </p:nvSpPr>
-        <p:spPr>
-          <a:xfrm xmlns:a="http://schemas.openxmlformats.org/drawingml/2006/main">
-            <a:off x="8620125" y="4410075"/>
-            <a:ext cx="95250" cy="171450"/>
-          </a:xfrm>
-          <a:prstGeom xmlns:a="http://schemas.openxmlformats.org/drawingml/2006/main" prst="downArrow">
-            <a:avLst/>
-          </a:prstGeom>
-          <a:solidFill xmlns:a="http://schemas.openxmlformats.org/drawingml/2006/main">
-            <a:srgbClr val="2F78E8"/>
-          </a:solidFill>
-          <a:ln xmlns:a="http://schemas.openxmlformats.org/drawingml/2006/main" w="0">
-            <a:solidFill>
-              <a:srgbClr val="2F78E8"/>
-            </a:solidFill>
-            <a:prstDash val="solid"/>
-          </a:ln>
-        </p:spPr>
-      </p:sp>
       <p:cxnSp>
         <p:nvCxnSpPr>
-          <p:cNvPr id="125" name="graph-to-evaluation-collector"/>
+          <p:cNvPr id="337" name="graph-to-evaluation-collector"/>
           <p:cNvCxnSpPr/>
           <p:nvPr/>
         </p:nvCxnSpPr>
         <p:spPr>
           <a:xfrm xmlns:a="http://schemas.openxmlformats.org/drawingml/2006/main">
-            <a:off x="9601200" y="2914650"/>
+            <a:off x="9601200" y="2981325"/>
             <a:ext cx="285750" cy="0"/>
           </a:xfrm>
           <a:prstGeom xmlns:a="http://schemas.openxmlformats.org/drawingml/2006/main" prst="straightConnector1">
@@ -2170,13 +2144,13 @@
       </p:cxnSp>
       <p:cxnSp>
         <p:nvCxnSpPr>
-          <p:cNvPr id="126" name="id-to-evaluation-collector"/>
+          <p:cNvPr id="338" name="id-to-evaluation-collector"/>
           <p:cNvCxnSpPr/>
           <p:nvPr/>
         </p:nvCxnSpPr>
         <p:spPr>
           <a:xfrm xmlns:a="http://schemas.openxmlformats.org/drawingml/2006/main">
-            <a:off x="9601200" y="3743325"/>
+            <a:off x="9601200" y="4143375"/>
             <a:ext cx="285750" cy="0"/>
           </a:xfrm>
           <a:prstGeom xmlns:a="http://schemas.openxmlformats.org/drawingml/2006/main" prst="straightConnector1">
@@ -2192,13 +2166,13 @@
       </p:cxnSp>
       <p:cxnSp>
         <p:nvCxnSpPr>
-          <p:cNvPr id="127" name="desc-to-evaluation-collector"/>
+          <p:cNvPr id="339" name="desc-to-evaluation-collector"/>
           <p:cNvCxnSpPr/>
           <p:nvPr/>
         </p:nvCxnSpPr>
         <p:spPr>
           <a:xfrm xmlns:a="http://schemas.openxmlformats.org/drawingml/2006/main">
-            <a:off x="9601200" y="4819650"/>
+            <a:off x="9601200" y="5029200"/>
             <a:ext cx="285750" cy="0"/>
           </a:xfrm>
           <a:prstGeom xmlns:a="http://schemas.openxmlformats.org/drawingml/2006/main" prst="straightConnector1">
@@ -2214,14 +2188,14 @@
       </p:cxnSp>
       <p:cxnSp>
         <p:nvCxnSpPr>
-          <p:cNvPr id="128" name="evaluation-collector"/>
+          <p:cNvPr id="340" name="evaluation-collector"/>
           <p:cNvCxnSpPr/>
           <p:nvPr/>
         </p:nvCxnSpPr>
         <p:spPr>
           <a:xfrm xmlns:a="http://schemas.openxmlformats.org/drawingml/2006/main">
             <a:off x="9886950" y="2162175"/>
-            <a:ext cx="0" cy="2657475"/>
+            <a:ext cx="0" cy="2867025"/>
           </a:xfrm>
           <a:prstGeom xmlns:a="http://schemas.openxmlformats.org/drawingml/2006/main" prst="straightConnector1">
             <a:avLst/>
@@ -2302,6 +2276,7 @@
           <a:lstStyle xmlns:a="http://schemas.openxmlformats.org/drawingml/2006/main"/>
           <a:p xmlns:a="http://schemas.openxmlformats.org/drawingml/2006/main">
             <a:pPr algn="l">
+              <a:buNone/>
               <a:defRPr sz="1575" b="1">
                 <a:solidFill>
                   <a:srgbClr val="111827"/>
@@ -2360,6 +2335,7 @@
           <a:lstStyle xmlns:a="http://schemas.openxmlformats.org/drawingml/2006/main"/>
           <a:p xmlns:a="http://schemas.openxmlformats.org/drawingml/2006/main">
             <a:pPr algn="l">
+              <a:buNone/>
               <a:defRPr sz="1125">
                 <a:solidFill>
                   <a:srgbClr val="667085"/>
@@ -2399,7 +2375,7 @@
         </p:nvSpPr>
         <p:spPr>
           <a:xfrm xmlns:a="http://schemas.openxmlformats.org/drawingml/2006/main">
-            <a:off x="628650" y="2571750"/>
+            <a:off x="628650" y="3648075"/>
             <a:ext cx="1562100" cy="781050"/>
           </a:xfrm>
           <a:prstGeom xmlns:a="http://schemas.openxmlformats.org/drawingml/2006/main" prst="roundRect">
@@ -2434,7 +2410,7 @@
         </p:nvSpPr>
         <p:spPr>
           <a:xfrm xmlns:a="http://schemas.openxmlformats.org/drawingml/2006/main">
-            <a:off x="723900" y="2647950"/>
+            <a:off x="723900" y="3724275"/>
             <a:ext cx="1371600" cy="285750"/>
           </a:xfrm>
           <a:prstGeom xmlns:a="http://schemas.openxmlformats.org/drawingml/2006/main" prst="rect">
@@ -2453,6 +2429,7 @@
           <a:lstStyle xmlns:a="http://schemas.openxmlformats.org/drawingml/2006/main"/>
           <a:p xmlns:a="http://schemas.openxmlformats.org/drawingml/2006/main">
             <a:pPr algn="ctr">
+              <a:buNone/>
               <a:defRPr sz="1275" b="1">
                 <a:solidFill>
                   <a:srgbClr val="111827"/>
@@ -2492,7 +2469,7 @@
         </p:nvSpPr>
         <p:spPr>
           <a:xfrm xmlns:a="http://schemas.openxmlformats.org/drawingml/2006/main">
-            <a:off x="704850" y="2943225"/>
+            <a:off x="704850" y="4019550"/>
             <a:ext cx="1409700" cy="352425"/>
           </a:xfrm>
           <a:prstGeom xmlns:a="http://schemas.openxmlformats.org/drawingml/2006/main" prst="rect">
@@ -2511,6 +2488,7 @@
           <a:lstStyle xmlns:a="http://schemas.openxmlformats.org/drawingml/2006/main"/>
           <a:p xmlns:a="http://schemas.openxmlformats.org/drawingml/2006/main">
             <a:pPr algn="ctr">
+              <a:buNone/>
               <a:defRPr sz="1050">
                 <a:solidFill>
                   <a:srgbClr val="667085"/>
@@ -2550,7 +2528,7 @@
         </p:nvSpPr>
         <p:spPr>
           <a:xfrm xmlns:a="http://schemas.openxmlformats.org/drawingml/2006/main">
-            <a:off x="628650" y="4333875"/>
+            <a:off x="628650" y="2266950"/>
             <a:ext cx="1562100" cy="781050"/>
           </a:xfrm>
           <a:prstGeom xmlns:a="http://schemas.openxmlformats.org/drawingml/2006/main" prst="roundRect">
@@ -2585,7 +2563,7 @@
         </p:nvSpPr>
         <p:spPr>
           <a:xfrm xmlns:a="http://schemas.openxmlformats.org/drawingml/2006/main">
-            <a:off x="723900" y="4410075"/>
+            <a:off x="723900" y="2343150"/>
             <a:ext cx="1371600" cy="285750"/>
           </a:xfrm>
           <a:prstGeom xmlns:a="http://schemas.openxmlformats.org/drawingml/2006/main" prst="rect">
@@ -2604,6 +2582,7 @@
           <a:lstStyle xmlns:a="http://schemas.openxmlformats.org/drawingml/2006/main"/>
           <a:p xmlns:a="http://schemas.openxmlformats.org/drawingml/2006/main">
             <a:pPr algn="ctr">
+              <a:buNone/>
               <a:defRPr sz="1350" b="1">
                 <a:solidFill>
                   <a:srgbClr val="111827"/>
@@ -2643,7 +2622,7 @@
         </p:nvSpPr>
         <p:spPr>
           <a:xfrm xmlns:a="http://schemas.openxmlformats.org/drawingml/2006/main">
-            <a:off x="704850" y="4705350"/>
+            <a:off x="704850" y="2638425"/>
             <a:ext cx="1409700" cy="352425"/>
           </a:xfrm>
           <a:prstGeom xmlns:a="http://schemas.openxmlformats.org/drawingml/2006/main" prst="rect">
@@ -2662,6 +2641,7 @@
           <a:lstStyle xmlns:a="http://schemas.openxmlformats.org/drawingml/2006/main"/>
           <a:p xmlns:a="http://schemas.openxmlformats.org/drawingml/2006/main">
             <a:pPr algn="ctr">
+              <a:buNone/>
               <a:defRPr sz="1050">
                 <a:solidFill>
                   <a:srgbClr val="667085"/>
@@ -2720,6 +2700,7 @@
           <a:lstStyle xmlns:a="http://schemas.openxmlformats.org/drawingml/2006/main"/>
           <a:p xmlns:a="http://schemas.openxmlformats.org/drawingml/2006/main">
             <a:pPr algn="l">
+              <a:buNone/>
               <a:defRPr sz="1050">
                 <a:solidFill>
                   <a:srgbClr val="667085"/>
@@ -2778,6 +2759,7 @@
           <a:lstStyle xmlns:a="http://schemas.openxmlformats.org/drawingml/2006/main"/>
           <a:p xmlns:a="http://schemas.openxmlformats.org/drawingml/2006/main">
             <a:pPr algn="ctr">
+              <a:buNone/>
               <a:defRPr sz="1050" b="1">
                 <a:solidFill>
                   <a:srgbClr val="667085"/>
@@ -2817,8 +2799,8 @@
         </p:nvSpPr>
         <p:spPr>
           <a:xfrm xmlns:a="http://schemas.openxmlformats.org/drawingml/2006/main">
-            <a:off x="2952750" y="2266950"/>
-            <a:ext cx="857250" cy="209550"/>
+            <a:off x="2952750" y="2247900"/>
+            <a:ext cx="2476500" cy="171450"/>
           </a:xfrm>
           <a:prstGeom xmlns:a="http://schemas.openxmlformats.org/drawingml/2006/main" prst="rect">
             <a:avLst/>
@@ -2836,6 +2818,7 @@
           <a:lstStyle xmlns:a="http://schemas.openxmlformats.org/drawingml/2006/main"/>
           <a:p xmlns:a="http://schemas.openxmlformats.org/drawingml/2006/main">
             <a:pPr algn="l">
+              <a:buNone/>
               <a:defRPr sz="975" b="1">
                 <a:solidFill>
                   <a:srgbClr val="168765"/>
@@ -2854,7 +2837,7 @@
                 <a:ea typeface="Arial"/>
                 <a:cs typeface="Arial"/>
               </a:rPr>
-              <a:t>GRAPH ARM</a:t>
+              <a:t>GRAPH ARMS  ·  QWEN + GEMINI</a:t>
             </a:r>
           </a:p>
         </p:txBody>
@@ -2894,6 +2877,7 @@
           <a:lstStyle xmlns:a="http://schemas.openxmlformats.org/drawingml/2006/main"/>
           <a:p xmlns:a="http://schemas.openxmlformats.org/drawingml/2006/main">
             <a:pPr algn="l">
+              <a:buNone/>
               <a:defRPr sz="975" b="1">
                 <a:solidFill>
                   <a:srgbClr val="2F78E8"/>
@@ -2933,8 +2917,8 @@
         </p:nvSpPr>
         <p:spPr>
           <a:xfrm xmlns:a="http://schemas.openxmlformats.org/drawingml/2006/main">
-            <a:off x="2952750" y="2543175"/>
-            <a:ext cx="781050" cy="685800"/>
+            <a:off x="2952750" y="2428875"/>
+            <a:ext cx="781050" cy="400050"/>
           </a:xfrm>
           <a:prstGeom xmlns:a="http://schemas.openxmlformats.org/drawingml/2006/main" prst="roundRect">
             <a:avLst>
@@ -2968,8 +2952,8 @@
         </p:nvSpPr>
         <p:spPr>
           <a:xfrm xmlns:a="http://schemas.openxmlformats.org/drawingml/2006/main">
-            <a:off x="3048000" y="2619375"/>
-            <a:ext cx="590550" cy="285750"/>
+            <a:off x="3048000" y="2438400"/>
+            <a:ext cx="590550" cy="190500"/>
           </a:xfrm>
           <a:prstGeom xmlns:a="http://schemas.openxmlformats.org/drawingml/2006/main" prst="rect">
             <a:avLst/>
@@ -2987,6 +2971,7 @@
           <a:lstStyle xmlns:a="http://schemas.openxmlformats.org/drawingml/2006/main"/>
           <a:p xmlns:a="http://schemas.openxmlformats.org/drawingml/2006/main">
             <a:pPr algn="ctr">
+              <a:buNone/>
               <a:defRPr sz="1200" b="1">
                 <a:solidFill>
                   <a:srgbClr val="168765"/>
@@ -3026,7 +3011,584 @@
         </p:nvSpPr>
         <p:spPr>
           <a:xfrm xmlns:a="http://schemas.openxmlformats.org/drawingml/2006/main">
-            <a:off x="3028950" y="2914650"/>
+            <a:off x="3000375" y="2628900"/>
+            <a:ext cx="685800" cy="161925"/>
+          </a:xfrm>
+          <a:prstGeom xmlns:a="http://schemas.openxmlformats.org/drawingml/2006/main" prst="rect">
+            <a:avLst/>
+          </a:prstGeom>
+          <a:noFill xmlns:a="http://schemas.openxmlformats.org/drawingml/2006/main"/>
+          <a:ln xmlns:a="http://schemas.openxmlformats.org/drawingml/2006/main" w="0">
+            <a:noFill/>
+            <a:prstDash val="solid"/>
+          </a:ln>
+        </p:spPr>
+        <p:txBody>
+          <a:bodyPr xmlns:a="http://schemas.openxmlformats.org/drawingml/2006/main" lIns="0" tIns="0" rIns="0" bIns="0" anchor="ctr">
+            <a:normAutofit fontScale="100000"/>
+          </a:bodyPr>
+          <a:lstStyle xmlns:a="http://schemas.openxmlformats.org/drawingml/2006/main"/>
+          <a:p xmlns:a="http://schemas.openxmlformats.org/drawingml/2006/main">
+            <a:pPr algn="ctr">
+              <a:buNone/>
+              <a:defRPr sz="825" b="0">
+                <a:solidFill>
+                  <a:srgbClr val="667085"/>
+                </a:solidFill>
+                <a:latin typeface="Arial"/>
+                <a:ea typeface="Arial"/>
+                <a:cs typeface="Arial"/>
+              </a:defRPr>
+            </a:pPr>
+            <a:r>
+              <a:rPr sz="825" b="0">
+                <a:solidFill>
+                  <a:srgbClr val="667085"/>
+                </a:solidFill>
+                <a:latin typeface="Arial"/>
+                <a:ea typeface="Arial"/>
+                <a:cs typeface="Arial"/>
+              </a:rPr>
+              <a:t>scene graph</a:t>
+            </a:r>
+          </a:p>
+        </p:txBody>
+      </p:sp>
+      <p:sp>
+        <p:nvSpPr>
+          <p:cNvPr id="48" name="scg-box">
+            <a:extLst xmlns:a="http://schemas.openxmlformats.org/drawingml/2006/main">
+              <a:ext uri="{FF2B5EF4-FFF2-40B4-BE49-F238E27FC236}">
+                <a16:creationId xmlns:a16="http://schemas.microsoft.com/office/drawing/2014/main" id="{2A219219-E378-4C94-9851-F4053ABC1874}"/>
+              </a:ext>
+            </a:extLst>
+          </p:cNvPr>
+          <p:cNvSpPr>
+            <a:spLocks xmlns:a="http://schemas.openxmlformats.org/drawingml/2006/main" noGrp="1"/>
+          </p:cNvSpPr>
+          <p:nvPr/>
+        </p:nvSpPr>
+        <p:spPr>
+          <a:xfrm xmlns:a="http://schemas.openxmlformats.org/drawingml/2006/main">
+            <a:off x="3876675" y="2428875"/>
+            <a:ext cx="781050" cy="400050"/>
+          </a:xfrm>
+          <a:prstGeom xmlns:a="http://schemas.openxmlformats.org/drawingml/2006/main" prst="roundRect">
+            <a:avLst>
+              <a:gd name="adj" fmla="val 11111"/>
+            </a:avLst>
+          </a:prstGeom>
+          <a:solidFill xmlns:a="http://schemas.openxmlformats.org/drawingml/2006/main">
+            <a:srgbClr val="FFFFFF"/>
+          </a:solidFill>
+          <a:ln xmlns:a="http://schemas.openxmlformats.org/drawingml/2006/main" w="11430">
+            <a:solidFill>
+              <a:srgbClr val="A8D8C8"/>
+            </a:solidFill>
+            <a:prstDash val="solid"/>
+          </a:ln>
+        </p:spPr>
+      </p:sp>
+      <p:sp>
+        <p:nvSpPr>
+          <p:cNvPr id="49" name="scg-title">
+            <a:extLst xmlns:a="http://schemas.openxmlformats.org/drawingml/2006/main">
+              <a:ext uri="{FF2B5EF4-FFF2-40B4-BE49-F238E27FC236}">
+                <a16:creationId xmlns:a16="http://schemas.microsoft.com/office/drawing/2014/main" id="{5F2AFBBE-FED1-411C-AB8C-BD0868DDFD4E}"/>
+              </a:ext>
+            </a:extLst>
+          </p:cNvPr>
+          <p:cNvSpPr>
+            <a:spLocks xmlns:a="http://schemas.openxmlformats.org/drawingml/2006/main" noGrp="1"/>
+          </p:cNvSpPr>
+          <p:nvPr/>
+        </p:nvSpPr>
+        <p:spPr>
+          <a:xfrm xmlns:a="http://schemas.openxmlformats.org/drawingml/2006/main">
+            <a:off x="3971925" y="2438400"/>
+            <a:ext cx="590550" cy="190500"/>
+          </a:xfrm>
+          <a:prstGeom xmlns:a="http://schemas.openxmlformats.org/drawingml/2006/main" prst="rect">
+            <a:avLst/>
+          </a:prstGeom>
+          <a:noFill xmlns:a="http://schemas.openxmlformats.org/drawingml/2006/main"/>
+          <a:ln xmlns:a="http://schemas.openxmlformats.org/drawingml/2006/main" w="0">
+            <a:noFill/>
+            <a:prstDash val="solid"/>
+          </a:ln>
+        </p:spPr>
+        <p:txBody>
+          <a:bodyPr xmlns:a="http://schemas.openxmlformats.org/drawingml/2006/main" lIns="0" tIns="0" rIns="0" bIns="0" anchor="ctr">
+            <a:normAutofit fontScale="79365"/>
+          </a:bodyPr>
+          <a:lstStyle xmlns:a="http://schemas.openxmlformats.org/drawingml/2006/main"/>
+          <a:p xmlns:a="http://schemas.openxmlformats.org/drawingml/2006/main">
+            <a:pPr algn="ctr">
+              <a:buNone/>
+              <a:defRPr sz="1575" b="1">
+                <a:solidFill>
+                  <a:srgbClr val="168765"/>
+                </a:solidFill>
+                <a:latin typeface="Arial"/>
+                <a:ea typeface="Arial"/>
+                <a:cs typeface="Arial"/>
+              </a:defRPr>
+            </a:pPr>
+            <a:r>
+              <a:rPr sz="1575" b="1">
+                <a:solidFill>
+                  <a:srgbClr val="168765"/>
+                </a:solidFill>
+                <a:latin typeface="Arial"/>
+                <a:ea typeface="Arial"/>
+                <a:cs typeface="Arial"/>
+              </a:rPr>
+              <a:t>SCG</a:t>
+            </a:r>
+          </a:p>
+        </p:txBody>
+      </p:sp>
+      <p:sp>
+        <p:nvSpPr>
+          <p:cNvPr id="50" name="scg-subtitle">
+            <a:extLst xmlns:a="http://schemas.openxmlformats.org/drawingml/2006/main">
+              <a:ext uri="{FF2B5EF4-FFF2-40B4-BE49-F238E27FC236}">
+                <a16:creationId xmlns:a16="http://schemas.microsoft.com/office/drawing/2014/main" id="{0F2EAB76-4259-48B0-87DF-D7003EC853A8}"/>
+              </a:ext>
+            </a:extLst>
+          </p:cNvPr>
+          <p:cNvSpPr>
+            <a:spLocks xmlns:a="http://schemas.openxmlformats.org/drawingml/2006/main" noGrp="1"/>
+          </p:cNvSpPr>
+          <p:nvPr/>
+        </p:nvSpPr>
+        <p:spPr>
+          <a:xfrm xmlns:a="http://schemas.openxmlformats.org/drawingml/2006/main">
+            <a:off x="3924300" y="2628900"/>
+            <a:ext cx="685800" cy="161925"/>
+          </a:xfrm>
+          <a:prstGeom xmlns:a="http://schemas.openxmlformats.org/drawingml/2006/main" prst="rect">
+            <a:avLst/>
+          </a:prstGeom>
+          <a:noFill xmlns:a="http://schemas.openxmlformats.org/drawingml/2006/main"/>
+          <a:ln xmlns:a="http://schemas.openxmlformats.org/drawingml/2006/main" w="0">
+            <a:noFill/>
+            <a:prstDash val="solid"/>
+          </a:ln>
+        </p:spPr>
+        <p:txBody>
+          <a:bodyPr xmlns:a="http://schemas.openxmlformats.org/drawingml/2006/main" lIns="0" tIns="0" rIns="0" bIns="0" anchor="ctr">
+            <a:normAutofit fontScale="100000"/>
+          </a:bodyPr>
+          <a:lstStyle xmlns:a="http://schemas.openxmlformats.org/drawingml/2006/main"/>
+          <a:p xmlns:a="http://schemas.openxmlformats.org/drawingml/2006/main">
+            <a:pPr algn="ctr">
+              <a:buNone/>
+              <a:defRPr sz="825" b="0">
+                <a:solidFill>
+                  <a:srgbClr val="667085"/>
+                </a:solidFill>
+                <a:latin typeface="Arial"/>
+                <a:ea typeface="Arial"/>
+                <a:cs typeface="Arial"/>
+              </a:defRPr>
+            </a:pPr>
+            <a:r>
+              <a:rPr sz="825" b="0">
+                <a:solidFill>
+                  <a:srgbClr val="667085"/>
+                </a:solidFill>
+                <a:latin typeface="Arial"/>
+                <a:ea typeface="Arial"/>
+                <a:cs typeface="Arial"/>
+              </a:rPr>
+              <a:t>Qwen source</a:t>
+            </a:r>
+          </a:p>
+        </p:txBody>
+      </p:sp>
+      <p:sp>
+        <p:nvSpPr>
+          <p:cNvPr id="51" name="graph-summarize-box">
+            <a:extLst xmlns:a="http://schemas.openxmlformats.org/drawingml/2006/main">
+              <a:ext uri="{FF2B5EF4-FFF2-40B4-BE49-F238E27FC236}">
+                <a16:creationId xmlns:a16="http://schemas.microsoft.com/office/drawing/2014/main" id="{B1A3F3D6-C818-4B9D-AA26-CBBE6180EEDE}"/>
+              </a:ext>
+            </a:extLst>
+          </p:cNvPr>
+          <p:cNvSpPr>
+            <a:spLocks xmlns:a="http://schemas.openxmlformats.org/drawingml/2006/main" noGrp="1"/>
+          </p:cNvSpPr>
+          <p:nvPr/>
+        </p:nvSpPr>
+        <p:spPr>
+          <a:xfrm xmlns:a="http://schemas.openxmlformats.org/drawingml/2006/main">
+            <a:off x="4800600" y="2428875"/>
+            <a:ext cx="781050" cy="400050"/>
+          </a:xfrm>
+          <a:prstGeom xmlns:a="http://schemas.openxmlformats.org/drawingml/2006/main" prst="roundRect">
+            <a:avLst>
+              <a:gd name="adj" fmla="val 11111"/>
+            </a:avLst>
+          </a:prstGeom>
+          <a:solidFill xmlns:a="http://schemas.openxmlformats.org/drawingml/2006/main">
+            <a:srgbClr val="FFFFFF"/>
+          </a:solidFill>
+          <a:ln xmlns:a="http://schemas.openxmlformats.org/drawingml/2006/main" w="11430">
+            <a:solidFill>
+              <a:srgbClr val="A8D8C8"/>
+            </a:solidFill>
+            <a:prstDash val="solid"/>
+          </a:ln>
+        </p:spPr>
+      </p:sp>
+      <p:sp>
+        <p:nvSpPr>
+          <p:cNvPr id="52" name="graph-summarize-title">
+            <a:extLst xmlns:a="http://schemas.openxmlformats.org/drawingml/2006/main">
+              <a:ext uri="{FF2B5EF4-FFF2-40B4-BE49-F238E27FC236}">
+                <a16:creationId xmlns:a16="http://schemas.microsoft.com/office/drawing/2014/main" id="{4BE61D50-19CF-44A1-8A1E-3473BEC30B0A}"/>
+              </a:ext>
+            </a:extLst>
+          </p:cNvPr>
+          <p:cNvSpPr>
+            <a:spLocks xmlns:a="http://schemas.openxmlformats.org/drawingml/2006/main" noGrp="1"/>
+          </p:cNvSpPr>
+          <p:nvPr/>
+        </p:nvSpPr>
+        <p:spPr>
+          <a:xfrm xmlns:a="http://schemas.openxmlformats.org/drawingml/2006/main">
+            <a:off x="4895850" y="2438400"/>
+            <a:ext cx="590550" cy="190500"/>
+          </a:xfrm>
+          <a:prstGeom xmlns:a="http://schemas.openxmlformats.org/drawingml/2006/main" prst="rect">
+            <a:avLst/>
+          </a:prstGeom>
+          <a:noFill xmlns:a="http://schemas.openxmlformats.org/drawingml/2006/main"/>
+          <a:ln xmlns:a="http://schemas.openxmlformats.org/drawingml/2006/main" w="0">
+            <a:noFill/>
+            <a:prstDash val="solid"/>
+          </a:ln>
+        </p:spPr>
+        <p:txBody>
+          <a:bodyPr xmlns:a="http://schemas.openxmlformats.org/drawingml/2006/main" lIns="0" tIns="0" rIns="0" bIns="0" anchor="ctr">
+            <a:normAutofit fontScale="100000"/>
+          </a:bodyPr>
+          <a:lstStyle xmlns:a="http://schemas.openxmlformats.org/drawingml/2006/main"/>
+          <a:p xmlns:a="http://schemas.openxmlformats.org/drawingml/2006/main">
+            <a:pPr algn="ctr">
+              <a:buNone/>
+              <a:defRPr sz="1200" b="1">
+                <a:solidFill>
+                  <a:srgbClr val="168765"/>
+                </a:solidFill>
+                <a:latin typeface="Arial"/>
+                <a:ea typeface="Arial"/>
+                <a:cs typeface="Arial"/>
+              </a:defRPr>
+            </a:pPr>
+            <a:r>
+              <a:rPr sz="1200" b="1">
+                <a:solidFill>
+                  <a:srgbClr val="168765"/>
+                </a:solidFill>
+                <a:latin typeface="Arial"/>
+                <a:ea typeface="Arial"/>
+                <a:cs typeface="Arial"/>
+              </a:rPr>
+              <a:t>Qwen</a:t>
+            </a:r>
+          </a:p>
+        </p:txBody>
+      </p:sp>
+      <p:sp>
+        <p:nvSpPr>
+          <p:cNvPr id="53" name="graph-summarize-subtitle">
+            <a:extLst xmlns:a="http://schemas.openxmlformats.org/drawingml/2006/main">
+              <a:ext uri="{FF2B5EF4-FFF2-40B4-BE49-F238E27FC236}">
+                <a16:creationId xmlns:a16="http://schemas.microsoft.com/office/drawing/2014/main" id="{4B106C94-7A1A-4CFE-9AE9-68E2D0DA63C0}"/>
+              </a:ext>
+            </a:extLst>
+          </p:cNvPr>
+          <p:cNvSpPr>
+            <a:spLocks xmlns:a="http://schemas.openxmlformats.org/drawingml/2006/main" noGrp="1"/>
+          </p:cNvSpPr>
+          <p:nvPr/>
+        </p:nvSpPr>
+        <p:spPr>
+          <a:xfrm xmlns:a="http://schemas.openxmlformats.org/drawingml/2006/main">
+            <a:off x="4848225" y="2628900"/>
+            <a:ext cx="685800" cy="161925"/>
+          </a:xfrm>
+          <a:prstGeom xmlns:a="http://schemas.openxmlformats.org/drawingml/2006/main" prst="rect">
+            <a:avLst/>
+          </a:prstGeom>
+          <a:noFill xmlns:a="http://schemas.openxmlformats.org/drawingml/2006/main"/>
+          <a:ln xmlns:a="http://schemas.openxmlformats.org/drawingml/2006/main" w="0">
+            <a:noFill/>
+            <a:prstDash val="solid"/>
+          </a:ln>
+        </p:spPr>
+        <p:txBody>
+          <a:bodyPr xmlns:a="http://schemas.openxmlformats.org/drawingml/2006/main" lIns="0" tIns="0" rIns="0" bIns="0" anchor="ctr">
+            <a:normAutofit fontScale="96668"/>
+          </a:bodyPr>
+          <a:lstStyle xmlns:a="http://schemas.openxmlformats.org/drawingml/2006/main"/>
+          <a:p xmlns:a="http://schemas.openxmlformats.org/drawingml/2006/main">
+            <a:pPr algn="ctr">
+              <a:buNone/>
+              <a:defRPr sz="825" b="0">
+                <a:solidFill>
+                  <a:srgbClr val="667085"/>
+                </a:solidFill>
+                <a:latin typeface="Arial"/>
+                <a:ea typeface="Arial"/>
+                <a:cs typeface="Arial"/>
+              </a:defRPr>
+            </a:pPr>
+            <a:r>
+              <a:rPr sz="825" b="0">
+                <a:solidFill>
+                  <a:srgbClr val="667085"/>
+                </a:solidFill>
+                <a:latin typeface="Arial"/>
+                <a:ea typeface="Arial"/>
+                <a:cs typeface="Arial"/>
+              </a:rPr>
+              <a:t>video summary</a:t>
+            </a:r>
+          </a:p>
+        </p:txBody>
+      </p:sp>
+      <p:sp>
+        <p:nvSpPr>
+          <p:cNvPr id="54" name="vs-graph-box">
+            <a:extLst xmlns:a="http://schemas.openxmlformats.org/drawingml/2006/main">
+              <a:ext uri="{FF2B5EF4-FFF2-40B4-BE49-F238E27FC236}">
+                <a16:creationId xmlns:a16="http://schemas.microsoft.com/office/drawing/2014/main" id="{DD94FE2A-994A-482E-B2AC-6CD01E513F71}"/>
+              </a:ext>
+            </a:extLst>
+          </p:cNvPr>
+          <p:cNvSpPr>
+            <a:spLocks xmlns:a="http://schemas.openxmlformats.org/drawingml/2006/main" noGrp="1"/>
+          </p:cNvSpPr>
+          <p:nvPr/>
+        </p:nvSpPr>
+        <p:spPr>
+          <a:xfrm xmlns:a="http://schemas.openxmlformats.org/drawingml/2006/main">
+            <a:off x="5724525" y="2428875"/>
+            <a:ext cx="1285875" cy="400050"/>
+          </a:xfrm>
+          <a:prstGeom xmlns:a="http://schemas.openxmlformats.org/drawingml/2006/main" prst="roundRect">
+            <a:avLst>
+              <a:gd name="adj" fmla="val 11111"/>
+            </a:avLst>
+          </a:prstGeom>
+          <a:solidFill xmlns:a="http://schemas.openxmlformats.org/drawingml/2006/main">
+            <a:srgbClr val="168765"/>
+          </a:solidFill>
+          <a:ln xmlns:a="http://schemas.openxmlformats.org/drawingml/2006/main" w="11430">
+            <a:solidFill>
+              <a:srgbClr val="168765"/>
+            </a:solidFill>
+            <a:prstDash val="solid"/>
+          </a:ln>
+        </p:spPr>
+      </p:sp>
+      <p:sp>
+        <p:nvSpPr>
+          <p:cNvPr id="55" name="vs-graph-title">
+            <a:extLst xmlns:a="http://schemas.openxmlformats.org/drawingml/2006/main">
+              <a:ext uri="{FF2B5EF4-FFF2-40B4-BE49-F238E27FC236}">
+                <a16:creationId xmlns:a16="http://schemas.microsoft.com/office/drawing/2014/main" id="{F1A347AB-5E37-4954-B4DE-B899E21F3CC0}"/>
+              </a:ext>
+            </a:extLst>
+          </p:cNvPr>
+          <p:cNvSpPr>
+            <a:spLocks xmlns:a="http://schemas.openxmlformats.org/drawingml/2006/main" noGrp="1"/>
+          </p:cNvSpPr>
+          <p:nvPr/>
+        </p:nvSpPr>
+        <p:spPr>
+          <a:xfrm xmlns:a="http://schemas.openxmlformats.org/drawingml/2006/main">
+            <a:off x="5819775" y="2428875"/>
+            <a:ext cx="1095375" cy="400050"/>
+          </a:xfrm>
+          <a:prstGeom xmlns:a="http://schemas.openxmlformats.org/drawingml/2006/main" prst="rect">
+            <a:avLst/>
+          </a:prstGeom>
+          <a:noFill xmlns:a="http://schemas.openxmlformats.org/drawingml/2006/main"/>
+          <a:ln xmlns:a="http://schemas.openxmlformats.org/drawingml/2006/main" w="0">
+            <a:noFill/>
+            <a:prstDash val="solid"/>
+          </a:ln>
+        </p:spPr>
+        <p:txBody>
+          <a:bodyPr xmlns:a="http://schemas.openxmlformats.org/drawingml/2006/main" lIns="0" tIns="0" rIns="0" bIns="0" anchor="ctr">
+            <a:normAutofit fontScale="97222"/>
+          </a:bodyPr>
+          <a:lstStyle xmlns:a="http://schemas.openxmlformats.org/drawingml/2006/main"/>
+          <a:p xmlns:a="http://schemas.openxmlformats.org/drawingml/2006/main">
+            <a:pPr algn="ctr">
+              <a:buNone/>
+              <a:defRPr sz="1350" b="1">
+                <a:solidFill>
+                  <a:srgbClr val="FFFFFF"/>
+                </a:solidFill>
+                <a:latin typeface="Arial"/>
+                <a:ea typeface="Arial"/>
+                <a:cs typeface="Arial"/>
+              </a:defRPr>
+            </a:pPr>
+            <a:r>
+              <a:rPr sz="1350" b="1">
+                <a:solidFill>
+                  <a:srgbClr val="FFFFFF"/>
+                </a:solidFill>
+                <a:latin typeface="Arial"/>
+                <a:ea typeface="Arial"/>
+                <a:cs typeface="Arial"/>
+              </a:rPr>
+              <a:t>VS_GRAPH</a:t>
+            </a:r>
+          </a:p>
+          <a:p xmlns:a="http://schemas.openxmlformats.org/drawingml/2006/main">
+            <a:pPr algn="ctr">
+              <a:buNone/>
+              <a:defRPr sz="1350" b="1">
+                <a:solidFill>
+                  <a:srgbClr val="FFFFFF"/>
+                </a:solidFill>
+                <a:latin typeface="Arial"/>
+                <a:ea typeface="Arial"/>
+                <a:cs typeface="Arial"/>
+              </a:defRPr>
+            </a:pPr>
+            <a:r>
+              <a:rPr sz="1350" b="1">
+                <a:solidFill>
+                  <a:srgbClr val="FFFFFF"/>
+                </a:solidFill>
+                <a:latin typeface="Arial"/>
+                <a:ea typeface="Arial"/>
+                <a:cs typeface="Arial"/>
+              </a:rPr>
+              <a:t>QWEN</a:t>
+            </a:r>
+          </a:p>
+        </p:txBody>
+      </p:sp>
+      <p:sp>
+        <p:nvSpPr>
+          <p:cNvPr id="56" name="desc-extract-box">
+            <a:extLst xmlns:a="http://schemas.openxmlformats.org/drawingml/2006/main">
+              <a:ext uri="{FF2B5EF4-FFF2-40B4-BE49-F238E27FC236}">
+                <a16:creationId xmlns:a16="http://schemas.microsoft.com/office/drawing/2014/main" id="{AC1B8A87-C81E-439D-A337-719A84325D68}"/>
+              </a:ext>
+            </a:extLst>
+          </p:cNvPr>
+          <p:cNvSpPr>
+            <a:spLocks xmlns:a="http://schemas.openxmlformats.org/drawingml/2006/main" noGrp="1"/>
+          </p:cNvSpPr>
+          <p:nvPr/>
+        </p:nvSpPr>
+        <p:spPr>
+          <a:xfrm xmlns:a="http://schemas.openxmlformats.org/drawingml/2006/main">
+            <a:off x="2952750" y="4448175"/>
+            <a:ext cx="781050" cy="685800"/>
+          </a:xfrm>
+          <a:prstGeom xmlns:a="http://schemas.openxmlformats.org/drawingml/2006/main" prst="roundRect">
+            <a:avLst>
+              <a:gd name="adj" fmla="val 11111"/>
+            </a:avLst>
+          </a:prstGeom>
+          <a:solidFill xmlns:a="http://schemas.openxmlformats.org/drawingml/2006/main">
+            <a:srgbClr val="FFFFFF"/>
+          </a:solidFill>
+          <a:ln xmlns:a="http://schemas.openxmlformats.org/drawingml/2006/main" w="11430">
+            <a:solidFill>
+              <a:srgbClr val="B7CEF5"/>
+            </a:solidFill>
+            <a:prstDash val="solid"/>
+          </a:ln>
+        </p:spPr>
+      </p:sp>
+      <p:sp>
+        <p:nvSpPr>
+          <p:cNvPr id="57" name="desc-extract-title">
+            <a:extLst xmlns:a="http://schemas.openxmlformats.org/drawingml/2006/main">
+              <a:ext uri="{FF2B5EF4-FFF2-40B4-BE49-F238E27FC236}">
+                <a16:creationId xmlns:a16="http://schemas.microsoft.com/office/drawing/2014/main" id="{25315ED2-1343-43D9-9CAD-59680CE97E17}"/>
+              </a:ext>
+            </a:extLst>
+          </p:cNvPr>
+          <p:cNvSpPr>
+            <a:spLocks xmlns:a="http://schemas.openxmlformats.org/drawingml/2006/main" noGrp="1"/>
+          </p:cNvSpPr>
+          <p:nvPr/>
+        </p:nvSpPr>
+        <p:spPr>
+          <a:xfrm xmlns:a="http://schemas.openxmlformats.org/drawingml/2006/main">
+            <a:off x="3048000" y="4524375"/>
+            <a:ext cx="590550" cy="285750"/>
+          </a:xfrm>
+          <a:prstGeom xmlns:a="http://schemas.openxmlformats.org/drawingml/2006/main" prst="rect">
+            <a:avLst/>
+          </a:prstGeom>
+          <a:noFill xmlns:a="http://schemas.openxmlformats.org/drawingml/2006/main"/>
+          <a:ln xmlns:a="http://schemas.openxmlformats.org/drawingml/2006/main" w="0">
+            <a:noFill/>
+            <a:prstDash val="solid"/>
+          </a:ln>
+        </p:spPr>
+        <p:txBody>
+          <a:bodyPr xmlns:a="http://schemas.openxmlformats.org/drawingml/2006/main" lIns="0" tIns="0" rIns="0" bIns="0" anchor="ctr">
+            <a:normAutofit fontScale="100000"/>
+          </a:bodyPr>
+          <a:lstStyle xmlns:a="http://schemas.openxmlformats.org/drawingml/2006/main"/>
+          <a:p xmlns:a="http://schemas.openxmlformats.org/drawingml/2006/main">
+            <a:pPr algn="ctr">
+              <a:buNone/>
+              <a:defRPr sz="1200" b="1">
+                <a:solidFill>
+                  <a:srgbClr val="2F78E8"/>
+                </a:solidFill>
+                <a:latin typeface="Arial"/>
+                <a:ea typeface="Arial"/>
+                <a:cs typeface="Arial"/>
+              </a:defRPr>
+            </a:pPr>
+            <a:r>
+              <a:rPr sz="1200" b="1">
+                <a:solidFill>
+                  <a:srgbClr val="2F78E8"/>
+                </a:solidFill>
+                <a:latin typeface="Arial"/>
+                <a:ea typeface="Arial"/>
+                <a:cs typeface="Arial"/>
+              </a:rPr>
+              <a:t>Qwen</a:t>
+            </a:r>
+          </a:p>
+        </p:txBody>
+      </p:sp>
+      <p:sp>
+        <p:nvSpPr>
+          <p:cNvPr id="58" name="desc-extract-subtitle">
+            <a:extLst xmlns:a="http://schemas.openxmlformats.org/drawingml/2006/main">
+              <a:ext uri="{FF2B5EF4-FFF2-40B4-BE49-F238E27FC236}">
+                <a16:creationId xmlns:a16="http://schemas.microsoft.com/office/drawing/2014/main" id="{33072E79-9F3D-48CD-B9AB-0A8B2D9CFF0A}"/>
+              </a:ext>
+            </a:extLst>
+          </p:cNvPr>
+          <p:cNvSpPr>
+            <a:spLocks xmlns:a="http://schemas.openxmlformats.org/drawingml/2006/main" noGrp="1"/>
+          </p:cNvSpPr>
+          <p:nvPr/>
+        </p:nvSpPr>
+        <p:spPr>
+          <a:xfrm xmlns:a="http://schemas.openxmlformats.org/drawingml/2006/main">
+            <a:off x="3028950" y="4819650"/>
             <a:ext cx="628650" cy="257175"/>
           </a:xfrm>
           <a:prstGeom xmlns:a="http://schemas.openxmlformats.org/drawingml/2006/main" prst="rect">
@@ -3045,6 +3607,7 @@
           <a:lstStyle xmlns:a="http://schemas.openxmlformats.org/drawingml/2006/main"/>
           <a:p xmlns:a="http://schemas.openxmlformats.org/drawingml/2006/main">
             <a:pPr algn="ctr">
+              <a:buNone/>
               <a:defRPr sz="1050">
                 <a:solidFill>
                   <a:srgbClr val="667085"/>
@@ -3063,28 +3626,28 @@
                 <a:ea typeface="Arial"/>
                 <a:cs typeface="Arial"/>
               </a:rPr>
-              <a:t>scene relations</a:t>
+              <a:t>scene description</a:t>
             </a:r>
           </a:p>
         </p:txBody>
       </p:sp>
       <p:sp>
         <p:nvSpPr>
-          <p:cNvPr id="48" name="scg-box">
-            <a:extLst xmlns:a="http://schemas.openxmlformats.org/drawingml/2006/main">
-              <a:ext uri="{FF2B5EF4-FFF2-40B4-BE49-F238E27FC236}">
-                <a16:creationId xmlns:a16="http://schemas.microsoft.com/office/drawing/2014/main" id="{2A219219-E378-4C94-9851-F4053ABC1874}"/>
-              </a:ext>
-            </a:extLst>
-          </p:cNvPr>
-          <p:cNvSpPr>
-            <a:spLocks xmlns:a="http://schemas.openxmlformats.org/drawingml/2006/main" noGrp="1"/>
-          </p:cNvSpPr>
-          <p:nvPr/>
-        </p:nvSpPr>
-        <p:spPr>
-          <a:xfrm xmlns:a="http://schemas.openxmlformats.org/drawingml/2006/main">
-            <a:off x="3876675" y="2543175"/>
+          <p:cNvPr id="59" name="sd-box">
+            <a:extLst xmlns:a="http://schemas.openxmlformats.org/drawingml/2006/main">
+              <a:ext uri="{FF2B5EF4-FFF2-40B4-BE49-F238E27FC236}">
+                <a16:creationId xmlns:a16="http://schemas.microsoft.com/office/drawing/2014/main" id="{7C8DB0FD-DE39-46A3-A8FC-22430EFE24E6}"/>
+              </a:ext>
+            </a:extLst>
+          </p:cNvPr>
+          <p:cNvSpPr>
+            <a:spLocks xmlns:a="http://schemas.openxmlformats.org/drawingml/2006/main" noGrp="1"/>
+          </p:cNvSpPr>
+          <p:nvPr/>
+        </p:nvSpPr>
+        <p:spPr>
+          <a:xfrm xmlns:a="http://schemas.openxmlformats.org/drawingml/2006/main">
+            <a:off x="3876675" y="4448175"/>
             <a:ext cx="781050" cy="685800"/>
           </a:xfrm>
           <a:prstGeom xmlns:a="http://schemas.openxmlformats.org/drawingml/2006/main" prst="roundRect">
@@ -3097,7 +3660,7 @@
           </a:solidFill>
           <a:ln xmlns:a="http://schemas.openxmlformats.org/drawingml/2006/main" w="11430">
             <a:solidFill>
-              <a:srgbClr val="A8D8C8"/>
+              <a:srgbClr val="B7CEF5"/>
             </a:solidFill>
             <a:prstDash val="solid"/>
           </a:ln>
@@ -3105,21 +3668,21 @@
       </p:sp>
       <p:sp>
         <p:nvSpPr>
-          <p:cNvPr id="49" name="scg-title">
-            <a:extLst xmlns:a="http://schemas.openxmlformats.org/drawingml/2006/main">
-              <a:ext uri="{FF2B5EF4-FFF2-40B4-BE49-F238E27FC236}">
-                <a16:creationId xmlns:a16="http://schemas.microsoft.com/office/drawing/2014/main" id="{5F2AFBBE-FED1-411C-AB8C-BD0868DDFD4E}"/>
-              </a:ext>
-            </a:extLst>
-          </p:cNvPr>
-          <p:cNvSpPr>
-            <a:spLocks xmlns:a="http://schemas.openxmlformats.org/drawingml/2006/main" noGrp="1"/>
-          </p:cNvSpPr>
-          <p:nvPr/>
-        </p:nvSpPr>
-        <p:spPr>
-          <a:xfrm xmlns:a="http://schemas.openxmlformats.org/drawingml/2006/main">
-            <a:off x="3971925" y="2619375"/>
+          <p:cNvPr id="60" name="sd-title">
+            <a:extLst xmlns:a="http://schemas.openxmlformats.org/drawingml/2006/main">
+              <a:ext uri="{FF2B5EF4-FFF2-40B4-BE49-F238E27FC236}">
+                <a16:creationId xmlns:a16="http://schemas.microsoft.com/office/drawing/2014/main" id="{4CDD24C1-CE05-488D-9F3F-6E55152005F6}"/>
+              </a:ext>
+            </a:extLst>
+          </p:cNvPr>
+          <p:cNvSpPr>
+            <a:spLocks xmlns:a="http://schemas.openxmlformats.org/drawingml/2006/main" noGrp="1"/>
+          </p:cNvSpPr>
+          <p:nvPr/>
+        </p:nvSpPr>
+        <p:spPr>
+          <a:xfrm xmlns:a="http://schemas.openxmlformats.org/drawingml/2006/main">
+            <a:off x="3971925" y="4524375"/>
             <a:ext cx="590550" cy="285750"/>
           </a:xfrm>
           <a:prstGeom xmlns:a="http://schemas.openxmlformats.org/drawingml/2006/main" prst="rect">
@@ -3138,9 +3701,10 @@
           <a:lstStyle xmlns:a="http://schemas.openxmlformats.org/drawingml/2006/main"/>
           <a:p xmlns:a="http://schemas.openxmlformats.org/drawingml/2006/main">
             <a:pPr algn="ctr">
+              <a:buNone/>
               <a:defRPr sz="1575" b="1">
                 <a:solidFill>
-                  <a:srgbClr val="168765"/>
+                  <a:srgbClr val="2F78E8"/>
                 </a:solidFill>
                 <a:latin typeface="Arial"/>
                 <a:ea typeface="Arial"/>
@@ -3150,34 +3714,187 @@
             <a:r>
               <a:rPr sz="1575" b="1">
                 <a:solidFill>
-                  <a:srgbClr val="168765"/>
+                  <a:srgbClr val="2F78E8"/>
                 </a:solidFill>
                 <a:latin typeface="Arial"/>
                 <a:ea typeface="Arial"/>
                 <a:cs typeface="Arial"/>
               </a:rPr>
-              <a:t>SCG</a:t>
+              <a:t>SD</a:t>
             </a:r>
           </a:p>
         </p:txBody>
       </p:sp>
       <p:sp>
         <p:nvSpPr>
-          <p:cNvPr id="50" name="scg-subtitle">
-            <a:extLst xmlns:a="http://schemas.openxmlformats.org/drawingml/2006/main">
-              <a:ext uri="{FF2B5EF4-FFF2-40B4-BE49-F238E27FC236}">
-                <a16:creationId xmlns:a16="http://schemas.microsoft.com/office/drawing/2014/main" id="{0F2EAB76-4259-48B0-87DF-D7003EC853A8}"/>
-              </a:ext>
-            </a:extLst>
-          </p:cNvPr>
-          <p:cNvSpPr>
-            <a:spLocks xmlns:a="http://schemas.openxmlformats.org/drawingml/2006/main" noGrp="1"/>
-          </p:cNvSpPr>
-          <p:nvPr/>
-        </p:nvSpPr>
-        <p:spPr>
-          <a:xfrm xmlns:a="http://schemas.openxmlformats.org/drawingml/2006/main">
-            <a:off x="3952875" y="2914650"/>
+          <p:cNvPr id="61" name="sd-subtitle">
+            <a:extLst xmlns:a="http://schemas.openxmlformats.org/drawingml/2006/main">
+              <a:ext uri="{FF2B5EF4-FFF2-40B4-BE49-F238E27FC236}">
+                <a16:creationId xmlns:a16="http://schemas.microsoft.com/office/drawing/2014/main" id="{7707E5E8-F998-467E-BBC3-2F16EB5ECA46}"/>
+              </a:ext>
+            </a:extLst>
+          </p:cNvPr>
+          <p:cNvSpPr>
+            <a:spLocks xmlns:a="http://schemas.openxmlformats.org/drawingml/2006/main" noGrp="1"/>
+          </p:cNvSpPr>
+          <p:nvPr/>
+        </p:nvSpPr>
+        <p:spPr>
+          <a:xfrm xmlns:a="http://schemas.openxmlformats.org/drawingml/2006/main">
+            <a:off x="3952875" y="4819650"/>
+            <a:ext cx="628650" cy="257175"/>
+          </a:xfrm>
+          <a:prstGeom xmlns:a="http://schemas.openxmlformats.org/drawingml/2006/main" prst="rect">
+            <a:avLst/>
+          </a:prstGeom>
+          <a:noFill xmlns:a="http://schemas.openxmlformats.org/drawingml/2006/main"/>
+          <a:ln xmlns:a="http://schemas.openxmlformats.org/drawingml/2006/main" w="0">
+            <a:noFill/>
+            <a:prstDash val="solid"/>
+          </a:ln>
+        </p:spPr>
+        <p:txBody>
+          <a:bodyPr xmlns:a="http://schemas.openxmlformats.org/drawingml/2006/main" lIns="0" tIns="0" rIns="0" bIns="0" anchor="ctr">
+            <a:normAutofit fontScale="100000"/>
+          </a:bodyPr>
+          <a:lstStyle xmlns:a="http://schemas.openxmlformats.org/drawingml/2006/main"/>
+          <a:p xmlns:a="http://schemas.openxmlformats.org/drawingml/2006/main">
+            <a:pPr algn="ctr">
+              <a:buNone/>
+              <a:defRPr sz="1050">
+                <a:solidFill>
+                  <a:srgbClr val="667085"/>
+                </a:solidFill>
+                <a:latin typeface="Arial"/>
+                <a:ea typeface="Arial"/>
+                <a:cs typeface="Arial"/>
+              </a:defRPr>
+            </a:pPr>
+            <a:r>
+              <a:rPr sz="1050">
+                <a:solidFill>
+                  <a:srgbClr val="667085"/>
+                </a:solidFill>
+                <a:latin typeface="Arial"/>
+                <a:ea typeface="Arial"/>
+                <a:cs typeface="Arial"/>
+              </a:rPr>
+              <a:t>scene text</a:t>
+            </a:r>
+          </a:p>
+        </p:txBody>
+      </p:sp>
+      <p:sp>
+        <p:nvSpPr>
+          <p:cNvPr id="62" name="desc-summarize-box">
+            <a:extLst xmlns:a="http://schemas.openxmlformats.org/drawingml/2006/main">
+              <a:ext uri="{FF2B5EF4-FFF2-40B4-BE49-F238E27FC236}">
+                <a16:creationId xmlns:a16="http://schemas.microsoft.com/office/drawing/2014/main" id="{E75ABAAE-09F8-4374-A491-8B1B47C02BC6}"/>
+              </a:ext>
+            </a:extLst>
+          </p:cNvPr>
+          <p:cNvSpPr>
+            <a:spLocks xmlns:a="http://schemas.openxmlformats.org/drawingml/2006/main" noGrp="1"/>
+          </p:cNvSpPr>
+          <p:nvPr/>
+        </p:nvSpPr>
+        <p:spPr>
+          <a:xfrm xmlns:a="http://schemas.openxmlformats.org/drawingml/2006/main">
+            <a:off x="4800600" y="4448175"/>
+            <a:ext cx="781050" cy="685800"/>
+          </a:xfrm>
+          <a:prstGeom xmlns:a="http://schemas.openxmlformats.org/drawingml/2006/main" prst="roundRect">
+            <a:avLst>
+              <a:gd name="adj" fmla="val 11111"/>
+            </a:avLst>
+          </a:prstGeom>
+          <a:solidFill xmlns:a="http://schemas.openxmlformats.org/drawingml/2006/main">
+            <a:srgbClr val="FFFFFF"/>
+          </a:solidFill>
+          <a:ln xmlns:a="http://schemas.openxmlformats.org/drawingml/2006/main" w="11430">
+            <a:solidFill>
+              <a:srgbClr val="B7CEF5"/>
+            </a:solidFill>
+            <a:prstDash val="solid"/>
+          </a:ln>
+        </p:spPr>
+      </p:sp>
+      <p:sp>
+        <p:nvSpPr>
+          <p:cNvPr id="63" name="desc-summarize-title">
+            <a:extLst xmlns:a="http://schemas.openxmlformats.org/drawingml/2006/main">
+              <a:ext uri="{FF2B5EF4-FFF2-40B4-BE49-F238E27FC236}">
+                <a16:creationId xmlns:a16="http://schemas.microsoft.com/office/drawing/2014/main" id="{E0BBCFE2-025E-4E20-924D-F8D48F1F0C5D}"/>
+              </a:ext>
+            </a:extLst>
+          </p:cNvPr>
+          <p:cNvSpPr>
+            <a:spLocks xmlns:a="http://schemas.openxmlformats.org/drawingml/2006/main" noGrp="1"/>
+          </p:cNvSpPr>
+          <p:nvPr/>
+        </p:nvSpPr>
+        <p:spPr>
+          <a:xfrm xmlns:a="http://schemas.openxmlformats.org/drawingml/2006/main">
+            <a:off x="4895850" y="4524375"/>
+            <a:ext cx="590550" cy="285750"/>
+          </a:xfrm>
+          <a:prstGeom xmlns:a="http://schemas.openxmlformats.org/drawingml/2006/main" prst="rect">
+            <a:avLst/>
+          </a:prstGeom>
+          <a:noFill xmlns:a="http://schemas.openxmlformats.org/drawingml/2006/main"/>
+          <a:ln xmlns:a="http://schemas.openxmlformats.org/drawingml/2006/main" w="0">
+            <a:noFill/>
+            <a:prstDash val="solid"/>
+          </a:ln>
+        </p:spPr>
+        <p:txBody>
+          <a:bodyPr xmlns:a="http://schemas.openxmlformats.org/drawingml/2006/main" lIns="0" tIns="0" rIns="0" bIns="0" anchor="ctr">
+            <a:normAutofit fontScale="100000"/>
+          </a:bodyPr>
+          <a:lstStyle xmlns:a="http://schemas.openxmlformats.org/drawingml/2006/main"/>
+          <a:p xmlns:a="http://schemas.openxmlformats.org/drawingml/2006/main">
+            <a:pPr algn="ctr">
+              <a:buNone/>
+              <a:defRPr sz="1200" b="1">
+                <a:solidFill>
+                  <a:srgbClr val="2F78E8"/>
+                </a:solidFill>
+                <a:latin typeface="Arial"/>
+                <a:ea typeface="Arial"/>
+                <a:cs typeface="Arial"/>
+              </a:defRPr>
+            </a:pPr>
+            <a:r>
+              <a:rPr sz="1200" b="1">
+                <a:solidFill>
+                  <a:srgbClr val="2F78E8"/>
+                </a:solidFill>
+                <a:latin typeface="Arial"/>
+                <a:ea typeface="Arial"/>
+                <a:cs typeface="Arial"/>
+              </a:rPr>
+              <a:t>Qwen</a:t>
+            </a:r>
+          </a:p>
+        </p:txBody>
+      </p:sp>
+      <p:sp>
+        <p:nvSpPr>
+          <p:cNvPr id="64" name="desc-summarize-subtitle">
+            <a:extLst xmlns:a="http://schemas.openxmlformats.org/drawingml/2006/main">
+              <a:ext uri="{FF2B5EF4-FFF2-40B4-BE49-F238E27FC236}">
+                <a16:creationId xmlns:a16="http://schemas.microsoft.com/office/drawing/2014/main" id="{F2C52146-5C7F-4BE9-82DD-F839E0220CFD}"/>
+              </a:ext>
+            </a:extLst>
+          </p:cNvPr>
+          <p:cNvSpPr>
+            <a:spLocks xmlns:a="http://schemas.openxmlformats.org/drawingml/2006/main" noGrp="1"/>
+          </p:cNvSpPr>
+          <p:nvPr/>
+        </p:nvSpPr>
+        <p:spPr>
+          <a:xfrm xmlns:a="http://schemas.openxmlformats.org/drawingml/2006/main">
+            <a:off x="4876800" y="4819650"/>
             <a:ext cx="628650" cy="257175"/>
           </a:xfrm>
           <a:prstGeom xmlns:a="http://schemas.openxmlformats.org/drawingml/2006/main" prst="rect">
@@ -3196,6 +3913,7 @@
           <a:lstStyle xmlns:a="http://schemas.openxmlformats.org/drawingml/2006/main"/>
           <a:p xmlns:a="http://schemas.openxmlformats.org/drawingml/2006/main">
             <a:pPr algn="ctr">
+              <a:buNone/>
               <a:defRPr sz="1050">
                 <a:solidFill>
                   <a:srgbClr val="667085"/>
@@ -3214,29 +3932,29 @@
                 <a:ea typeface="Arial"/>
                 <a:cs typeface="Arial"/>
               </a:rPr>
-              <a:t>relational triples</a:t>
+              <a:t>video summary</a:t>
             </a:r>
           </a:p>
         </p:txBody>
       </p:sp>
       <p:sp>
         <p:nvSpPr>
-          <p:cNvPr id="51" name="graph-summarize-box">
-            <a:extLst xmlns:a="http://schemas.openxmlformats.org/drawingml/2006/main">
-              <a:ext uri="{FF2B5EF4-FFF2-40B4-BE49-F238E27FC236}">
-                <a16:creationId xmlns:a16="http://schemas.microsoft.com/office/drawing/2014/main" id="{B1A3F3D6-C818-4B9D-AA26-CBBE6180EEDE}"/>
-              </a:ext>
-            </a:extLst>
-          </p:cNvPr>
-          <p:cNvSpPr>
-            <a:spLocks xmlns:a="http://schemas.openxmlformats.org/drawingml/2006/main" noGrp="1"/>
-          </p:cNvSpPr>
-          <p:nvPr/>
-        </p:nvSpPr>
-        <p:spPr>
-          <a:xfrm xmlns:a="http://schemas.openxmlformats.org/drawingml/2006/main">
-            <a:off x="4800600" y="2543175"/>
-            <a:ext cx="781050" cy="685800"/>
+          <p:cNvPr id="65" name="vs-desc-box">
+            <a:extLst xmlns:a="http://schemas.openxmlformats.org/drawingml/2006/main">
+              <a:ext uri="{FF2B5EF4-FFF2-40B4-BE49-F238E27FC236}">
+                <a16:creationId xmlns:a16="http://schemas.microsoft.com/office/drawing/2014/main" id="{6DC3F05C-CBA1-4F14-93E5-4FCD9DE73105}"/>
+              </a:ext>
+            </a:extLst>
+          </p:cNvPr>
+          <p:cNvSpPr>
+            <a:spLocks xmlns:a="http://schemas.openxmlformats.org/drawingml/2006/main" noGrp="1"/>
+          </p:cNvSpPr>
+          <p:nvPr/>
+        </p:nvSpPr>
+        <p:spPr>
+          <a:xfrm xmlns:a="http://schemas.openxmlformats.org/drawingml/2006/main">
+            <a:off x="5724525" y="4448175"/>
+            <a:ext cx="1285875" cy="685800"/>
           </a:xfrm>
           <a:prstGeom xmlns:a="http://schemas.openxmlformats.org/drawingml/2006/main" prst="roundRect">
             <a:avLst>
@@ -3244,11 +3962,11 @@
             </a:avLst>
           </a:prstGeom>
           <a:solidFill xmlns:a="http://schemas.openxmlformats.org/drawingml/2006/main">
-            <a:srgbClr val="FFFFFF"/>
+            <a:srgbClr val="2F78E8"/>
           </a:solidFill>
           <a:ln xmlns:a="http://schemas.openxmlformats.org/drawingml/2006/main" w="11430">
             <a:solidFill>
-              <a:srgbClr val="A8D8C8"/>
+              <a:srgbClr val="2F78E8"/>
             </a:solidFill>
             <a:prstDash val="solid"/>
           </a:ln>
@@ -3256,22 +3974,22 @@
       </p:sp>
       <p:sp>
         <p:nvSpPr>
-          <p:cNvPr id="52" name="graph-summarize-title">
-            <a:extLst xmlns:a="http://schemas.openxmlformats.org/drawingml/2006/main">
-              <a:ext uri="{FF2B5EF4-FFF2-40B4-BE49-F238E27FC236}">
-                <a16:creationId xmlns:a16="http://schemas.microsoft.com/office/drawing/2014/main" id="{4BE61D50-19CF-44A1-8A1E-3473BEC30B0A}"/>
-              </a:ext>
-            </a:extLst>
-          </p:cNvPr>
-          <p:cNvSpPr>
-            <a:spLocks xmlns:a="http://schemas.openxmlformats.org/drawingml/2006/main" noGrp="1"/>
-          </p:cNvSpPr>
-          <p:nvPr/>
-        </p:nvSpPr>
-        <p:spPr>
-          <a:xfrm xmlns:a="http://schemas.openxmlformats.org/drawingml/2006/main">
-            <a:off x="4895850" y="2619375"/>
-            <a:ext cx="590550" cy="285750"/>
+          <p:cNvPr id="66" name="vs-desc-title">
+            <a:extLst xmlns:a="http://schemas.openxmlformats.org/drawingml/2006/main">
+              <a:ext uri="{FF2B5EF4-FFF2-40B4-BE49-F238E27FC236}">
+                <a16:creationId xmlns:a16="http://schemas.microsoft.com/office/drawing/2014/main" id="{917C9E44-D42C-4630-AC6D-007956582620}"/>
+              </a:ext>
+            </a:extLst>
+          </p:cNvPr>
+          <p:cNvSpPr>
+            <a:spLocks xmlns:a="http://schemas.openxmlformats.org/drawingml/2006/main" noGrp="1"/>
+          </p:cNvSpPr>
+          <p:nvPr/>
+        </p:nvSpPr>
+        <p:spPr>
+          <a:xfrm xmlns:a="http://schemas.openxmlformats.org/drawingml/2006/main">
+            <a:off x="5819775" y="4448175"/>
+            <a:ext cx="1095375" cy="685800"/>
           </a:xfrm>
           <a:prstGeom xmlns:a="http://schemas.openxmlformats.org/drawingml/2006/main" prst="rect">
             <a:avLst/>
@@ -3289,9 +4007,10 @@
           <a:lstStyle xmlns:a="http://schemas.openxmlformats.org/drawingml/2006/main"/>
           <a:p xmlns:a="http://schemas.openxmlformats.org/drawingml/2006/main">
             <a:pPr algn="ctr">
-              <a:defRPr sz="1200" b="1">
-                <a:solidFill>
-                  <a:srgbClr val="168765"/>
+              <a:buNone/>
+              <a:defRPr sz="1350" b="1">
+                <a:solidFill>
+                  <a:srgbClr val="FFFFFF"/>
                 </a:solidFill>
                 <a:latin typeface="Arial"/>
                 <a:ea typeface="Arial"/>
@@ -3299,130 +4018,37 @@
               </a:defRPr>
             </a:pPr>
             <a:r>
-              <a:rPr sz="1200" b="1">
-                <a:solidFill>
-                  <a:srgbClr val="168765"/>
+              <a:rPr sz="1350" b="1">
+                <a:solidFill>
+                  <a:srgbClr val="FFFFFF"/>
                 </a:solidFill>
                 <a:latin typeface="Arial"/>
                 <a:ea typeface="Arial"/>
                 <a:cs typeface="Arial"/>
               </a:rPr>
-              <a:t>Qwen</a:t>
+              <a:t>VS_desc</a:t>
             </a:r>
           </a:p>
         </p:txBody>
       </p:sp>
       <p:sp>
         <p:nvSpPr>
-          <p:cNvPr id="53" name="graph-summarize-subtitle">
-            <a:extLst xmlns:a="http://schemas.openxmlformats.org/drawingml/2006/main">
-              <a:ext uri="{FF2B5EF4-FFF2-40B4-BE49-F238E27FC236}">
-                <a16:creationId xmlns:a16="http://schemas.microsoft.com/office/drawing/2014/main" id="{4B106C94-7A1A-4CFE-9AE9-68E2D0DA63C0}"/>
-              </a:ext>
-            </a:extLst>
-          </p:cNvPr>
-          <p:cNvSpPr>
-            <a:spLocks xmlns:a="http://schemas.openxmlformats.org/drawingml/2006/main" noGrp="1"/>
-          </p:cNvSpPr>
-          <p:nvPr/>
-        </p:nvSpPr>
-        <p:spPr>
-          <a:xfrm xmlns:a="http://schemas.openxmlformats.org/drawingml/2006/main">
-            <a:off x="4876800" y="2914650"/>
-            <a:ext cx="628650" cy="257175"/>
-          </a:xfrm>
-          <a:prstGeom xmlns:a="http://schemas.openxmlformats.org/drawingml/2006/main" prst="rect">
-            <a:avLst/>
-          </a:prstGeom>
-          <a:noFill xmlns:a="http://schemas.openxmlformats.org/drawingml/2006/main"/>
-          <a:ln xmlns:a="http://schemas.openxmlformats.org/drawingml/2006/main" w="0">
-            <a:noFill/>
-            <a:prstDash val="solid"/>
-          </a:ln>
-        </p:spPr>
-        <p:txBody>
-          <a:bodyPr xmlns:a="http://schemas.openxmlformats.org/drawingml/2006/main" lIns="0" tIns="0" rIns="0" bIns="0" anchor="ctr">
-            <a:normAutofit fontScale="80357"/>
-          </a:bodyPr>
-          <a:lstStyle xmlns:a="http://schemas.openxmlformats.org/drawingml/2006/main"/>
-          <a:p xmlns:a="http://schemas.openxmlformats.org/drawingml/2006/main">
-            <a:pPr algn="ctr">
-              <a:defRPr sz="1050">
-                <a:solidFill>
-                  <a:srgbClr val="667085"/>
-                </a:solidFill>
-                <a:latin typeface="Arial"/>
-                <a:ea typeface="Arial"/>
-                <a:cs typeface="Arial"/>
-              </a:defRPr>
-            </a:pPr>
-            <a:r>
-              <a:rPr sz="1050">
-                <a:solidFill>
-                  <a:srgbClr val="667085"/>
-                </a:solidFill>
-                <a:latin typeface="Arial"/>
-                <a:ea typeface="Arial"/>
-                <a:cs typeface="Arial"/>
-              </a:rPr>
-              <a:t>video summary</a:t>
-            </a:r>
-          </a:p>
-        </p:txBody>
-      </p:sp>
-      <p:sp>
-        <p:nvSpPr>
-          <p:cNvPr id="54" name="vs-graph-box">
-            <a:extLst xmlns:a="http://schemas.openxmlformats.org/drawingml/2006/main">
-              <a:ext uri="{FF2B5EF4-FFF2-40B4-BE49-F238E27FC236}">
-                <a16:creationId xmlns:a16="http://schemas.microsoft.com/office/drawing/2014/main" id="{DD94FE2A-994A-482E-B2AC-6CD01E513F71}"/>
-              </a:ext>
-            </a:extLst>
-          </p:cNvPr>
-          <p:cNvSpPr>
-            <a:spLocks xmlns:a="http://schemas.openxmlformats.org/drawingml/2006/main" noGrp="1"/>
-          </p:cNvSpPr>
-          <p:nvPr/>
-        </p:nvSpPr>
-        <p:spPr>
-          <a:xfrm xmlns:a="http://schemas.openxmlformats.org/drawingml/2006/main">
-            <a:off x="5724525" y="2543175"/>
-            <a:ext cx="1285875" cy="685800"/>
-          </a:xfrm>
-          <a:prstGeom xmlns:a="http://schemas.openxmlformats.org/drawingml/2006/main" prst="roundRect">
-            <a:avLst>
-              <a:gd name="adj" fmla="val 11111"/>
-            </a:avLst>
-          </a:prstGeom>
-          <a:solidFill xmlns:a="http://schemas.openxmlformats.org/drawingml/2006/main">
-            <a:srgbClr val="168765"/>
-          </a:solidFill>
-          <a:ln xmlns:a="http://schemas.openxmlformats.org/drawingml/2006/main" w="11430">
-            <a:solidFill>
-              <a:srgbClr val="168765"/>
-            </a:solidFill>
-            <a:prstDash val="solid"/>
-          </a:ln>
-        </p:spPr>
-      </p:sp>
-      <p:sp>
-        <p:nvSpPr>
-          <p:cNvPr id="55" name="vs-graph-title">
-            <a:extLst xmlns:a="http://schemas.openxmlformats.org/drawingml/2006/main">
-              <a:ext uri="{FF2B5EF4-FFF2-40B4-BE49-F238E27FC236}">
-                <a16:creationId xmlns:a16="http://schemas.microsoft.com/office/drawing/2014/main" id="{F1A347AB-5E37-4954-B4DE-B899E21F3CC0}"/>
-              </a:ext>
-            </a:extLst>
-          </p:cNvPr>
-          <p:cNvSpPr>
-            <a:spLocks xmlns:a="http://schemas.openxmlformats.org/drawingml/2006/main" noGrp="1"/>
-          </p:cNvSpPr>
-          <p:nvPr/>
-        </p:nvSpPr>
-        <p:spPr>
-          <a:xfrm xmlns:a="http://schemas.openxmlformats.org/drawingml/2006/main">
-            <a:off x="5819775" y="2543175"/>
-            <a:ext cx="1095375" cy="685800"/>
+          <p:cNvPr id="67" name="id-baseline-label">
+            <a:extLst xmlns:a="http://schemas.openxmlformats.org/drawingml/2006/main">
+              <a:ext uri="{FF2B5EF4-FFF2-40B4-BE49-F238E27FC236}">
+                <a16:creationId xmlns:a16="http://schemas.microsoft.com/office/drawing/2014/main" id="{E822ED0D-E034-47DA-97D2-848C3CEB671C}"/>
+              </a:ext>
+            </a:extLst>
+          </p:cNvPr>
+          <p:cNvSpPr>
+            <a:spLocks xmlns:a="http://schemas.openxmlformats.org/drawingml/2006/main" noGrp="1"/>
+          </p:cNvSpPr>
+          <p:nvPr/>
+        </p:nvSpPr>
+        <p:spPr>
+          <a:xfrm xmlns:a="http://schemas.openxmlformats.org/drawingml/2006/main">
+            <a:off x="3048000" y="3724275"/>
+            <a:ext cx="3810000" cy="228600"/>
           </a:xfrm>
           <a:prstGeom xmlns:a="http://schemas.openxmlformats.org/drawingml/2006/main" prst="rect">
             <a:avLst/>
@@ -3440,9 +4066,10 @@
           <a:lstStyle xmlns:a="http://schemas.openxmlformats.org/drawingml/2006/main"/>
           <a:p xmlns:a="http://schemas.openxmlformats.org/drawingml/2006/main">
             <a:pPr algn="ctr">
-              <a:defRPr sz="1350" b="1">
-                <a:solidFill>
-                  <a:srgbClr val="FFFFFF"/>
+              <a:buNone/>
+              <a:defRPr sz="1050" b="1">
+                <a:solidFill>
+                  <a:srgbClr val="667085"/>
                 </a:solidFill>
                 <a:latin typeface="Arial"/>
                 <a:ea typeface="Arial"/>
@@ -3450,49 +4077,49 @@
               </a:defRPr>
             </a:pPr>
             <a:r>
-              <a:rPr sz="1350" b="1">
-                <a:solidFill>
-                  <a:srgbClr val="FFFFFF"/>
+              <a:rPr sz="1050" b="1">
+                <a:solidFill>
+                  <a:srgbClr val="667085"/>
                 </a:solidFill>
                 <a:latin typeface="Arial"/>
                 <a:ea typeface="Arial"/>
                 <a:cs typeface="Arial"/>
               </a:rPr>
-              <a:t>VS_Graph</a:t>
+              <a:t>ID BASELINE  ·  same interaction sequence</a:t>
             </a:r>
           </a:p>
         </p:txBody>
       </p:sp>
       <p:sp>
         <p:nvSpPr>
-          <p:cNvPr id="56" name="desc-extract-box">
-            <a:extLst xmlns:a="http://schemas.openxmlformats.org/drawingml/2006/main">
-              <a:ext uri="{FF2B5EF4-FFF2-40B4-BE49-F238E27FC236}">
-                <a16:creationId xmlns:a16="http://schemas.microsoft.com/office/drawing/2014/main" id="{AC1B8A87-C81E-439D-A337-719A84325D68}"/>
-              </a:ext>
-            </a:extLst>
-          </p:cNvPr>
-          <p:cNvSpPr>
-            <a:spLocks xmlns:a="http://schemas.openxmlformats.org/drawingml/2006/main" noGrp="1"/>
-          </p:cNvSpPr>
-          <p:nvPr/>
-        </p:nvSpPr>
-        <p:spPr>
-          <a:xfrm xmlns:a="http://schemas.openxmlformats.org/drawingml/2006/main">
-            <a:off x="2952750" y="4448175"/>
-            <a:ext cx="781050" cy="685800"/>
+          <p:cNvPr id="68" name="graph-embed-box">
+            <a:extLst xmlns:a="http://schemas.openxmlformats.org/drawingml/2006/main">
+              <a:ext uri="{FF2B5EF4-FFF2-40B4-BE49-F238E27FC236}">
+                <a16:creationId xmlns:a16="http://schemas.microsoft.com/office/drawing/2014/main" id="{52D1BB73-E7AD-4FA1-8BE6-0DDE43192F1E}"/>
+              </a:ext>
+            </a:extLst>
+          </p:cNvPr>
+          <p:cNvSpPr>
+            <a:spLocks xmlns:a="http://schemas.openxmlformats.org/drawingml/2006/main" noGrp="1"/>
+          </p:cNvSpPr>
+          <p:nvPr/>
+        </p:nvSpPr>
+        <p:spPr>
+          <a:xfrm xmlns:a="http://schemas.openxmlformats.org/drawingml/2006/main">
+            <a:off x="7734300" y="2428875"/>
+            <a:ext cx="1866900" cy="323850"/>
           </a:xfrm>
           <a:prstGeom xmlns:a="http://schemas.openxmlformats.org/drawingml/2006/main" prst="roundRect">
             <a:avLst>
-              <a:gd name="adj" fmla="val 11111"/>
+              <a:gd name="adj" fmla="val 18182"/>
             </a:avLst>
           </a:prstGeom>
           <a:solidFill xmlns:a="http://schemas.openxmlformats.org/drawingml/2006/main">
-            <a:srgbClr val="FFFFFF"/>
+            <a:srgbClr val="E7F5F0"/>
           </a:solidFill>
           <a:ln xmlns:a="http://schemas.openxmlformats.org/drawingml/2006/main" w="11430">
             <a:solidFill>
-              <a:srgbClr val="B7CEF5"/>
+              <a:srgbClr val="A8D8C8"/>
             </a:solidFill>
             <a:prstDash val="solid"/>
           </a:ln>
@@ -3500,22 +4127,22 @@
       </p:sp>
       <p:sp>
         <p:nvSpPr>
-          <p:cNvPr id="57" name="desc-extract-title">
-            <a:extLst xmlns:a="http://schemas.openxmlformats.org/drawingml/2006/main">
-              <a:ext uri="{FF2B5EF4-FFF2-40B4-BE49-F238E27FC236}">
-                <a16:creationId xmlns:a16="http://schemas.microsoft.com/office/drawing/2014/main" id="{25315ED2-1343-43D9-9CAD-59680CE97E17}"/>
-              </a:ext>
-            </a:extLst>
-          </p:cNvPr>
-          <p:cNvSpPr>
-            <a:spLocks xmlns:a="http://schemas.openxmlformats.org/drawingml/2006/main" noGrp="1"/>
-          </p:cNvSpPr>
-          <p:nvPr/>
-        </p:nvSpPr>
-        <p:spPr>
-          <a:xfrm xmlns:a="http://schemas.openxmlformats.org/drawingml/2006/main">
-            <a:off x="3048000" y="4524375"/>
-            <a:ext cx="590550" cy="285750"/>
+          <p:cNvPr id="69" name="graph-embed-title">
+            <a:extLst xmlns:a="http://schemas.openxmlformats.org/drawingml/2006/main">
+              <a:ext uri="{FF2B5EF4-FFF2-40B4-BE49-F238E27FC236}">
+                <a16:creationId xmlns:a16="http://schemas.microsoft.com/office/drawing/2014/main" id="{2964591D-3A8B-4C75-8BAD-C8C00BC0C9C8}"/>
+              </a:ext>
+            </a:extLst>
+          </p:cNvPr>
+          <p:cNvSpPr>
+            <a:spLocks xmlns:a="http://schemas.openxmlformats.org/drawingml/2006/main" noGrp="1"/>
+          </p:cNvSpPr>
+          <p:nvPr/>
+        </p:nvSpPr>
+        <p:spPr>
+          <a:xfrm xmlns:a="http://schemas.openxmlformats.org/drawingml/2006/main">
+            <a:off x="7829550" y="2428875"/>
+            <a:ext cx="1676400" cy="323850"/>
           </a:xfrm>
           <a:prstGeom xmlns:a="http://schemas.openxmlformats.org/drawingml/2006/main" prst="rect">
             <a:avLst/>
@@ -3533,9 +4160,10 @@
           <a:lstStyle xmlns:a="http://schemas.openxmlformats.org/drawingml/2006/main"/>
           <a:p xmlns:a="http://schemas.openxmlformats.org/drawingml/2006/main">
             <a:pPr algn="ctr">
+              <a:buNone/>
               <a:defRPr sz="1200" b="1">
                 <a:solidFill>
-                  <a:srgbClr val="2F78E8"/>
+                  <a:srgbClr val="168765"/>
                 </a:solidFill>
                 <a:latin typeface="Arial"/>
                 <a:ea typeface="Arial"/>
@@ -3545,35 +4173,70 @@
             <a:r>
               <a:rPr sz="1200" b="1">
                 <a:solidFill>
-                  <a:srgbClr val="2F78E8"/>
+                  <a:srgbClr val="168765"/>
                 </a:solidFill>
                 <a:latin typeface="Arial"/>
                 <a:ea typeface="Arial"/>
                 <a:cs typeface="Arial"/>
               </a:rPr>
-              <a:t>Qwen</a:t>
+              <a:t>BGE 1024D  ·  QWEN</a:t>
             </a:r>
           </a:p>
         </p:txBody>
       </p:sp>
       <p:sp>
         <p:nvSpPr>
-          <p:cNvPr id="58" name="desc-extract-subtitle">
-            <a:extLst xmlns:a="http://schemas.openxmlformats.org/drawingml/2006/main">
-              <a:ext uri="{FF2B5EF4-FFF2-40B4-BE49-F238E27FC236}">
-                <a16:creationId xmlns:a16="http://schemas.microsoft.com/office/drawing/2014/main" id="{33072E79-9F3D-48CD-B9AB-0A8B2D9CFF0A}"/>
-              </a:ext>
-            </a:extLst>
-          </p:cNvPr>
-          <p:cNvSpPr>
-            <a:spLocks xmlns:a="http://schemas.openxmlformats.org/drawingml/2006/main" noGrp="1"/>
-          </p:cNvSpPr>
-          <p:nvPr/>
-        </p:nvSpPr>
-        <p:spPr>
-          <a:xfrm xmlns:a="http://schemas.openxmlformats.org/drawingml/2006/main">
-            <a:off x="3028950" y="4819650"/>
-            <a:ext cx="628650" cy="257175"/>
+          <p:cNvPr id="70" name="sasrec-graph-box">
+            <a:extLst xmlns:a="http://schemas.openxmlformats.org/drawingml/2006/main">
+              <a:ext uri="{FF2B5EF4-FFF2-40B4-BE49-F238E27FC236}">
+                <a16:creationId xmlns:a16="http://schemas.microsoft.com/office/drawing/2014/main" id="{B1400DF1-76E6-4B84-ACAB-86C617D0BF32}"/>
+              </a:ext>
+            </a:extLst>
+          </p:cNvPr>
+          <p:cNvSpPr>
+            <a:spLocks xmlns:a="http://schemas.openxmlformats.org/drawingml/2006/main" noGrp="1"/>
+          </p:cNvSpPr>
+          <p:nvPr/>
+        </p:nvSpPr>
+        <p:spPr>
+          <a:xfrm xmlns:a="http://schemas.openxmlformats.org/drawingml/2006/main">
+            <a:off x="7734300" y="2809875"/>
+            <a:ext cx="1866900" cy="342900"/>
+          </a:xfrm>
+          <a:prstGeom xmlns:a="http://schemas.openxmlformats.org/drawingml/2006/main" prst="roundRect">
+            <a:avLst>
+              <a:gd name="adj" fmla="val 14286"/>
+            </a:avLst>
+          </a:prstGeom>
+          <a:solidFill xmlns:a="http://schemas.openxmlformats.org/drawingml/2006/main">
+            <a:srgbClr val="168765"/>
+          </a:solidFill>
+          <a:ln xmlns:a="http://schemas.openxmlformats.org/drawingml/2006/main" w="11430">
+            <a:solidFill>
+              <a:srgbClr val="168765"/>
+            </a:solidFill>
+            <a:prstDash val="solid"/>
+          </a:ln>
+        </p:spPr>
+      </p:sp>
+      <p:sp>
+        <p:nvSpPr>
+          <p:cNvPr id="71" name="sasrec-graph-title">
+            <a:extLst xmlns:a="http://schemas.openxmlformats.org/drawingml/2006/main">
+              <a:ext uri="{FF2B5EF4-FFF2-40B4-BE49-F238E27FC236}">
+                <a16:creationId xmlns:a16="http://schemas.microsoft.com/office/drawing/2014/main" id="{AC678BF6-8568-4E5E-9F8B-C3AA3A8E7D5C}"/>
+              </a:ext>
+            </a:extLst>
+          </p:cNvPr>
+          <p:cNvSpPr>
+            <a:spLocks xmlns:a="http://schemas.openxmlformats.org/drawingml/2006/main" noGrp="1"/>
+          </p:cNvSpPr>
+          <p:nvPr/>
+        </p:nvSpPr>
+        <p:spPr>
+          <a:xfrm xmlns:a="http://schemas.openxmlformats.org/drawingml/2006/main">
+            <a:off x="7829550" y="2809875"/>
+            <a:ext cx="1676400" cy="342900"/>
           </a:xfrm>
           <a:prstGeom xmlns:a="http://schemas.openxmlformats.org/drawingml/2006/main" prst="rect">
             <a:avLst/>
@@ -3586,14 +4249,15 @@
         </p:spPr>
         <p:txBody>
           <a:bodyPr xmlns:a="http://schemas.openxmlformats.org/drawingml/2006/main" lIns="0" tIns="0" rIns="0" bIns="0" anchor="ctr">
-            <a:normAutofit fontScale="80357"/>
+            <a:normAutofit fontScale="93750"/>
           </a:bodyPr>
           <a:lstStyle xmlns:a="http://schemas.openxmlformats.org/drawingml/2006/main"/>
           <a:p xmlns:a="http://schemas.openxmlformats.org/drawingml/2006/main">
             <a:pPr algn="ctr">
-              <a:defRPr sz="1050">
-                <a:solidFill>
-                  <a:srgbClr val="667085"/>
+              <a:buNone/>
+              <a:defRPr sz="1200" b="1">
+                <a:solidFill>
+                  <a:srgbClr val="FFFFFF"/>
                 </a:solidFill>
                 <a:latin typeface="Arial"/>
                 <a:ea typeface="Arial"/>
@@ -3601,49 +4265,73 @@
               </a:defRPr>
             </a:pPr>
             <a:r>
-              <a:rPr sz="1050">
-                <a:solidFill>
-                  <a:srgbClr val="667085"/>
+              <a:rPr sz="1200" b="1">
+                <a:solidFill>
+                  <a:srgbClr val="FFFFFF"/>
                 </a:solidFill>
                 <a:latin typeface="Arial"/>
                 <a:ea typeface="Arial"/>
                 <a:cs typeface="Arial"/>
               </a:rPr>
-              <a:t>scene description</a:t>
+              <a:t>SASRec_GRAPH</a:t>
+            </a:r>
+          </a:p>
+          <a:p xmlns:a="http://schemas.openxmlformats.org/drawingml/2006/main">
+            <a:pPr algn="ctr">
+              <a:buNone/>
+              <a:defRPr sz="1200" b="1">
+                <a:solidFill>
+                  <a:srgbClr val="FFFFFF"/>
+                </a:solidFill>
+                <a:latin typeface="Arial"/>
+                <a:ea typeface="Arial"/>
+                <a:cs typeface="Arial"/>
+              </a:defRPr>
+            </a:pPr>
+            <a:r>
+              <a:rPr sz="1200" b="1">
+                <a:solidFill>
+                  <a:srgbClr val="FFFFFF"/>
+                </a:solidFill>
+                <a:latin typeface="Arial"/>
+                <a:ea typeface="Arial"/>
+                <a:cs typeface="Arial"/>
+              </a:rPr>
+              <a:t>QWEN</a:t>
             </a:r>
           </a:p>
         </p:txBody>
       </p:sp>
       <p:sp>
         <p:nvSpPr>
-          <p:cNvPr id="59" name="sd-box">
-            <a:extLst xmlns:a="http://schemas.openxmlformats.org/drawingml/2006/main">
-              <a:ext uri="{FF2B5EF4-FFF2-40B4-BE49-F238E27FC236}">
-                <a16:creationId xmlns:a16="http://schemas.microsoft.com/office/drawing/2014/main" id="{7C8DB0FD-DE39-46A3-A8FC-22430EFE24E6}"/>
-              </a:ext>
-            </a:extLst>
-          </p:cNvPr>
-          <p:cNvSpPr>
-            <a:spLocks xmlns:a="http://schemas.openxmlformats.org/drawingml/2006/main" noGrp="1"/>
-          </p:cNvSpPr>
-          <p:nvPr/>
-        </p:nvSpPr>
-        <p:spPr>
-          <a:xfrm xmlns:a="http://schemas.openxmlformats.org/drawingml/2006/main">
-            <a:off x="3876675" y="4448175"/>
-            <a:ext cx="781050" cy="685800"/>
+          <p:cNvPr id="72" name="sasrec-id-box">
+            <a:extLst xmlns:a="http://schemas.openxmlformats.org/drawingml/2006/main">
+              <a:ext uri="{FF2B5EF4-FFF2-40B4-BE49-F238E27FC236}">
+                <a16:creationId xmlns:a16="http://schemas.microsoft.com/office/drawing/2014/main" id="{04AFFAC0-5E24-41AD-89F6-A8F4CD0AE61E}"/>
+              </a:ext>
+            </a:extLst>
+          </p:cNvPr>
+          <p:cNvSpPr>
+            <a:spLocks xmlns:a="http://schemas.openxmlformats.org/drawingml/2006/main" noGrp="1"/>
+          </p:cNvSpPr>
+          <p:nvPr/>
+        </p:nvSpPr>
+        <p:spPr>
+          <a:xfrm xmlns:a="http://schemas.openxmlformats.org/drawingml/2006/main">
+            <a:off x="7734300" y="3962400"/>
+            <a:ext cx="1866900" cy="361950"/>
           </a:xfrm>
           <a:prstGeom xmlns:a="http://schemas.openxmlformats.org/drawingml/2006/main" prst="roundRect">
             <a:avLst>
-              <a:gd name="adj" fmla="val 11111"/>
+              <a:gd name="adj" fmla="val 14286"/>
             </a:avLst>
           </a:prstGeom>
           <a:solidFill xmlns:a="http://schemas.openxmlformats.org/drawingml/2006/main">
-            <a:srgbClr val="FFFFFF"/>
+            <a:srgbClr val="EEF0F3"/>
           </a:solidFill>
           <a:ln xmlns:a="http://schemas.openxmlformats.org/drawingml/2006/main" w="11430">
             <a:solidFill>
-              <a:srgbClr val="B7CEF5"/>
+              <a:srgbClr val="B7BBC2"/>
             </a:solidFill>
             <a:prstDash val="solid"/>
           </a:ln>
@@ -3651,22 +4339,22 @@
       </p:sp>
       <p:sp>
         <p:nvSpPr>
-          <p:cNvPr id="60" name="sd-title">
-            <a:extLst xmlns:a="http://schemas.openxmlformats.org/drawingml/2006/main">
-              <a:ext uri="{FF2B5EF4-FFF2-40B4-BE49-F238E27FC236}">
-                <a16:creationId xmlns:a16="http://schemas.microsoft.com/office/drawing/2014/main" id="{4CDD24C1-CE05-488D-9F3F-6E55152005F6}"/>
-              </a:ext>
-            </a:extLst>
-          </p:cNvPr>
-          <p:cNvSpPr>
-            <a:spLocks xmlns:a="http://schemas.openxmlformats.org/drawingml/2006/main" noGrp="1"/>
-          </p:cNvSpPr>
-          <p:nvPr/>
-        </p:nvSpPr>
-        <p:spPr>
-          <a:xfrm xmlns:a="http://schemas.openxmlformats.org/drawingml/2006/main">
-            <a:off x="3971925" y="4524375"/>
-            <a:ext cx="590550" cy="285750"/>
+          <p:cNvPr id="73" name="sasrec-id-title">
+            <a:extLst xmlns:a="http://schemas.openxmlformats.org/drawingml/2006/main">
+              <a:ext uri="{FF2B5EF4-FFF2-40B4-BE49-F238E27FC236}">
+                <a16:creationId xmlns:a16="http://schemas.microsoft.com/office/drawing/2014/main" id="{200C4F2E-27F0-457E-A7D6-0B190E604096}"/>
+              </a:ext>
+            </a:extLst>
+          </p:cNvPr>
+          <p:cNvSpPr>
+            <a:spLocks xmlns:a="http://schemas.openxmlformats.org/drawingml/2006/main" noGrp="1"/>
+          </p:cNvSpPr>
+          <p:nvPr/>
+        </p:nvSpPr>
+        <p:spPr>
+          <a:xfrm xmlns:a="http://schemas.openxmlformats.org/drawingml/2006/main">
+            <a:off x="7829550" y="3962400"/>
+            <a:ext cx="1676400" cy="361950"/>
           </a:xfrm>
           <a:prstGeom xmlns:a="http://schemas.openxmlformats.org/drawingml/2006/main" prst="rect">
             <a:avLst/>
@@ -3684,9 +4372,10 @@
           <a:lstStyle xmlns:a="http://schemas.openxmlformats.org/drawingml/2006/main"/>
           <a:p xmlns:a="http://schemas.openxmlformats.org/drawingml/2006/main">
             <a:pPr algn="ctr">
-              <a:defRPr sz="1575" b="1">
-                <a:solidFill>
-                  <a:srgbClr val="2F78E8"/>
+              <a:buNone/>
+              <a:defRPr sz="1500" b="1">
+                <a:solidFill>
+                  <a:srgbClr val="111827"/>
                 </a:solidFill>
                 <a:latin typeface="Arial"/>
                 <a:ea typeface="Arial"/>
@@ -3694,37 +4383,72 @@
               </a:defRPr>
             </a:pPr>
             <a:r>
-              <a:rPr sz="1575" b="1">
-                <a:solidFill>
-                  <a:srgbClr val="2F78E8"/>
+              <a:rPr sz="1500" b="1">
+                <a:solidFill>
+                  <a:srgbClr val="111827"/>
                 </a:solidFill>
                 <a:latin typeface="Arial"/>
                 <a:ea typeface="Arial"/>
                 <a:cs typeface="Arial"/>
               </a:rPr>
-              <a:t>SD</a:t>
+              <a:t>SASRec_ID</a:t>
             </a:r>
           </a:p>
         </p:txBody>
       </p:sp>
       <p:sp>
         <p:nvSpPr>
-          <p:cNvPr id="61" name="sd-subtitle">
-            <a:extLst xmlns:a="http://schemas.openxmlformats.org/drawingml/2006/main">
-              <a:ext uri="{FF2B5EF4-FFF2-40B4-BE49-F238E27FC236}">
-                <a16:creationId xmlns:a16="http://schemas.microsoft.com/office/drawing/2014/main" id="{7707E5E8-F998-467E-BBC3-2F16EB5ECA46}"/>
-              </a:ext>
-            </a:extLst>
-          </p:cNvPr>
-          <p:cNvSpPr>
-            <a:spLocks xmlns:a="http://schemas.openxmlformats.org/drawingml/2006/main" noGrp="1"/>
-          </p:cNvSpPr>
-          <p:nvPr/>
-        </p:nvSpPr>
-        <p:spPr>
-          <a:xfrm xmlns:a="http://schemas.openxmlformats.org/drawingml/2006/main">
-            <a:off x="3952875" y="4819650"/>
-            <a:ext cx="628650" cy="257175"/>
+          <p:cNvPr id="74" name="desc-embed-box">
+            <a:extLst xmlns:a="http://schemas.openxmlformats.org/drawingml/2006/main">
+              <a:ext uri="{FF2B5EF4-FFF2-40B4-BE49-F238E27FC236}">
+                <a16:creationId xmlns:a16="http://schemas.microsoft.com/office/drawing/2014/main" id="{8817C308-035D-4DA5-AF2A-9F6ECB6DE590}"/>
+              </a:ext>
+            </a:extLst>
+          </p:cNvPr>
+          <p:cNvSpPr>
+            <a:spLocks xmlns:a="http://schemas.openxmlformats.org/drawingml/2006/main" noGrp="1"/>
+          </p:cNvSpPr>
+          <p:nvPr/>
+        </p:nvSpPr>
+        <p:spPr>
+          <a:xfrm xmlns:a="http://schemas.openxmlformats.org/drawingml/2006/main">
+            <a:off x="7734300" y="4476750"/>
+            <a:ext cx="1866900" cy="323850"/>
+          </a:xfrm>
+          <a:prstGeom xmlns:a="http://schemas.openxmlformats.org/drawingml/2006/main" prst="roundRect">
+            <a:avLst>
+              <a:gd name="adj" fmla="val 18182"/>
+            </a:avLst>
+          </a:prstGeom>
+          <a:solidFill xmlns:a="http://schemas.openxmlformats.org/drawingml/2006/main">
+            <a:srgbClr val="EAF2FF"/>
+          </a:solidFill>
+          <a:ln xmlns:a="http://schemas.openxmlformats.org/drawingml/2006/main" w="11430">
+            <a:solidFill>
+              <a:srgbClr val="B7CEF5"/>
+            </a:solidFill>
+            <a:prstDash val="solid"/>
+          </a:ln>
+        </p:spPr>
+      </p:sp>
+      <p:sp>
+        <p:nvSpPr>
+          <p:cNvPr id="75" name="desc-embed-title">
+            <a:extLst xmlns:a="http://schemas.openxmlformats.org/drawingml/2006/main">
+              <a:ext uri="{FF2B5EF4-FFF2-40B4-BE49-F238E27FC236}">
+                <a16:creationId xmlns:a16="http://schemas.microsoft.com/office/drawing/2014/main" id="{5FB43F6E-B273-484B-8601-02033703840A}"/>
+              </a:ext>
+            </a:extLst>
+          </p:cNvPr>
+          <p:cNvSpPr>
+            <a:spLocks xmlns:a="http://schemas.openxmlformats.org/drawingml/2006/main" noGrp="1"/>
+          </p:cNvSpPr>
+          <p:nvPr/>
+        </p:nvSpPr>
+        <p:spPr>
+          <a:xfrm xmlns:a="http://schemas.openxmlformats.org/drawingml/2006/main">
+            <a:off x="7829550" y="4476750"/>
+            <a:ext cx="1676400" cy="323850"/>
           </a:xfrm>
           <a:prstGeom xmlns:a="http://schemas.openxmlformats.org/drawingml/2006/main" prst="rect">
             <a:avLst/>
@@ -3742,9 +4466,10 @@
           <a:lstStyle xmlns:a="http://schemas.openxmlformats.org/drawingml/2006/main"/>
           <a:p xmlns:a="http://schemas.openxmlformats.org/drawingml/2006/main">
             <a:pPr algn="ctr">
-              <a:defRPr sz="1050">
-                <a:solidFill>
-                  <a:srgbClr val="667085"/>
+              <a:buNone/>
+              <a:defRPr sz="1200" b="1">
+                <a:solidFill>
+                  <a:srgbClr val="2F78E8"/>
                 </a:solidFill>
                 <a:latin typeface="Arial"/>
                 <a:ea typeface="Arial"/>
@@ -3752,49 +4477,49 @@
               </a:defRPr>
             </a:pPr>
             <a:r>
-              <a:rPr sz="1050">
-                <a:solidFill>
-                  <a:srgbClr val="667085"/>
+              <a:rPr sz="1200" b="1">
+                <a:solidFill>
+                  <a:srgbClr val="2F78E8"/>
                 </a:solidFill>
                 <a:latin typeface="Arial"/>
                 <a:ea typeface="Arial"/>
                 <a:cs typeface="Arial"/>
               </a:rPr>
-              <a:t>scene text</a:t>
+              <a:t>BGE 1024D  ·  DESC</a:t>
             </a:r>
           </a:p>
         </p:txBody>
       </p:sp>
       <p:sp>
         <p:nvSpPr>
-          <p:cNvPr id="62" name="desc-summarize-box">
-            <a:extLst xmlns:a="http://schemas.openxmlformats.org/drawingml/2006/main">
-              <a:ext uri="{FF2B5EF4-FFF2-40B4-BE49-F238E27FC236}">
-                <a16:creationId xmlns:a16="http://schemas.microsoft.com/office/drawing/2014/main" id="{E75ABAAE-09F8-4374-A491-8B1B47C02BC6}"/>
-              </a:ext>
-            </a:extLst>
-          </p:cNvPr>
-          <p:cNvSpPr>
-            <a:spLocks xmlns:a="http://schemas.openxmlformats.org/drawingml/2006/main" noGrp="1"/>
-          </p:cNvSpPr>
-          <p:nvPr/>
-        </p:nvSpPr>
-        <p:spPr>
-          <a:xfrm xmlns:a="http://schemas.openxmlformats.org/drawingml/2006/main">
-            <a:off x="4800600" y="4448175"/>
-            <a:ext cx="781050" cy="685800"/>
+          <p:cNvPr id="76" name="sasrec-desc-box">
+            <a:extLst xmlns:a="http://schemas.openxmlformats.org/drawingml/2006/main">
+              <a:ext uri="{FF2B5EF4-FFF2-40B4-BE49-F238E27FC236}">
+                <a16:creationId xmlns:a16="http://schemas.microsoft.com/office/drawing/2014/main" id="{13EFABDB-6663-4597-A8B0-7FB3FBAFA744}"/>
+              </a:ext>
+            </a:extLst>
+          </p:cNvPr>
+          <p:cNvSpPr>
+            <a:spLocks xmlns:a="http://schemas.openxmlformats.org/drawingml/2006/main" noGrp="1"/>
+          </p:cNvSpPr>
+          <p:nvPr/>
+        </p:nvSpPr>
+        <p:spPr>
+          <a:xfrm xmlns:a="http://schemas.openxmlformats.org/drawingml/2006/main">
+            <a:off x="7734300" y="4857750"/>
+            <a:ext cx="1866900" cy="342900"/>
           </a:xfrm>
           <a:prstGeom xmlns:a="http://schemas.openxmlformats.org/drawingml/2006/main" prst="roundRect">
             <a:avLst>
-              <a:gd name="adj" fmla="val 11111"/>
+              <a:gd name="adj" fmla="val 14286"/>
             </a:avLst>
           </a:prstGeom>
           <a:solidFill xmlns:a="http://schemas.openxmlformats.org/drawingml/2006/main">
-            <a:srgbClr val="FFFFFF"/>
+            <a:srgbClr val="2F78E8"/>
           </a:solidFill>
           <a:ln xmlns:a="http://schemas.openxmlformats.org/drawingml/2006/main" w="11430">
             <a:solidFill>
-              <a:srgbClr val="B7CEF5"/>
+              <a:srgbClr val="2F78E8"/>
             </a:solidFill>
             <a:prstDash val="solid"/>
           </a:ln>
@@ -3802,22 +4527,22 @@
       </p:sp>
       <p:sp>
         <p:nvSpPr>
-          <p:cNvPr id="63" name="desc-summarize-title">
-            <a:extLst xmlns:a="http://schemas.openxmlformats.org/drawingml/2006/main">
-              <a:ext uri="{FF2B5EF4-FFF2-40B4-BE49-F238E27FC236}">
-                <a16:creationId xmlns:a16="http://schemas.microsoft.com/office/drawing/2014/main" id="{E0BBCFE2-025E-4E20-924D-F8D48F1F0C5D}"/>
-              </a:ext>
-            </a:extLst>
-          </p:cNvPr>
-          <p:cNvSpPr>
-            <a:spLocks xmlns:a="http://schemas.openxmlformats.org/drawingml/2006/main" noGrp="1"/>
-          </p:cNvSpPr>
-          <p:nvPr/>
-        </p:nvSpPr>
-        <p:spPr>
-          <a:xfrm xmlns:a="http://schemas.openxmlformats.org/drawingml/2006/main">
-            <a:off x="4895850" y="4524375"/>
-            <a:ext cx="590550" cy="285750"/>
+          <p:cNvPr id="77" name="sasrec-desc-title">
+            <a:extLst xmlns:a="http://schemas.openxmlformats.org/drawingml/2006/main">
+              <a:ext uri="{FF2B5EF4-FFF2-40B4-BE49-F238E27FC236}">
+                <a16:creationId xmlns:a16="http://schemas.microsoft.com/office/drawing/2014/main" id="{51C2299E-8051-4F5D-9CDC-2798665C38BC}"/>
+              </a:ext>
+            </a:extLst>
+          </p:cNvPr>
+          <p:cNvSpPr>
+            <a:spLocks xmlns:a="http://schemas.openxmlformats.org/drawingml/2006/main" noGrp="1"/>
+          </p:cNvSpPr>
+          <p:nvPr/>
+        </p:nvSpPr>
+        <p:spPr>
+          <a:xfrm xmlns:a="http://schemas.openxmlformats.org/drawingml/2006/main">
+            <a:off x="7829550" y="4857750"/>
+            <a:ext cx="1676400" cy="342900"/>
           </a:xfrm>
           <a:prstGeom xmlns:a="http://schemas.openxmlformats.org/drawingml/2006/main" prst="rect">
             <a:avLst/>
@@ -3835,9 +4560,10 @@
           <a:lstStyle xmlns:a="http://schemas.openxmlformats.org/drawingml/2006/main"/>
           <a:p xmlns:a="http://schemas.openxmlformats.org/drawingml/2006/main">
             <a:pPr algn="ctr">
-              <a:defRPr sz="1200" b="1">
-                <a:solidFill>
-                  <a:srgbClr val="2F78E8"/>
+              <a:buNone/>
+              <a:defRPr sz="1425" b="1">
+                <a:solidFill>
+                  <a:srgbClr val="FFFFFF"/>
                 </a:solidFill>
                 <a:latin typeface="Arial"/>
                 <a:ea typeface="Arial"/>
@@ -3845,130 +4571,37 @@
               </a:defRPr>
             </a:pPr>
             <a:r>
-              <a:rPr sz="1200" b="1">
-                <a:solidFill>
-                  <a:srgbClr val="2F78E8"/>
+              <a:rPr sz="1425" b="1">
+                <a:solidFill>
+                  <a:srgbClr val="FFFFFF"/>
                 </a:solidFill>
                 <a:latin typeface="Arial"/>
                 <a:ea typeface="Arial"/>
                 <a:cs typeface="Arial"/>
               </a:rPr>
-              <a:t>Qwen</a:t>
+              <a:t>SASRec_DESC</a:t>
             </a:r>
           </a:p>
         </p:txBody>
       </p:sp>
       <p:sp>
         <p:nvSpPr>
-          <p:cNvPr id="64" name="desc-summarize-subtitle">
-            <a:extLst xmlns:a="http://schemas.openxmlformats.org/drawingml/2006/main">
-              <a:ext uri="{FF2B5EF4-FFF2-40B4-BE49-F238E27FC236}">
-                <a16:creationId xmlns:a16="http://schemas.microsoft.com/office/drawing/2014/main" id="{F2C52146-5C7F-4BE9-82DD-F839E0220CFD}"/>
-              </a:ext>
-            </a:extLst>
-          </p:cNvPr>
-          <p:cNvSpPr>
-            <a:spLocks xmlns:a="http://schemas.openxmlformats.org/drawingml/2006/main" noGrp="1"/>
-          </p:cNvSpPr>
-          <p:nvPr/>
-        </p:nvSpPr>
-        <p:spPr>
-          <a:xfrm xmlns:a="http://schemas.openxmlformats.org/drawingml/2006/main">
-            <a:off x="4876800" y="4819650"/>
-            <a:ext cx="628650" cy="257175"/>
-          </a:xfrm>
-          <a:prstGeom xmlns:a="http://schemas.openxmlformats.org/drawingml/2006/main" prst="rect">
-            <a:avLst/>
-          </a:prstGeom>
-          <a:noFill xmlns:a="http://schemas.openxmlformats.org/drawingml/2006/main"/>
-          <a:ln xmlns:a="http://schemas.openxmlformats.org/drawingml/2006/main" w="0">
-            <a:noFill/>
-            <a:prstDash val="solid"/>
-          </a:ln>
-        </p:spPr>
-        <p:txBody>
-          <a:bodyPr xmlns:a="http://schemas.openxmlformats.org/drawingml/2006/main" lIns="0" tIns="0" rIns="0" bIns="0" anchor="ctr">
-            <a:normAutofit fontScale="80357"/>
-          </a:bodyPr>
-          <a:lstStyle xmlns:a="http://schemas.openxmlformats.org/drawingml/2006/main"/>
-          <a:p xmlns:a="http://schemas.openxmlformats.org/drawingml/2006/main">
-            <a:pPr algn="ctr">
-              <a:defRPr sz="1050">
-                <a:solidFill>
-                  <a:srgbClr val="667085"/>
-                </a:solidFill>
-                <a:latin typeface="Arial"/>
-                <a:ea typeface="Arial"/>
-                <a:cs typeface="Arial"/>
-              </a:defRPr>
-            </a:pPr>
-            <a:r>
-              <a:rPr sz="1050">
-                <a:solidFill>
-                  <a:srgbClr val="667085"/>
-                </a:solidFill>
-                <a:latin typeface="Arial"/>
-                <a:ea typeface="Arial"/>
-                <a:cs typeface="Arial"/>
-              </a:rPr>
-              <a:t>video summary</a:t>
-            </a:r>
-          </a:p>
-        </p:txBody>
-      </p:sp>
-      <p:sp>
-        <p:nvSpPr>
-          <p:cNvPr id="65" name="vs-desc-box">
-            <a:extLst xmlns:a="http://schemas.openxmlformats.org/drawingml/2006/main">
-              <a:ext uri="{FF2B5EF4-FFF2-40B4-BE49-F238E27FC236}">
-                <a16:creationId xmlns:a16="http://schemas.microsoft.com/office/drawing/2014/main" id="{6DC3F05C-CBA1-4F14-93E5-4FCD9DE73105}"/>
-              </a:ext>
-            </a:extLst>
-          </p:cNvPr>
-          <p:cNvSpPr>
-            <a:spLocks xmlns:a="http://schemas.openxmlformats.org/drawingml/2006/main" noGrp="1"/>
-          </p:cNvSpPr>
-          <p:nvPr/>
-        </p:nvSpPr>
-        <p:spPr>
-          <a:xfrm xmlns:a="http://schemas.openxmlformats.org/drawingml/2006/main">
-            <a:off x="5724525" y="4448175"/>
-            <a:ext cx="1285875" cy="685800"/>
-          </a:xfrm>
-          <a:prstGeom xmlns:a="http://schemas.openxmlformats.org/drawingml/2006/main" prst="roundRect">
-            <a:avLst>
-              <a:gd name="adj" fmla="val 11111"/>
-            </a:avLst>
-          </a:prstGeom>
-          <a:solidFill xmlns:a="http://schemas.openxmlformats.org/drawingml/2006/main">
-            <a:srgbClr val="2F78E8"/>
-          </a:solidFill>
-          <a:ln xmlns:a="http://schemas.openxmlformats.org/drawingml/2006/main" w="11430">
-            <a:solidFill>
-              <a:srgbClr val="2F78E8"/>
-            </a:solidFill>
-            <a:prstDash val="solid"/>
-          </a:ln>
-        </p:spPr>
-      </p:sp>
-      <p:sp>
-        <p:nvSpPr>
-          <p:cNvPr id="66" name="vs-desc-title">
-            <a:extLst xmlns:a="http://schemas.openxmlformats.org/drawingml/2006/main">
-              <a:ext uri="{FF2B5EF4-FFF2-40B4-BE49-F238E27FC236}">
-                <a16:creationId xmlns:a16="http://schemas.microsoft.com/office/drawing/2014/main" id="{917C9E44-D42C-4630-AC6D-007956582620}"/>
-              </a:ext>
-            </a:extLst>
-          </p:cNvPr>
-          <p:cNvSpPr>
-            <a:spLocks xmlns:a="http://schemas.openxmlformats.org/drawingml/2006/main" noGrp="1"/>
-          </p:cNvSpPr>
-          <p:nvPr/>
-        </p:nvSpPr>
-        <p:spPr>
-          <a:xfrm xmlns:a="http://schemas.openxmlformats.org/drawingml/2006/main">
-            <a:off x="5819775" y="4448175"/>
-            <a:ext cx="1095375" cy="685800"/>
+          <p:cNvPr id="78" name="evaluation-scope">
+            <a:extLst xmlns:a="http://schemas.openxmlformats.org/drawingml/2006/main">
+              <a:ext uri="{FF2B5EF4-FFF2-40B4-BE49-F238E27FC236}">
+                <a16:creationId xmlns:a16="http://schemas.microsoft.com/office/drawing/2014/main" id="{756ECDF0-CA34-4262-B58C-F14470308FA4}"/>
+              </a:ext>
+            </a:extLst>
+          </p:cNvPr>
+          <p:cNvSpPr>
+            <a:spLocks xmlns:a="http://schemas.openxmlformats.org/drawingml/2006/main" noGrp="1"/>
+          </p:cNvSpPr>
+          <p:nvPr/>
+        </p:nvSpPr>
+        <p:spPr>
+          <a:xfrm xmlns:a="http://schemas.openxmlformats.org/drawingml/2006/main">
+            <a:off x="10210800" y="1695450"/>
+            <a:ext cx="1352550" cy="209550"/>
           </a:xfrm>
           <a:prstGeom xmlns:a="http://schemas.openxmlformats.org/drawingml/2006/main" prst="rect">
             <a:avLst/>
@@ -3985,10 +4618,11 @@
           </a:bodyPr>
           <a:lstStyle xmlns:a="http://schemas.openxmlformats.org/drawingml/2006/main"/>
           <a:p xmlns:a="http://schemas.openxmlformats.org/drawingml/2006/main">
-            <a:pPr algn="ctr">
-              <a:defRPr sz="1350" b="1">
-                <a:solidFill>
-                  <a:srgbClr val="FFFFFF"/>
+            <a:pPr algn="l">
+              <a:buNone/>
+              <a:defRPr sz="900" b="1">
+                <a:solidFill>
+                  <a:srgbClr val="A85D00"/>
                 </a:solidFill>
                 <a:latin typeface="Arial"/>
                 <a:ea typeface="Arial"/>
@@ -3996,37 +4630,70 @@
               </a:defRPr>
             </a:pPr>
             <a:r>
-              <a:rPr sz="1350" b="1">
-                <a:solidFill>
-                  <a:srgbClr val="FFFFFF"/>
+              <a:rPr sz="900" b="1">
+                <a:solidFill>
+                  <a:srgbClr val="A85D00"/>
                 </a:solidFill>
                 <a:latin typeface="Arial"/>
                 <a:ea typeface="Arial"/>
                 <a:cs typeface="Arial"/>
               </a:rPr>
-              <a:t>VS_desc</a:t>
+              <a:t>SAME TEST TARGETS</a:t>
             </a:r>
           </a:p>
         </p:txBody>
       </p:sp>
       <p:sp>
         <p:nvSpPr>
-          <p:cNvPr id="67" name="id-baseline-label">
-            <a:extLst xmlns:a="http://schemas.openxmlformats.org/drawingml/2006/main">
-              <a:ext uri="{FF2B5EF4-FFF2-40B4-BE49-F238E27FC236}">
-                <a16:creationId xmlns:a16="http://schemas.microsoft.com/office/drawing/2014/main" id="{E822ED0D-E034-47DA-97D2-848C3CEB671C}"/>
-              </a:ext>
-            </a:extLst>
-          </p:cNvPr>
-          <p:cNvSpPr>
-            <a:spLocks xmlns:a="http://schemas.openxmlformats.org/drawingml/2006/main" noGrp="1"/>
-          </p:cNvSpPr>
-          <p:nvPr/>
-        </p:nvSpPr>
-        <p:spPr>
-          <a:xfrm xmlns:a="http://schemas.openxmlformats.org/drawingml/2006/main">
-            <a:off x="3048000" y="3524250"/>
-            <a:ext cx="3810000" cy="247650"/>
+          <p:cNvPr id="79" name="evaluation-step-1-marker">
+            <a:extLst xmlns:a="http://schemas.openxmlformats.org/drawingml/2006/main">
+              <a:ext uri="{FF2B5EF4-FFF2-40B4-BE49-F238E27FC236}">
+                <a16:creationId xmlns:a16="http://schemas.microsoft.com/office/drawing/2014/main" id="{9C54C4CF-FDCE-4DA6-9F05-276C38B258B4}"/>
+              </a:ext>
+            </a:extLst>
+          </p:cNvPr>
+          <p:cNvSpPr>
+            <a:spLocks xmlns:a="http://schemas.openxmlformats.org/drawingml/2006/main" noGrp="1"/>
+          </p:cNvSpPr>
+          <p:nvPr/>
+        </p:nvSpPr>
+        <p:spPr>
+          <a:xfrm xmlns:a="http://schemas.openxmlformats.org/drawingml/2006/main">
+            <a:off x="10210800" y="2009775"/>
+            <a:ext cx="228600" cy="228600"/>
+          </a:xfrm>
+          <a:prstGeom xmlns:a="http://schemas.openxmlformats.org/drawingml/2006/main" prst="ellipse">
+            <a:avLst/>
+          </a:prstGeom>
+          <a:solidFill xmlns:a="http://schemas.openxmlformats.org/drawingml/2006/main">
+            <a:srgbClr val="A85D00"/>
+          </a:solidFill>
+          <a:ln xmlns:a="http://schemas.openxmlformats.org/drawingml/2006/main" w="0">
+            <a:solidFill>
+              <a:srgbClr val="A85D00"/>
+            </a:solidFill>
+            <a:prstDash val="solid"/>
+          </a:ln>
+        </p:spPr>
+      </p:sp>
+      <p:sp>
+        <p:nvSpPr>
+          <p:cNvPr id="80" name="evaluation-step-1-number">
+            <a:extLst xmlns:a="http://schemas.openxmlformats.org/drawingml/2006/main">
+              <a:ext uri="{FF2B5EF4-FFF2-40B4-BE49-F238E27FC236}">
+                <a16:creationId xmlns:a16="http://schemas.microsoft.com/office/drawing/2014/main" id="{96766910-FE80-4703-9232-5FC7F8D78455}"/>
+              </a:ext>
+            </a:extLst>
+          </p:cNvPr>
+          <p:cNvSpPr>
+            <a:spLocks xmlns:a="http://schemas.openxmlformats.org/drawingml/2006/main" noGrp="1"/>
+          </p:cNvSpPr>
+          <p:nvPr/>
+        </p:nvSpPr>
+        <p:spPr>
+          <a:xfrm xmlns:a="http://schemas.openxmlformats.org/drawingml/2006/main">
+            <a:off x="10210800" y="2009775"/>
+            <a:ext cx="228600" cy="228600"/>
           </a:xfrm>
           <a:prstGeom xmlns:a="http://schemas.openxmlformats.org/drawingml/2006/main" prst="rect">
             <a:avLst/>
@@ -4044,9 +4711,10 @@
           <a:lstStyle xmlns:a="http://schemas.openxmlformats.org/drawingml/2006/main"/>
           <a:p xmlns:a="http://schemas.openxmlformats.org/drawingml/2006/main">
             <a:pPr algn="ctr">
+              <a:buNone/>
               <a:defRPr sz="1050" b="1">
                 <a:solidFill>
-                  <a:srgbClr val="667085"/>
+                  <a:srgbClr val="FFFFFF"/>
                 </a:solidFill>
                 <a:latin typeface="Arial"/>
                 <a:ea typeface="Arial"/>
@@ -4056,70 +4724,208 @@
             <a:r>
               <a:rPr sz="1050" b="1">
                 <a:solidFill>
+                  <a:srgbClr val="FFFFFF"/>
+                </a:solidFill>
+                <a:latin typeface="Arial"/>
+                <a:ea typeface="Arial"/>
+                <a:cs typeface="Arial"/>
+              </a:rPr>
+              <a:t>1</a:t>
+            </a:r>
+          </a:p>
+        </p:txBody>
+      </p:sp>
+      <p:sp>
+        <p:nvSpPr>
+          <p:cNvPr id="81" name="evaluation-step-1-title">
+            <a:extLst xmlns:a="http://schemas.openxmlformats.org/drawingml/2006/main">
+              <a:ext uri="{FF2B5EF4-FFF2-40B4-BE49-F238E27FC236}">
+                <a16:creationId xmlns:a16="http://schemas.microsoft.com/office/drawing/2014/main" id="{2BE85DFE-9823-4982-90E6-3D2018C06C64}"/>
+              </a:ext>
+            </a:extLst>
+          </p:cNvPr>
+          <p:cNvSpPr>
+            <a:spLocks xmlns:a="http://schemas.openxmlformats.org/drawingml/2006/main" noGrp="1"/>
+          </p:cNvSpPr>
+          <p:nvPr/>
+        </p:nvSpPr>
+        <p:spPr>
+          <a:xfrm xmlns:a="http://schemas.openxmlformats.org/drawingml/2006/main">
+            <a:off x="10515600" y="1952625"/>
+            <a:ext cx="1047750" cy="361950"/>
+          </a:xfrm>
+          <a:prstGeom xmlns:a="http://schemas.openxmlformats.org/drawingml/2006/main" prst="rect">
+            <a:avLst/>
+          </a:prstGeom>
+          <a:noFill xmlns:a="http://schemas.openxmlformats.org/drawingml/2006/main"/>
+          <a:ln xmlns:a="http://schemas.openxmlformats.org/drawingml/2006/main" w="0">
+            <a:noFill/>
+            <a:prstDash val="solid"/>
+          </a:ln>
+        </p:spPr>
+        <p:txBody>
+          <a:bodyPr xmlns:a="http://schemas.openxmlformats.org/drawingml/2006/main" lIns="0" tIns="0" rIns="0" bIns="0" anchor="ctr">
+            <a:normAutofit fontScale="83333"/>
+          </a:bodyPr>
+          <a:lstStyle xmlns:a="http://schemas.openxmlformats.org/drawingml/2006/main"/>
+          <a:p xmlns:a="http://schemas.openxmlformats.org/drawingml/2006/main">
+            <a:pPr algn="l">
+              <a:buNone/>
+              <a:defRPr sz="1425" b="1">
+                <a:solidFill>
+                  <a:srgbClr val="A85D00"/>
+                </a:solidFill>
+                <a:latin typeface="Arial"/>
+                <a:ea typeface="Arial"/>
+                <a:cs typeface="Arial"/>
+              </a:defRPr>
+            </a:pPr>
+            <a:r>
+              <a:rPr sz="1425" b="1">
+                <a:solidFill>
+                  <a:srgbClr val="A85D00"/>
+                </a:solidFill>
+                <a:latin typeface="Arial"/>
+                <a:ea typeface="Arial"/>
+                <a:cs typeface="Arial"/>
+              </a:rPr>
+              <a:t>Full-catalog ranking</a:t>
+            </a:r>
+          </a:p>
+        </p:txBody>
+      </p:sp>
+      <p:sp>
+        <p:nvSpPr>
+          <p:cNvPr id="82" name="evaluation-step-1-note">
+            <a:extLst xmlns:a="http://schemas.openxmlformats.org/drawingml/2006/main">
+              <a:ext uri="{FF2B5EF4-FFF2-40B4-BE49-F238E27FC236}">
+                <a16:creationId xmlns:a16="http://schemas.microsoft.com/office/drawing/2014/main" id="{6E7C3889-2A44-46D4-BD13-92737B7C2BF0}"/>
+              </a:ext>
+            </a:extLst>
+          </p:cNvPr>
+          <p:cNvSpPr>
+            <a:spLocks xmlns:a="http://schemas.openxmlformats.org/drawingml/2006/main" noGrp="1"/>
+          </p:cNvSpPr>
+          <p:nvPr/>
+        </p:nvSpPr>
+        <p:spPr>
+          <a:xfrm xmlns:a="http://schemas.openxmlformats.org/drawingml/2006/main">
+            <a:off x="10210800" y="2343150"/>
+            <a:ext cx="1352550" cy="228600"/>
+          </a:xfrm>
+          <a:prstGeom xmlns:a="http://schemas.openxmlformats.org/drawingml/2006/main" prst="rect">
+            <a:avLst/>
+          </a:prstGeom>
+          <a:noFill xmlns:a="http://schemas.openxmlformats.org/drawingml/2006/main"/>
+          <a:ln xmlns:a="http://schemas.openxmlformats.org/drawingml/2006/main" w="0">
+            <a:noFill/>
+            <a:prstDash val="solid"/>
+          </a:ln>
+        </p:spPr>
+        <p:txBody>
+          <a:bodyPr xmlns:a="http://schemas.openxmlformats.org/drawingml/2006/main" lIns="0" tIns="0" rIns="0" bIns="0" anchor="ctr">
+            <a:normAutofit fontScale="94589"/>
+          </a:bodyPr>
+          <a:lstStyle xmlns:a="http://schemas.openxmlformats.org/drawingml/2006/main"/>
+          <a:p xmlns:a="http://schemas.openxmlformats.org/drawingml/2006/main">
+            <a:pPr algn="l">
+              <a:buNone/>
+              <a:defRPr sz="1050">
+                <a:solidFill>
                   <a:srgbClr val="667085"/>
                 </a:solidFill>
                 <a:latin typeface="Arial"/>
                 <a:ea typeface="Arial"/>
                 <a:cs typeface="Arial"/>
+              </a:defRPr>
+            </a:pPr>
+            <a:r>
+              <a:rPr sz="1050">
+                <a:solidFill>
+                  <a:srgbClr val="667085"/>
+                </a:solidFill>
+                <a:latin typeface="Arial"/>
+                <a:ea typeface="Arial"/>
+                <a:cs typeface="Arial"/>
               </a:rPr>
-              <a:t>ID BASELINE  ·  same interaction sequence</a:t>
+              <a:t>모든 후보 item을 점수화</a:t>
             </a:r>
           </a:p>
         </p:txBody>
       </p:sp>
-      <p:sp>
-        <p:nvSpPr>
-          <p:cNvPr id="68" name="graph-embed-box">
-            <a:extLst xmlns:a="http://schemas.openxmlformats.org/drawingml/2006/main">
-              <a:ext uri="{FF2B5EF4-FFF2-40B4-BE49-F238E27FC236}">
-                <a16:creationId xmlns:a16="http://schemas.microsoft.com/office/drawing/2014/main" id="{52D1BB73-E7AD-4FA1-8BE6-0DDE43192F1E}"/>
-              </a:ext>
-            </a:extLst>
-          </p:cNvPr>
-          <p:cNvSpPr>
-            <a:spLocks xmlns:a="http://schemas.openxmlformats.org/drawingml/2006/main" noGrp="1"/>
-          </p:cNvSpPr>
-          <p:nvPr/>
-        </p:nvSpPr>
-        <p:spPr>
-          <a:xfrm xmlns:a="http://schemas.openxmlformats.org/drawingml/2006/main">
-            <a:off x="7734300" y="2105025"/>
-            <a:ext cx="1866900" cy="419100"/>
-          </a:xfrm>
-          <a:prstGeom xmlns:a="http://schemas.openxmlformats.org/drawingml/2006/main" prst="roundRect">
-            <a:avLst>
-              <a:gd name="adj" fmla="val 18182"/>
-            </a:avLst>
-          </a:prstGeom>
-          <a:solidFill xmlns:a="http://schemas.openxmlformats.org/drawingml/2006/main">
-            <a:srgbClr val="E7F5F0"/>
-          </a:solidFill>
+      <p:cxnSp>
+        <p:nvCxnSpPr>
+          <p:cNvPr id="392" name="evaluation-rule-1"/>
+          <p:cNvCxnSpPr/>
+          <p:nvPr/>
+        </p:nvCxnSpPr>
+        <p:spPr>
+          <a:xfrm xmlns:a="http://schemas.openxmlformats.org/drawingml/2006/main">
+            <a:off x="10210800" y="2667000"/>
+            <a:ext cx="1352550" cy="0"/>
+          </a:xfrm>
+          <a:prstGeom xmlns:a="http://schemas.openxmlformats.org/drawingml/2006/main" prst="straightConnector1">
+            <a:avLst/>
+          </a:prstGeom>
           <a:ln xmlns:a="http://schemas.openxmlformats.org/drawingml/2006/main" w="11430">
             <a:solidFill>
-              <a:srgbClr val="A8D8C8"/>
+              <a:srgbClr val="D5A55E"/>
             </a:solidFill>
             <a:prstDash val="solid"/>
           </a:ln>
         </p:spPr>
-      </p:sp>
-      <p:sp>
-        <p:nvSpPr>
-          <p:cNvPr id="69" name="graph-embed-title">
-            <a:extLst xmlns:a="http://schemas.openxmlformats.org/drawingml/2006/main">
-              <a:ext uri="{FF2B5EF4-FFF2-40B4-BE49-F238E27FC236}">
-                <a16:creationId xmlns:a16="http://schemas.microsoft.com/office/drawing/2014/main" id="{2964591D-3A8B-4C75-8BAD-C8C00BC0C9C8}"/>
-              </a:ext>
-            </a:extLst>
-          </p:cNvPr>
-          <p:cNvSpPr>
-            <a:spLocks xmlns:a="http://schemas.openxmlformats.org/drawingml/2006/main" noGrp="1"/>
-          </p:cNvSpPr>
-          <p:nvPr/>
-        </p:nvSpPr>
-        <p:spPr>
-          <a:xfrm xmlns:a="http://schemas.openxmlformats.org/drawingml/2006/main">
-            <a:off x="7829550" y="2105025"/>
-            <a:ext cx="1676400" cy="419100"/>
+      </p:cxnSp>
+      <p:sp>
+        <p:nvSpPr>
+          <p:cNvPr id="84" name="evaluation-step-2-marker">
+            <a:extLst xmlns:a="http://schemas.openxmlformats.org/drawingml/2006/main">
+              <a:ext uri="{FF2B5EF4-FFF2-40B4-BE49-F238E27FC236}">
+                <a16:creationId xmlns:a16="http://schemas.microsoft.com/office/drawing/2014/main" id="{0DCA05AE-E18B-4D39-B01B-E5B87FDAE389}"/>
+              </a:ext>
+            </a:extLst>
+          </p:cNvPr>
+          <p:cNvSpPr>
+            <a:spLocks xmlns:a="http://schemas.openxmlformats.org/drawingml/2006/main" noGrp="1"/>
+          </p:cNvSpPr>
+          <p:nvPr/>
+        </p:nvSpPr>
+        <p:spPr>
+          <a:xfrm xmlns:a="http://schemas.openxmlformats.org/drawingml/2006/main">
+            <a:off x="10210800" y="2800350"/>
+            <a:ext cx="228600" cy="228600"/>
+          </a:xfrm>
+          <a:prstGeom xmlns:a="http://schemas.openxmlformats.org/drawingml/2006/main" prst="ellipse">
+            <a:avLst/>
+          </a:prstGeom>
+          <a:solidFill xmlns:a="http://schemas.openxmlformats.org/drawingml/2006/main">
+            <a:srgbClr val="A85D00"/>
+          </a:solidFill>
+          <a:ln xmlns:a="http://schemas.openxmlformats.org/drawingml/2006/main" w="0">
+            <a:solidFill>
+              <a:srgbClr val="A85D00"/>
+            </a:solidFill>
+            <a:prstDash val="solid"/>
+          </a:ln>
+        </p:spPr>
+      </p:sp>
+      <p:sp>
+        <p:nvSpPr>
+          <p:cNvPr id="85" name="evaluation-step-2-number">
+            <a:extLst xmlns:a="http://schemas.openxmlformats.org/drawingml/2006/main">
+              <a:ext uri="{FF2B5EF4-FFF2-40B4-BE49-F238E27FC236}">
+                <a16:creationId xmlns:a16="http://schemas.microsoft.com/office/drawing/2014/main" id="{7C073C4A-40E6-4517-9FC5-8C4F40C35198}"/>
+              </a:ext>
+            </a:extLst>
+          </p:cNvPr>
+          <p:cNvSpPr>
+            <a:spLocks xmlns:a="http://schemas.openxmlformats.org/drawingml/2006/main" noGrp="1"/>
+          </p:cNvSpPr>
+          <p:nvPr/>
+        </p:nvSpPr>
+        <p:spPr>
+          <a:xfrm xmlns:a="http://schemas.openxmlformats.org/drawingml/2006/main">
+            <a:off x="10210800" y="2800350"/>
+            <a:ext cx="228600" cy="228600"/>
           </a:xfrm>
           <a:prstGeom xmlns:a="http://schemas.openxmlformats.org/drawingml/2006/main" prst="rect">
             <a:avLst/>
@@ -4137,9 +4943,10 @@
           <a:lstStyle xmlns:a="http://schemas.openxmlformats.org/drawingml/2006/main"/>
           <a:p xmlns:a="http://schemas.openxmlformats.org/drawingml/2006/main">
             <a:pPr algn="ctr">
-              <a:defRPr sz="1200" b="1">
-                <a:solidFill>
-                  <a:srgbClr val="168765"/>
+              <a:buNone/>
+              <a:defRPr sz="1050" b="1">
+                <a:solidFill>
+                  <a:srgbClr val="FFFFFF"/>
                 </a:solidFill>
                 <a:latin typeface="Arial"/>
                 <a:ea typeface="Arial"/>
@@ -4147,72 +4954,37 @@
               </a:defRPr>
             </a:pPr>
             <a:r>
-              <a:rPr sz="1200" b="1">
-                <a:solidFill>
-                  <a:srgbClr val="168765"/>
+              <a:rPr sz="1050" b="1">
+                <a:solidFill>
+                  <a:srgbClr val="FFFFFF"/>
                 </a:solidFill>
                 <a:latin typeface="Arial"/>
                 <a:ea typeface="Arial"/>
                 <a:cs typeface="Arial"/>
               </a:rPr>
-              <a:t>BGE 1024D  ·  frozen embedding</a:t>
+              <a:t>2</a:t>
             </a:r>
           </a:p>
         </p:txBody>
       </p:sp>
       <p:sp>
         <p:nvSpPr>
-          <p:cNvPr id="70" name="sasrec-graph-box">
-            <a:extLst xmlns:a="http://schemas.openxmlformats.org/drawingml/2006/main">
-              <a:ext uri="{FF2B5EF4-FFF2-40B4-BE49-F238E27FC236}">
-                <a16:creationId xmlns:a16="http://schemas.microsoft.com/office/drawing/2014/main" id="{B1400DF1-76E6-4B84-ACAB-86C617D0BF32}"/>
-              </a:ext>
-            </a:extLst>
-          </p:cNvPr>
-          <p:cNvSpPr>
-            <a:spLocks xmlns:a="http://schemas.openxmlformats.org/drawingml/2006/main" noGrp="1"/>
-          </p:cNvSpPr>
-          <p:nvPr/>
-        </p:nvSpPr>
-        <p:spPr>
-          <a:xfrm xmlns:a="http://schemas.openxmlformats.org/drawingml/2006/main">
-            <a:off x="7734300" y="2676525"/>
-            <a:ext cx="1866900" cy="533400"/>
-          </a:xfrm>
-          <a:prstGeom xmlns:a="http://schemas.openxmlformats.org/drawingml/2006/main" prst="roundRect">
-            <a:avLst>
-              <a:gd name="adj" fmla="val 14286"/>
-            </a:avLst>
-          </a:prstGeom>
-          <a:solidFill xmlns:a="http://schemas.openxmlformats.org/drawingml/2006/main">
-            <a:srgbClr val="168765"/>
-          </a:solidFill>
-          <a:ln xmlns:a="http://schemas.openxmlformats.org/drawingml/2006/main" w="11430">
-            <a:solidFill>
-              <a:srgbClr val="168765"/>
-            </a:solidFill>
-            <a:prstDash val="solid"/>
-          </a:ln>
-        </p:spPr>
-      </p:sp>
-      <p:sp>
-        <p:nvSpPr>
-          <p:cNvPr id="71" name="sasrec-graph-title">
-            <a:extLst xmlns:a="http://schemas.openxmlformats.org/drawingml/2006/main">
-              <a:ext uri="{FF2B5EF4-FFF2-40B4-BE49-F238E27FC236}">
-                <a16:creationId xmlns:a16="http://schemas.microsoft.com/office/drawing/2014/main" id="{AC678BF6-8568-4E5E-9F8B-C3AA3A8E7D5C}"/>
-              </a:ext>
-            </a:extLst>
-          </p:cNvPr>
-          <p:cNvSpPr>
-            <a:spLocks xmlns:a="http://schemas.openxmlformats.org/drawingml/2006/main" noGrp="1"/>
-          </p:cNvSpPr>
-          <p:nvPr/>
-        </p:nvSpPr>
-        <p:spPr>
-          <a:xfrm xmlns:a="http://schemas.openxmlformats.org/drawingml/2006/main">
-            <a:off x="7829550" y="2676525"/>
-            <a:ext cx="1676400" cy="533400"/>
+          <p:cNvPr id="86" name="evaluation-step-2-title">
+            <a:extLst xmlns:a="http://schemas.openxmlformats.org/drawingml/2006/main">
+              <a:ext uri="{FF2B5EF4-FFF2-40B4-BE49-F238E27FC236}">
+                <a16:creationId xmlns:a16="http://schemas.microsoft.com/office/drawing/2014/main" id="{AB2E5F0E-A568-4CF5-BDA3-B07A703BC676}"/>
+              </a:ext>
+            </a:extLst>
+          </p:cNvPr>
+          <p:cNvSpPr>
+            <a:spLocks xmlns:a="http://schemas.openxmlformats.org/drawingml/2006/main" noGrp="1"/>
+          </p:cNvSpPr>
+          <p:nvPr/>
+        </p:nvSpPr>
+        <p:spPr>
+          <a:xfrm xmlns:a="http://schemas.openxmlformats.org/drawingml/2006/main">
+            <a:off x="10515600" y="2762250"/>
+            <a:ext cx="1047750" cy="304800"/>
           </a:xfrm>
           <a:prstGeom xmlns:a="http://schemas.openxmlformats.org/drawingml/2006/main" prst="rect">
             <a:avLst/>
@@ -4229,10 +5001,11 @@
           </a:bodyPr>
           <a:lstStyle xmlns:a="http://schemas.openxmlformats.org/drawingml/2006/main"/>
           <a:p xmlns:a="http://schemas.openxmlformats.org/drawingml/2006/main">
-            <a:pPr algn="ctr">
-              <a:defRPr sz="1425" b="1">
-                <a:solidFill>
-                  <a:srgbClr val="FFFFFF"/>
+            <a:pPr algn="l">
+              <a:buNone/>
+              <a:defRPr sz="1350" b="1">
+                <a:solidFill>
+                  <a:srgbClr val="111827"/>
                 </a:solidFill>
                 <a:latin typeface="Arial"/>
                 <a:ea typeface="Arial"/>
@@ -4240,72 +5013,282 @@
               </a:defRPr>
             </a:pPr>
             <a:r>
-              <a:rPr sz="1425" b="1">
-                <a:solidFill>
-                  <a:srgbClr val="FFFFFF"/>
+              <a:rPr sz="1350" b="1">
+                <a:solidFill>
+                  <a:srgbClr val="111827"/>
                 </a:solidFill>
                 <a:latin typeface="Arial"/>
                 <a:ea typeface="Arial"/>
                 <a:cs typeface="Arial"/>
               </a:rPr>
-              <a:t>SASRec_GRAPH</a:t>
+              <a:t>Measure</a:t>
             </a:r>
           </a:p>
         </p:txBody>
       </p:sp>
       <p:sp>
         <p:nvSpPr>
-          <p:cNvPr id="72" name="sasrec-id-box">
-            <a:extLst xmlns:a="http://schemas.openxmlformats.org/drawingml/2006/main">
-              <a:ext uri="{FF2B5EF4-FFF2-40B4-BE49-F238E27FC236}">
-                <a16:creationId xmlns:a16="http://schemas.microsoft.com/office/drawing/2014/main" id="{04AFFAC0-5E24-41AD-89F6-A8F4CD0AE61E}"/>
-              </a:ext>
-            </a:extLst>
-          </p:cNvPr>
-          <p:cNvSpPr>
-            <a:spLocks xmlns:a="http://schemas.openxmlformats.org/drawingml/2006/main" noGrp="1"/>
-          </p:cNvSpPr>
-          <p:nvPr/>
-        </p:nvSpPr>
-        <p:spPr>
-          <a:xfrm xmlns:a="http://schemas.openxmlformats.org/drawingml/2006/main">
-            <a:off x="7734300" y="3438525"/>
-            <a:ext cx="1866900" cy="533400"/>
-          </a:xfrm>
-          <a:prstGeom xmlns:a="http://schemas.openxmlformats.org/drawingml/2006/main" prst="roundRect">
-            <a:avLst>
-              <a:gd name="adj" fmla="val 14286"/>
-            </a:avLst>
-          </a:prstGeom>
-          <a:solidFill xmlns:a="http://schemas.openxmlformats.org/drawingml/2006/main">
-            <a:srgbClr val="EEF0F3"/>
-          </a:solidFill>
+          <p:cNvPr id="87" name="rank-quality">
+            <a:extLst xmlns:a="http://schemas.openxmlformats.org/drawingml/2006/main">
+              <a:ext uri="{FF2B5EF4-FFF2-40B4-BE49-F238E27FC236}">
+                <a16:creationId xmlns:a16="http://schemas.microsoft.com/office/drawing/2014/main" id="{2CE7973E-307D-43B8-BC70-BF2B2FE510D6}"/>
+              </a:ext>
+            </a:extLst>
+          </p:cNvPr>
+          <p:cNvSpPr>
+            <a:spLocks xmlns:a="http://schemas.openxmlformats.org/drawingml/2006/main" noGrp="1"/>
+          </p:cNvSpPr>
+          <p:nvPr/>
+        </p:nvSpPr>
+        <p:spPr>
+          <a:xfrm xmlns:a="http://schemas.openxmlformats.org/drawingml/2006/main">
+            <a:off x="10210800" y="3124200"/>
+            <a:ext cx="1352550" cy="457200"/>
+          </a:xfrm>
+          <a:prstGeom xmlns:a="http://schemas.openxmlformats.org/drawingml/2006/main" prst="rect">
+            <a:avLst/>
+          </a:prstGeom>
+          <a:noFill xmlns:a="http://schemas.openxmlformats.org/drawingml/2006/main"/>
+          <a:ln xmlns:a="http://schemas.openxmlformats.org/drawingml/2006/main" w="0">
+            <a:noFill/>
+            <a:prstDash val="solid"/>
+          </a:ln>
+        </p:spPr>
+        <p:txBody>
+          <a:bodyPr xmlns:a="http://schemas.openxmlformats.org/drawingml/2006/main" lIns="0" tIns="0" rIns="0" bIns="0" anchor="ctr">
+            <a:normAutofit fontScale="94434"/>
+          </a:bodyPr>
+          <a:lstStyle xmlns:a="http://schemas.openxmlformats.org/drawingml/2006/main"/>
+          <a:p xmlns:a="http://schemas.openxmlformats.org/drawingml/2006/main">
+            <a:pPr algn="l">
+              <a:buNone/>
+              <a:defRPr sz="1200" b="1">
+                <a:solidFill>
+                  <a:srgbClr val="111827"/>
+                </a:solidFill>
+                <a:latin typeface="Arial"/>
+                <a:ea typeface="Arial"/>
+                <a:cs typeface="Arial"/>
+              </a:defRPr>
+            </a:pPr>
+            <a:r>
+              <a:rPr sz="1200" b="1">
+                <a:solidFill>
+                  <a:srgbClr val="111827"/>
+                </a:solidFill>
+                <a:latin typeface="Arial"/>
+                <a:ea typeface="Arial"/>
+                <a:cs typeface="Arial"/>
+              </a:rPr>
+              <a:t>Rank quality</a:t>
+            </a:r>
+          </a:p>
+          <a:p xmlns:a="http://schemas.openxmlformats.org/drawingml/2006/main">
+            <a:pPr algn="l">
+              <a:buNone/>
+              <a:defRPr sz="1200" b="1">
+                <a:solidFill>
+                  <a:srgbClr val="111827"/>
+                </a:solidFill>
+                <a:latin typeface="Arial"/>
+                <a:ea typeface="Arial"/>
+                <a:cs typeface="Arial"/>
+              </a:defRPr>
+            </a:pPr>
+            <a:r>
+              <a:rPr sz="1200" b="1">
+                <a:solidFill>
+                  <a:srgbClr val="111827"/>
+                </a:solidFill>
+                <a:latin typeface="Arial"/>
+                <a:ea typeface="Arial"/>
+                <a:cs typeface="Arial"/>
+              </a:rPr>
+              <a:t>HR@10 · NDCG@10</a:t>
+            </a:r>
+          </a:p>
+        </p:txBody>
+      </p:sp>
+      <p:sp>
+        <p:nvSpPr>
+          <p:cNvPr id="88" name="catalog-spread">
+            <a:extLst xmlns:a="http://schemas.openxmlformats.org/drawingml/2006/main">
+              <a:ext uri="{FF2B5EF4-FFF2-40B4-BE49-F238E27FC236}">
+                <a16:creationId xmlns:a16="http://schemas.microsoft.com/office/drawing/2014/main" id="{7C96D9E2-210B-4DD3-987D-95EB8989AEF9}"/>
+              </a:ext>
+            </a:extLst>
+          </p:cNvPr>
+          <p:cNvSpPr>
+            <a:spLocks xmlns:a="http://schemas.openxmlformats.org/drawingml/2006/main" noGrp="1"/>
+          </p:cNvSpPr>
+          <p:nvPr/>
+        </p:nvSpPr>
+        <p:spPr>
+          <a:xfrm xmlns:a="http://schemas.openxmlformats.org/drawingml/2006/main">
+            <a:off x="10210800" y="3657600"/>
+            <a:ext cx="1352550" cy="609600"/>
+          </a:xfrm>
+          <a:prstGeom xmlns:a="http://schemas.openxmlformats.org/drawingml/2006/main" prst="rect">
+            <a:avLst/>
+          </a:prstGeom>
+          <a:noFill xmlns:a="http://schemas.openxmlformats.org/drawingml/2006/main"/>
+          <a:ln xmlns:a="http://schemas.openxmlformats.org/drawingml/2006/main" w="0">
+            <a:noFill/>
+            <a:prstDash val="solid"/>
+          </a:ln>
+        </p:spPr>
+        <p:txBody>
+          <a:bodyPr xmlns:a="http://schemas.openxmlformats.org/drawingml/2006/main" lIns="0" tIns="0" rIns="0" bIns="0" anchor="ctr">
+            <a:normAutofit fontScale="99123"/>
+          </a:bodyPr>
+          <a:lstStyle xmlns:a="http://schemas.openxmlformats.org/drawingml/2006/main"/>
+          <a:p xmlns:a="http://schemas.openxmlformats.org/drawingml/2006/main">
+            <a:pPr algn="l">
+              <a:buNone/>
+              <a:defRPr sz="1125" b="1">
+                <a:solidFill>
+                  <a:srgbClr val="111827"/>
+                </a:solidFill>
+                <a:latin typeface="Arial"/>
+                <a:ea typeface="Arial"/>
+                <a:cs typeface="Arial"/>
+              </a:defRPr>
+            </a:pPr>
+            <a:r>
+              <a:rPr sz="1125" b="1">
+                <a:solidFill>
+                  <a:srgbClr val="111827"/>
+                </a:solidFill>
+                <a:latin typeface="Arial"/>
+                <a:ea typeface="Arial"/>
+                <a:cs typeface="Arial"/>
+              </a:rPr>
+              <a:t>Catalog spread</a:t>
+            </a:r>
+          </a:p>
+          <a:p xmlns:a="http://schemas.openxmlformats.org/drawingml/2006/main">
+            <a:pPr algn="l">
+              <a:buNone/>
+              <a:defRPr sz="1125" b="1">
+                <a:solidFill>
+                  <a:srgbClr val="111827"/>
+                </a:solidFill>
+                <a:latin typeface="Arial"/>
+                <a:ea typeface="Arial"/>
+                <a:cs typeface="Arial"/>
+              </a:defRPr>
+            </a:pPr>
+            <a:r>
+              <a:rPr sz="1125" b="1">
+                <a:solidFill>
+                  <a:srgbClr val="111827"/>
+                </a:solidFill>
+                <a:latin typeface="Arial"/>
+                <a:ea typeface="Arial"/>
+                <a:cs typeface="Arial"/>
+              </a:rPr>
+              <a:t>Top-20 coverage</a:t>
+            </a:r>
+          </a:p>
+          <a:p xmlns:a="http://schemas.openxmlformats.org/drawingml/2006/main">
+            <a:pPr algn="l">
+              <a:buNone/>
+              <a:defRPr sz="1125" b="1">
+                <a:solidFill>
+                  <a:srgbClr val="111827"/>
+                </a:solidFill>
+                <a:latin typeface="Arial"/>
+                <a:ea typeface="Arial"/>
+                <a:cs typeface="Arial"/>
+              </a:defRPr>
+            </a:pPr>
+            <a:r>
+              <a:rPr sz="1125" b="1">
+                <a:solidFill>
+                  <a:srgbClr val="111827"/>
+                </a:solidFill>
+                <a:latin typeface="Arial"/>
+                <a:ea typeface="Arial"/>
+                <a:cs typeface="Arial"/>
+              </a:rPr>
+              <a:t>Top-1 concentration</a:t>
+            </a:r>
+          </a:p>
+        </p:txBody>
+      </p:sp>
+      <p:cxnSp>
+        <p:nvCxnSpPr>
+          <p:cNvPr id="398" name="evaluation-rule-2"/>
+          <p:cNvCxnSpPr/>
+          <p:nvPr/>
+        </p:nvCxnSpPr>
+        <p:spPr>
+          <a:xfrm xmlns:a="http://schemas.openxmlformats.org/drawingml/2006/main">
+            <a:off x="10210800" y="4362450"/>
+            <a:ext cx="1352550" cy="0"/>
+          </a:xfrm>
+          <a:prstGeom xmlns:a="http://schemas.openxmlformats.org/drawingml/2006/main" prst="straightConnector1">
+            <a:avLst/>
+          </a:prstGeom>
           <a:ln xmlns:a="http://schemas.openxmlformats.org/drawingml/2006/main" w="11430">
             <a:solidFill>
-              <a:srgbClr val="B7BBC2"/>
+              <a:srgbClr val="D5A55E"/>
             </a:solidFill>
             <a:prstDash val="solid"/>
           </a:ln>
         </p:spPr>
-      </p:sp>
-      <p:sp>
-        <p:nvSpPr>
-          <p:cNvPr id="73" name="sasrec-id-title">
-            <a:extLst xmlns:a="http://schemas.openxmlformats.org/drawingml/2006/main">
-              <a:ext uri="{FF2B5EF4-FFF2-40B4-BE49-F238E27FC236}">
-                <a16:creationId xmlns:a16="http://schemas.microsoft.com/office/drawing/2014/main" id="{200C4F2E-27F0-457E-A7D6-0B190E604096}"/>
-              </a:ext>
-            </a:extLst>
-          </p:cNvPr>
-          <p:cNvSpPr>
-            <a:spLocks xmlns:a="http://schemas.openxmlformats.org/drawingml/2006/main" noGrp="1"/>
-          </p:cNvSpPr>
-          <p:nvPr/>
-        </p:nvSpPr>
-        <p:spPr>
-          <a:xfrm xmlns:a="http://schemas.openxmlformats.org/drawingml/2006/main">
-            <a:off x="7829550" y="3438525"/>
-            <a:ext cx="1676400" cy="533400"/>
+      </p:cxnSp>
+      <p:sp>
+        <p:nvSpPr>
+          <p:cNvPr id="90" name="evaluation-step-3-marker">
+            <a:extLst xmlns:a="http://schemas.openxmlformats.org/drawingml/2006/main">
+              <a:ext uri="{FF2B5EF4-FFF2-40B4-BE49-F238E27FC236}">
+                <a16:creationId xmlns:a16="http://schemas.microsoft.com/office/drawing/2014/main" id="{B06C640C-C820-419E-825C-1ABF5062C216}"/>
+              </a:ext>
+            </a:extLst>
+          </p:cNvPr>
+          <p:cNvSpPr>
+            <a:spLocks xmlns:a="http://schemas.openxmlformats.org/drawingml/2006/main" noGrp="1"/>
+          </p:cNvSpPr>
+          <p:nvPr/>
+        </p:nvSpPr>
+        <p:spPr>
+          <a:xfrm xmlns:a="http://schemas.openxmlformats.org/drawingml/2006/main">
+            <a:off x="10210800" y="4495800"/>
+            <a:ext cx="228600" cy="228600"/>
+          </a:xfrm>
+          <a:prstGeom xmlns:a="http://schemas.openxmlformats.org/drawingml/2006/main" prst="ellipse">
+            <a:avLst/>
+          </a:prstGeom>
+          <a:solidFill xmlns:a="http://schemas.openxmlformats.org/drawingml/2006/main">
+            <a:srgbClr val="A85D00"/>
+          </a:solidFill>
+          <a:ln xmlns:a="http://schemas.openxmlformats.org/drawingml/2006/main" w="0">
+            <a:solidFill>
+              <a:srgbClr val="A85D00"/>
+            </a:solidFill>
+            <a:prstDash val="solid"/>
+          </a:ln>
+        </p:spPr>
+      </p:sp>
+      <p:sp>
+        <p:nvSpPr>
+          <p:cNvPr id="91" name="evaluation-step-3-number">
+            <a:extLst xmlns:a="http://schemas.openxmlformats.org/drawingml/2006/main">
+              <a:ext uri="{FF2B5EF4-FFF2-40B4-BE49-F238E27FC236}">
+                <a16:creationId xmlns:a16="http://schemas.microsoft.com/office/drawing/2014/main" id="{6213FA49-0F59-49DA-AB76-604965409387}"/>
+              </a:ext>
+            </a:extLst>
+          </p:cNvPr>
+          <p:cNvSpPr>
+            <a:spLocks xmlns:a="http://schemas.openxmlformats.org/drawingml/2006/main" noGrp="1"/>
+          </p:cNvSpPr>
+          <p:nvPr/>
+        </p:nvSpPr>
+        <p:spPr>
+          <a:xfrm xmlns:a="http://schemas.openxmlformats.org/drawingml/2006/main">
+            <a:off x="10210800" y="4495800"/>
+            <a:ext cx="228600" cy="228600"/>
           </a:xfrm>
           <a:prstGeom xmlns:a="http://schemas.openxmlformats.org/drawingml/2006/main" prst="rect">
             <a:avLst/>
@@ -4323,9 +5306,10 @@
           <a:lstStyle xmlns:a="http://schemas.openxmlformats.org/drawingml/2006/main"/>
           <a:p xmlns:a="http://schemas.openxmlformats.org/drawingml/2006/main">
             <a:pPr algn="ctr">
-              <a:defRPr sz="1500" b="1">
-                <a:solidFill>
-                  <a:srgbClr val="111827"/>
+              <a:buNone/>
+              <a:defRPr sz="1050" b="1">
+                <a:solidFill>
+                  <a:srgbClr val="FFFFFF"/>
                 </a:solidFill>
                 <a:latin typeface="Arial"/>
                 <a:ea typeface="Arial"/>
@@ -4333,72 +5317,284 @@
               </a:defRPr>
             </a:pPr>
             <a:r>
-              <a:rPr sz="1500" b="1">
+              <a:rPr sz="1050" b="1">
+                <a:solidFill>
+                  <a:srgbClr val="FFFFFF"/>
+                </a:solidFill>
+                <a:latin typeface="Arial"/>
+                <a:ea typeface="Arial"/>
+                <a:cs typeface="Arial"/>
+              </a:rPr>
+              <a:t>3</a:t>
+            </a:r>
+          </a:p>
+        </p:txBody>
+      </p:sp>
+      <p:sp>
+        <p:nvSpPr>
+          <p:cNvPr id="92" name="evaluation-step-3-title">
+            <a:extLst xmlns:a="http://schemas.openxmlformats.org/drawingml/2006/main">
+              <a:ext uri="{FF2B5EF4-FFF2-40B4-BE49-F238E27FC236}">
+                <a16:creationId xmlns:a16="http://schemas.microsoft.com/office/drawing/2014/main" id="{E4CA031C-307A-402B-9BD6-31870CAC5657}"/>
+              </a:ext>
+            </a:extLst>
+          </p:cNvPr>
+          <p:cNvSpPr>
+            <a:spLocks xmlns:a="http://schemas.openxmlformats.org/drawingml/2006/main" noGrp="1"/>
+          </p:cNvSpPr>
+          <p:nvPr/>
+        </p:nvSpPr>
+        <p:spPr>
+          <a:xfrm xmlns:a="http://schemas.openxmlformats.org/drawingml/2006/main">
+            <a:off x="10515600" y="4457700"/>
+            <a:ext cx="1047750" cy="304800"/>
+          </a:xfrm>
+          <a:prstGeom xmlns:a="http://schemas.openxmlformats.org/drawingml/2006/main" prst="rect">
+            <a:avLst/>
+          </a:prstGeom>
+          <a:noFill xmlns:a="http://schemas.openxmlformats.org/drawingml/2006/main"/>
+          <a:ln xmlns:a="http://schemas.openxmlformats.org/drawingml/2006/main" w="0">
+            <a:noFill/>
+            <a:prstDash val="solid"/>
+          </a:ln>
+        </p:spPr>
+        <p:txBody>
+          <a:bodyPr xmlns:a="http://schemas.openxmlformats.org/drawingml/2006/main" lIns="0" tIns="0" rIns="0" bIns="0" anchor="ctr">
+            <a:normAutofit fontScale="78092"/>
+          </a:bodyPr>
+          <a:lstStyle xmlns:a="http://schemas.openxmlformats.org/drawingml/2006/main"/>
+          <a:p xmlns:a="http://schemas.openxmlformats.org/drawingml/2006/main">
+            <a:pPr algn="l">
+              <a:buNone/>
+              <a:defRPr sz="1350" b="1">
+                <a:solidFill>
+                  <a:srgbClr val="A85D00"/>
+                </a:solidFill>
+                <a:latin typeface="Arial"/>
+                <a:ea typeface="Arial"/>
+                <a:cs typeface="Arial"/>
+              </a:defRPr>
+            </a:pPr>
+            <a:r>
+              <a:rPr sz="1350" b="1">
+                <a:solidFill>
+                  <a:srgbClr val="A85D00"/>
+                </a:solidFill>
+                <a:latin typeface="Arial"/>
+                <a:ea typeface="Arial"/>
+                <a:cs typeface="Arial"/>
+              </a:rPr>
+              <a:t>Compare 4 arms</a:t>
+            </a:r>
+          </a:p>
+        </p:txBody>
+      </p:sp>
+      <p:sp>
+        <p:nvSpPr>
+          <p:cNvPr id="93" name="arm-comparisons">
+            <a:extLst xmlns:a="http://schemas.openxmlformats.org/drawingml/2006/main">
+              <a:ext uri="{FF2B5EF4-FFF2-40B4-BE49-F238E27FC236}">
+                <a16:creationId xmlns:a16="http://schemas.microsoft.com/office/drawing/2014/main" id="{64C72BED-58D2-4F21-9C49-1F995D767D93}"/>
+              </a:ext>
+            </a:extLst>
+          </p:cNvPr>
+          <p:cNvSpPr>
+            <a:spLocks xmlns:a="http://schemas.openxmlformats.org/drawingml/2006/main" noGrp="1"/>
+          </p:cNvSpPr>
+          <p:nvPr/>
+        </p:nvSpPr>
+        <p:spPr>
+          <a:xfrm xmlns:a="http://schemas.openxmlformats.org/drawingml/2006/main">
+            <a:off x="10210800" y="4819650"/>
+            <a:ext cx="1352550" cy="590550"/>
+          </a:xfrm>
+          <a:prstGeom xmlns:a="http://schemas.openxmlformats.org/drawingml/2006/main" prst="rect">
+            <a:avLst/>
+          </a:prstGeom>
+          <a:noFill xmlns:a="http://schemas.openxmlformats.org/drawingml/2006/main"/>
+          <a:ln xmlns:a="http://schemas.openxmlformats.org/drawingml/2006/main" w="0">
+            <a:noFill/>
+            <a:prstDash val="solid"/>
+          </a:ln>
+        </p:spPr>
+        <p:txBody>
+          <a:bodyPr xmlns:a="http://schemas.openxmlformats.org/drawingml/2006/main" lIns="0" tIns="0" rIns="0" bIns="0" anchor="ctr">
+            <a:normAutofit fontScale="93103"/>
+          </a:bodyPr>
+          <a:lstStyle xmlns:a="http://schemas.openxmlformats.org/drawingml/2006/main"/>
+          <a:p xmlns:a="http://schemas.openxmlformats.org/drawingml/2006/main">
+            <a:pPr algn="l">
+              <a:buNone/>
+              <a:defRPr sz="1200" b="1">
                 <a:solidFill>
                   <a:srgbClr val="111827"/>
                 </a:solidFill>
                 <a:latin typeface="Arial"/>
                 <a:ea typeface="Arial"/>
                 <a:cs typeface="Arial"/>
+              </a:defRPr>
+            </a:pPr>
+            <a:r>
+              <a:rPr sz="1200" b="1">
+                <a:solidFill>
+                  <a:srgbClr val="111827"/>
+                </a:solidFill>
+                <a:latin typeface="Arial"/>
+                <a:ea typeface="Arial"/>
+                <a:cs typeface="Arial"/>
               </a:rPr>
-              <a:t>SASRec_ID</a:t>
+              <a:t>3× VC vs ID</a:t>
+            </a:r>
+          </a:p>
+          <a:p xmlns:a="http://schemas.openxmlformats.org/drawingml/2006/main">
+            <a:pPr algn="l">
+              <a:buNone/>
+              <a:defRPr sz="1200" b="1">
+                <a:solidFill>
+                  <a:srgbClr val="111827"/>
+                </a:solidFill>
+                <a:latin typeface="Arial"/>
+                <a:ea typeface="Arial"/>
+                <a:cs typeface="Arial"/>
+              </a:defRPr>
+            </a:pPr>
+            <a:r>
+              <a:rPr sz="1200" b="1">
+                <a:solidFill>
+                  <a:srgbClr val="111827"/>
+                </a:solidFill>
+                <a:latin typeface="Arial"/>
+                <a:ea typeface="Arial"/>
+                <a:cs typeface="Arial"/>
+              </a:rPr>
+              <a:t>2× GRAPH vs DESC</a:t>
+            </a:r>
+          </a:p>
+          <a:p xmlns:a="http://schemas.openxmlformats.org/drawingml/2006/main">
+            <a:pPr algn="l">
+              <a:buNone/>
+              <a:defRPr sz="1200" b="1">
+                <a:solidFill>
+                  <a:srgbClr val="111827"/>
+                </a:solidFill>
+                <a:latin typeface="Arial"/>
+                <a:ea typeface="Arial"/>
+                <a:cs typeface="Arial"/>
+              </a:defRPr>
+            </a:pPr>
+            <a:r>
+              <a:rPr sz="1200" b="1">
+                <a:solidFill>
+                  <a:srgbClr val="111827"/>
+                </a:solidFill>
+                <a:latin typeface="Arial"/>
+                <a:ea typeface="Arial"/>
+                <a:cs typeface="Arial"/>
+              </a:rPr>
+              <a:t>QWEN ↔ GEMINI</a:t>
             </a:r>
           </a:p>
         </p:txBody>
       </p:sp>
       <p:sp>
         <p:nvSpPr>
-          <p:cNvPr id="74" name="desc-embed-box">
-            <a:extLst xmlns:a="http://schemas.openxmlformats.org/drawingml/2006/main">
-              <a:ext uri="{FF2B5EF4-FFF2-40B4-BE49-F238E27FC236}">
-                <a16:creationId xmlns:a16="http://schemas.microsoft.com/office/drawing/2014/main" id="{8817C308-035D-4DA5-AF2A-9F6ECB6DE590}"/>
-              </a:ext>
-            </a:extLst>
-          </p:cNvPr>
-          <p:cNvSpPr>
-            <a:spLocks xmlns:a="http://schemas.openxmlformats.org/drawingml/2006/main" noGrp="1"/>
-          </p:cNvSpPr>
-          <p:nvPr/>
-        </p:nvSpPr>
-        <p:spPr>
-          <a:xfrm xmlns:a="http://schemas.openxmlformats.org/drawingml/2006/main">
-            <a:off x="7734300" y="4010025"/>
-            <a:ext cx="1866900" cy="419100"/>
-          </a:xfrm>
-          <a:prstGeom xmlns:a="http://schemas.openxmlformats.org/drawingml/2006/main" prst="roundRect">
-            <a:avLst>
-              <a:gd name="adj" fmla="val 18182"/>
-            </a:avLst>
-          </a:prstGeom>
-          <a:solidFill xmlns:a="http://schemas.openxmlformats.org/drawingml/2006/main">
-            <a:srgbClr val="EAF2FF"/>
-          </a:solidFill>
-          <a:ln xmlns:a="http://schemas.openxmlformats.org/drawingml/2006/main" w="11430">
+          <p:cNvPr id="94" name="diagnosis">
+            <a:extLst xmlns:a="http://schemas.openxmlformats.org/drawingml/2006/main">
+              <a:ext uri="{FF2B5EF4-FFF2-40B4-BE49-F238E27FC236}">
+                <a16:creationId xmlns:a16="http://schemas.microsoft.com/office/drawing/2014/main" id="{9C220A0E-16D0-49BE-A4ED-ADFA8D6D5658}"/>
+              </a:ext>
+            </a:extLst>
+          </p:cNvPr>
+          <p:cNvSpPr>
+            <a:spLocks xmlns:a="http://schemas.openxmlformats.org/drawingml/2006/main" noGrp="1"/>
+          </p:cNvSpPr>
+          <p:nvPr/>
+        </p:nvSpPr>
+        <p:spPr>
+          <a:xfrm xmlns:a="http://schemas.openxmlformats.org/drawingml/2006/main">
+            <a:off x="10210800" y="5467350"/>
+            <a:ext cx="1352550" cy="171450"/>
+          </a:xfrm>
+          <a:prstGeom xmlns:a="http://schemas.openxmlformats.org/drawingml/2006/main" prst="rect">
+            <a:avLst/>
+          </a:prstGeom>
+          <a:noFill xmlns:a="http://schemas.openxmlformats.org/drawingml/2006/main"/>
+          <a:ln xmlns:a="http://schemas.openxmlformats.org/drawingml/2006/main" w="0">
+            <a:noFill/>
+            <a:prstDash val="solid"/>
+          </a:ln>
+        </p:spPr>
+        <p:txBody>
+          <a:bodyPr xmlns:a="http://schemas.openxmlformats.org/drawingml/2006/main" lIns="0" tIns="0" rIns="0" bIns="0" anchor="ctr">
+            <a:normAutofit fontScale="91137"/>
+          </a:bodyPr>
+          <a:lstStyle xmlns:a="http://schemas.openxmlformats.org/drawingml/2006/main"/>
+          <a:p xmlns:a="http://schemas.openxmlformats.org/drawingml/2006/main">
+            <a:pPr algn="l">
+              <a:buNone/>
+              <a:defRPr sz="900">
+                <a:solidFill>
+                  <a:srgbClr val="667085"/>
+                </a:solidFill>
+                <a:latin typeface="Arial"/>
+                <a:ea typeface="Arial"/>
+                <a:cs typeface="Arial"/>
+              </a:defRPr>
+            </a:pPr>
+            <a:r>
+              <a:rPr sz="900">
+                <a:solidFill>
+                  <a:srgbClr val="667085"/>
+                </a:solidFill>
+                <a:latin typeface="Arial"/>
+                <a:ea typeface="Arial"/>
+                <a:cs typeface="Arial"/>
+              </a:rPr>
+              <a:t>paired bootstrap → diagnosis</a:t>
+            </a:r>
+          </a:p>
+        </p:txBody>
+      </p:sp>
+      <p:cxnSp>
+        <p:nvCxnSpPr>
+          <p:cNvPr id="404" name="footer-rule"/>
+          <p:cNvCxnSpPr/>
+          <p:nvPr/>
+        </p:nvCxnSpPr>
+        <p:spPr>
+          <a:xfrm xmlns:a="http://schemas.openxmlformats.org/drawingml/2006/main">
+            <a:off x="457200" y="5953125"/>
+            <a:ext cx="11277600" cy="0"/>
+          </a:xfrm>
+          <a:prstGeom xmlns:a="http://schemas.openxmlformats.org/drawingml/2006/main" prst="straightConnector1">
+            <a:avLst/>
+          </a:prstGeom>
+          <a:ln xmlns:a="http://schemas.openxmlformats.org/drawingml/2006/main" w="9525">
             <a:solidFill>
-              <a:srgbClr val="B7CEF5"/>
+              <a:srgbClr val="C8CDD5"/>
             </a:solidFill>
             <a:prstDash val="solid"/>
           </a:ln>
         </p:spPr>
-      </p:sp>
-      <p:sp>
-        <p:nvSpPr>
-          <p:cNvPr id="75" name="desc-embed-title">
-            <a:extLst xmlns:a="http://schemas.openxmlformats.org/drawingml/2006/main">
-              <a:ext uri="{FF2B5EF4-FFF2-40B4-BE49-F238E27FC236}">
-                <a16:creationId xmlns:a16="http://schemas.microsoft.com/office/drawing/2014/main" id="{5FB43F6E-B273-484B-8601-02033703840A}"/>
-              </a:ext>
-            </a:extLst>
-          </p:cNvPr>
-          <p:cNvSpPr>
-            <a:spLocks xmlns:a="http://schemas.openxmlformats.org/drawingml/2006/main" noGrp="1"/>
-          </p:cNvSpPr>
-          <p:nvPr/>
-        </p:nvSpPr>
-        <p:spPr>
-          <a:xfrm xmlns:a="http://schemas.openxmlformats.org/drawingml/2006/main">
-            <a:off x="7829550" y="4010025"/>
-            <a:ext cx="1676400" cy="419100"/>
+      </p:cxnSp>
+      <p:sp>
+        <p:nvSpPr>
+          <p:cNvPr id="96" name="footer">
+            <a:extLst xmlns:a="http://schemas.openxmlformats.org/drawingml/2006/main">
+              <a:ext uri="{FF2B5EF4-FFF2-40B4-BE49-F238E27FC236}">
+                <a16:creationId xmlns:a16="http://schemas.microsoft.com/office/drawing/2014/main" id="{01969799-C872-46C3-AB6E-B550B117557D}"/>
+              </a:ext>
+            </a:extLst>
+          </p:cNvPr>
+          <p:cNvSpPr>
+            <a:spLocks xmlns:a="http://schemas.openxmlformats.org/drawingml/2006/main" noGrp="1"/>
+          </p:cNvSpPr>
+          <p:nvPr/>
+        </p:nvSpPr>
+        <p:spPr>
+          <a:xfrm xmlns:a="http://schemas.openxmlformats.org/drawingml/2006/main">
+            <a:off x="457200" y="6076950"/>
+            <a:ext cx="11277600" cy="304800"/>
           </a:xfrm>
           <a:prstGeom xmlns:a="http://schemas.openxmlformats.org/drawingml/2006/main" prst="rect">
             <a:avLst/>
@@ -4415,10 +5611,11 @@
           </a:bodyPr>
           <a:lstStyle xmlns:a="http://schemas.openxmlformats.org/drawingml/2006/main"/>
           <a:p xmlns:a="http://schemas.openxmlformats.org/drawingml/2006/main">
-            <a:pPr algn="ctr">
-              <a:defRPr sz="1200" b="1">
-                <a:solidFill>
-                  <a:srgbClr val="2F78E8"/>
+            <a:pPr algn="l">
+              <a:buNone/>
+              <a:defRPr sz="1200">
+                <a:solidFill>
+                  <a:srgbClr val="667085"/>
                 </a:solidFill>
                 <a:latin typeface="Arial"/>
                 <a:ea typeface="Arial"/>
@@ -4426,72 +5623,37 @@
               </a:defRPr>
             </a:pPr>
             <a:r>
-              <a:rPr sz="1200" b="1">
-                <a:solidFill>
-                  <a:srgbClr val="2F78E8"/>
+              <a:rPr sz="1200">
+                <a:solidFill>
+                  <a:srgbClr val="667085"/>
                 </a:solidFill>
                 <a:latin typeface="Arial"/>
                 <a:ea typeface="Arial"/>
                 <a:cs typeface="Arial"/>
               </a:rPr>
-              <a:t>BGE 1024D  ·  frozen embedding</a:t>
+              <a:t>통제 조건  ·  cohort, split, seeds, full-catalog scoring과 SASRec protocol은 고정</a:t>
             </a:r>
           </a:p>
         </p:txBody>
       </p:sp>
       <p:sp>
         <p:nvSpPr>
-          <p:cNvPr id="76" name="sasrec-desc-box">
-            <a:extLst xmlns:a="http://schemas.openxmlformats.org/drawingml/2006/main">
-              <a:ext uri="{FF2B5EF4-FFF2-40B4-BE49-F238E27FC236}">
-                <a16:creationId xmlns:a16="http://schemas.microsoft.com/office/drawing/2014/main" id="{13EFABDB-6663-4597-A8B0-7FB3FBAFA744}"/>
-              </a:ext>
-            </a:extLst>
-          </p:cNvPr>
-          <p:cNvSpPr>
-            <a:spLocks xmlns:a="http://schemas.openxmlformats.org/drawingml/2006/main" noGrp="1"/>
-          </p:cNvSpPr>
-          <p:nvPr/>
-        </p:nvSpPr>
-        <p:spPr>
-          <a:xfrm xmlns:a="http://schemas.openxmlformats.org/drawingml/2006/main">
-            <a:off x="7734300" y="4581525"/>
-            <a:ext cx="1866900" cy="533400"/>
-          </a:xfrm>
-          <a:prstGeom xmlns:a="http://schemas.openxmlformats.org/drawingml/2006/main" prst="roundRect">
-            <a:avLst>
-              <a:gd name="adj" fmla="val 14286"/>
-            </a:avLst>
-          </a:prstGeom>
-          <a:solidFill xmlns:a="http://schemas.openxmlformats.org/drawingml/2006/main">
-            <a:srgbClr val="2F78E8"/>
-          </a:solidFill>
-          <a:ln xmlns:a="http://schemas.openxmlformats.org/drawingml/2006/main" w="11430">
-            <a:solidFill>
-              <a:srgbClr val="2F78E8"/>
-            </a:solidFill>
-            <a:prstDash val="solid"/>
-          </a:ln>
-        </p:spPr>
-      </p:sp>
-      <p:sp>
-        <p:nvSpPr>
-          <p:cNvPr id="77" name="sasrec-desc-title">
-            <a:extLst xmlns:a="http://schemas.openxmlformats.org/drawingml/2006/main">
-              <a:ext uri="{FF2B5EF4-FFF2-40B4-BE49-F238E27FC236}">
-                <a16:creationId xmlns:a16="http://schemas.microsoft.com/office/drawing/2014/main" id="{51C2299E-8051-4F5D-9CDC-2798665C38BC}"/>
-              </a:ext>
-            </a:extLst>
-          </p:cNvPr>
-          <p:cNvSpPr>
-            <a:spLocks xmlns:a="http://schemas.openxmlformats.org/drawingml/2006/main" noGrp="1"/>
-          </p:cNvSpPr>
-          <p:nvPr/>
-        </p:nvSpPr>
-        <p:spPr>
-          <a:xfrm xmlns:a="http://schemas.openxmlformats.org/drawingml/2006/main">
-            <a:off x="7829550" y="4581525"/>
-            <a:ext cx="1676400" cy="533400"/>
+          <p:cNvPr id="97" name="acronym-note">
+            <a:extLst xmlns:a="http://schemas.openxmlformats.org/drawingml/2006/main">
+              <a:ext uri="{FF2B5EF4-FFF2-40B4-BE49-F238E27FC236}">
+                <a16:creationId xmlns:a16="http://schemas.microsoft.com/office/drawing/2014/main" id="{AF89D02D-4889-4FE2-8DFC-C5DE42F48D5B}"/>
+              </a:ext>
+            </a:extLst>
+          </p:cNvPr>
+          <p:cNvSpPr>
+            <a:spLocks xmlns:a="http://schemas.openxmlformats.org/drawingml/2006/main" noGrp="1"/>
+          </p:cNvSpPr>
+          <p:nvPr/>
+        </p:nvSpPr>
+        <p:spPr>
+          <a:xfrm xmlns:a="http://schemas.openxmlformats.org/drawingml/2006/main">
+            <a:off x="457200" y="6419850"/>
+            <a:ext cx="11277600" cy="228600"/>
           </a:xfrm>
           <a:prstGeom xmlns:a="http://schemas.openxmlformats.org/drawingml/2006/main" prst="rect">
             <a:avLst/>
@@ -4508,10 +5670,11 @@
           </a:bodyPr>
           <a:lstStyle xmlns:a="http://schemas.openxmlformats.org/drawingml/2006/main"/>
           <a:p xmlns:a="http://schemas.openxmlformats.org/drawingml/2006/main">
-            <a:pPr algn="ctr">
-              <a:defRPr sz="1425" b="1">
-                <a:solidFill>
-                  <a:srgbClr val="FFFFFF"/>
+            <a:pPr algn="l">
+              <a:buNone/>
+              <a:defRPr sz="975">
+                <a:solidFill>
+                  <a:srgbClr val="8A919C"/>
                 </a:solidFill>
                 <a:latin typeface="Arial"/>
                 <a:ea typeface="Arial"/>
@@ -4519,37 +5682,72 @@
               </a:defRPr>
             </a:pPr>
             <a:r>
-              <a:rPr sz="1425" b="1">
-                <a:solidFill>
-                  <a:srgbClr val="FFFFFF"/>
+              <a:rPr sz="975">
+                <a:solidFill>
+                  <a:srgbClr val="8A919C"/>
                 </a:solidFill>
                 <a:latin typeface="Arial"/>
                 <a:ea typeface="Arial"/>
                 <a:cs typeface="Arial"/>
               </a:rPr>
-              <a:t>SASRec_DESC</a:t>
+              <a:t>SCG = Scene Context Graph  ·  VS_GRAPH Q/G = Qwen/Gemini-source Graph Summary  ·  SD = Scene Description  ·  VS_desc = Description Summary</a:t>
             </a:r>
           </a:p>
         </p:txBody>
       </p:sp>
       <p:sp>
         <p:nvSpPr>
-          <p:cNvPr id="78" name="evaluation-scope">
-            <a:extLst xmlns:a="http://schemas.openxmlformats.org/drawingml/2006/main">
-              <a:ext uri="{FF2B5EF4-FFF2-40B4-BE49-F238E27FC236}">
-                <a16:creationId xmlns:a16="http://schemas.microsoft.com/office/drawing/2014/main" id="{756ECDF0-CA34-4262-B58C-F14470308FA4}"/>
-              </a:ext>
-            </a:extLst>
-          </p:cNvPr>
-          <p:cNvSpPr>
-            <a:spLocks xmlns:a="http://schemas.openxmlformats.org/drawingml/2006/main" noGrp="1"/>
-          </p:cNvSpPr>
-          <p:nvPr/>
-        </p:nvSpPr>
-        <p:spPr>
-          <a:xfrm xmlns:a="http://schemas.openxmlformats.org/drawingml/2006/main">
-            <a:off x="10210800" y="1695450"/>
-            <a:ext cx="1352550" cy="209550"/>
+          <p:cNvPr id="288" name="gemini-extract-box">
+            <a:extLst xmlns:a="http://schemas.openxmlformats.org/drawingml/2006/main">
+              <a:ext uri="{FF2B5EF4-FFF2-40B4-BE49-F238E27FC236}">
+                <a16:creationId xmlns:a16="http://schemas.microsoft.com/office/drawing/2014/main" id="{F2310AA1-2840-4007-8602-C1695D022511}"/>
+              </a:ext>
+            </a:extLst>
+          </p:cNvPr>
+          <p:cNvSpPr>
+            <a:spLocks xmlns:a="http://schemas.openxmlformats.org/drawingml/2006/main" noGrp="1"/>
+          </p:cNvSpPr>
+          <p:nvPr/>
+        </p:nvSpPr>
+        <p:spPr>
+          <a:xfrm xmlns:a="http://schemas.openxmlformats.org/drawingml/2006/main">
+            <a:off x="2952750" y="2924175"/>
+            <a:ext cx="781050" cy="400050"/>
+          </a:xfrm>
+          <a:prstGeom xmlns:a="http://schemas.openxmlformats.org/drawingml/2006/main" prst="roundRect">
+            <a:avLst>
+              <a:gd name="adj" fmla="val 19048"/>
+            </a:avLst>
+          </a:prstGeom>
+          <a:solidFill xmlns:a="http://schemas.openxmlformats.org/drawingml/2006/main">
+            <a:srgbClr val="FFFFFF"/>
+          </a:solidFill>
+          <a:ln xmlns:a="http://schemas.openxmlformats.org/drawingml/2006/main" w="11430">
+            <a:solidFill>
+              <a:srgbClr val="A8D8C8"/>
+            </a:solidFill>
+            <a:prstDash val="solid"/>
+          </a:ln>
+        </p:spPr>
+      </p:sp>
+      <p:sp>
+        <p:nvSpPr>
+          <p:cNvPr id="289" name="gemini-extract-title">
+            <a:extLst xmlns:a="http://schemas.openxmlformats.org/drawingml/2006/main">
+              <a:ext uri="{FF2B5EF4-FFF2-40B4-BE49-F238E27FC236}">
+                <a16:creationId xmlns:a16="http://schemas.microsoft.com/office/drawing/2014/main" id="{C73AB193-708A-4A73-86B4-730D15F8CD8E}"/>
+              </a:ext>
+            </a:extLst>
+          </p:cNvPr>
+          <p:cNvSpPr>
+            <a:spLocks xmlns:a="http://schemas.openxmlformats.org/drawingml/2006/main" noGrp="1"/>
+          </p:cNvSpPr>
+          <p:nvPr/>
+        </p:nvSpPr>
+        <p:spPr>
+          <a:xfrm xmlns:a="http://schemas.openxmlformats.org/drawingml/2006/main">
+            <a:off x="3048000" y="2933700"/>
+            <a:ext cx="590550" cy="190500"/>
           </a:xfrm>
           <a:prstGeom xmlns:a="http://schemas.openxmlformats.org/drawingml/2006/main" prst="rect">
             <a:avLst/>
@@ -4566,10 +5764,10 @@
           </a:bodyPr>
           <a:lstStyle xmlns:a="http://schemas.openxmlformats.org/drawingml/2006/main"/>
           <a:p xmlns:a="http://schemas.openxmlformats.org/drawingml/2006/main">
-            <a:pPr algn="l">
-              <a:defRPr sz="900" b="1">
-                <a:solidFill>
-                  <a:srgbClr val="A85D00"/>
+            <a:pPr algn="ctr">
+              <a:defRPr sz="1200" b="1">
+                <a:solidFill>
+                  <a:srgbClr val="168765"/>
                 </a:solidFill>
                 <a:latin typeface="Arial"/>
                 <a:ea typeface="Arial"/>
@@ -4577,70 +5775,37 @@
               </a:defRPr>
             </a:pPr>
             <a:r>
-              <a:rPr sz="900" b="1">
-                <a:solidFill>
-                  <a:srgbClr val="A85D00"/>
+              <a:rPr sz="1200" b="1">
+                <a:solidFill>
+                  <a:srgbClr val="168765"/>
                 </a:solidFill>
                 <a:latin typeface="Arial"/>
                 <a:ea typeface="Arial"/>
                 <a:cs typeface="Arial"/>
               </a:rPr>
-              <a:t>SAME TEST TARGETS</a:t>
+              <a:t>Gemini</a:t>
             </a:r>
           </a:p>
         </p:txBody>
       </p:sp>
       <p:sp>
         <p:nvSpPr>
-          <p:cNvPr id="79" name="evaluation-step-1-marker">
-            <a:extLst xmlns:a="http://schemas.openxmlformats.org/drawingml/2006/main">
-              <a:ext uri="{FF2B5EF4-FFF2-40B4-BE49-F238E27FC236}">
-                <a16:creationId xmlns:a16="http://schemas.microsoft.com/office/drawing/2014/main" id="{9C54C4CF-FDCE-4DA6-9F05-276C38B258B4}"/>
-              </a:ext>
-            </a:extLst>
-          </p:cNvPr>
-          <p:cNvSpPr>
-            <a:spLocks xmlns:a="http://schemas.openxmlformats.org/drawingml/2006/main" noGrp="1"/>
-          </p:cNvSpPr>
-          <p:nvPr/>
-        </p:nvSpPr>
-        <p:spPr>
-          <a:xfrm xmlns:a="http://schemas.openxmlformats.org/drawingml/2006/main">
-            <a:off x="10210800" y="2009775"/>
-            <a:ext cx="228600" cy="228600"/>
-          </a:xfrm>
-          <a:prstGeom xmlns:a="http://schemas.openxmlformats.org/drawingml/2006/main" prst="ellipse">
-            <a:avLst/>
-          </a:prstGeom>
-          <a:solidFill xmlns:a="http://schemas.openxmlformats.org/drawingml/2006/main">
-            <a:srgbClr val="A85D00"/>
-          </a:solidFill>
-          <a:ln xmlns:a="http://schemas.openxmlformats.org/drawingml/2006/main" w="0">
-            <a:solidFill>
-              <a:srgbClr val="A85D00"/>
-            </a:solidFill>
-            <a:prstDash val="solid"/>
-          </a:ln>
-        </p:spPr>
-      </p:sp>
-      <p:sp>
-        <p:nvSpPr>
-          <p:cNvPr id="80" name="evaluation-step-1-number">
-            <a:extLst xmlns:a="http://schemas.openxmlformats.org/drawingml/2006/main">
-              <a:ext uri="{FF2B5EF4-FFF2-40B4-BE49-F238E27FC236}">
-                <a16:creationId xmlns:a16="http://schemas.microsoft.com/office/drawing/2014/main" id="{96766910-FE80-4703-9232-5FC7F8D78455}"/>
-              </a:ext>
-            </a:extLst>
-          </p:cNvPr>
-          <p:cNvSpPr>
-            <a:spLocks xmlns:a="http://schemas.openxmlformats.org/drawingml/2006/main" noGrp="1"/>
-          </p:cNvSpPr>
-          <p:nvPr/>
-        </p:nvSpPr>
-        <p:spPr>
-          <a:xfrm xmlns:a="http://schemas.openxmlformats.org/drawingml/2006/main">
-            <a:off x="10210800" y="2009775"/>
-            <a:ext cx="228600" cy="228600"/>
+          <p:cNvPr id="290" name="gemini-extract-subtitle">
+            <a:extLst xmlns:a="http://schemas.openxmlformats.org/drawingml/2006/main">
+              <a:ext uri="{FF2B5EF4-FFF2-40B4-BE49-F238E27FC236}">
+                <a16:creationId xmlns:a16="http://schemas.microsoft.com/office/drawing/2014/main" id="{8BD9FEF3-4F22-47F2-BD24-21C11A3CC3B4}"/>
+              </a:ext>
+            </a:extLst>
+          </p:cNvPr>
+          <p:cNvSpPr>
+            <a:spLocks xmlns:a="http://schemas.openxmlformats.org/drawingml/2006/main" noGrp="1"/>
+          </p:cNvSpPr>
+          <p:nvPr/>
+        </p:nvSpPr>
+        <p:spPr>
+          <a:xfrm xmlns:a="http://schemas.openxmlformats.org/drawingml/2006/main">
+            <a:off x="3000375" y="3124200"/>
+            <a:ext cx="685800" cy="161925"/>
           </a:xfrm>
           <a:prstGeom xmlns:a="http://schemas.openxmlformats.org/drawingml/2006/main" prst="rect">
             <a:avLst/>
@@ -4658,9 +5823,9 @@
           <a:lstStyle xmlns:a="http://schemas.openxmlformats.org/drawingml/2006/main"/>
           <a:p xmlns:a="http://schemas.openxmlformats.org/drawingml/2006/main">
             <a:pPr algn="ctr">
-              <a:defRPr sz="1050" b="1">
-                <a:solidFill>
-                  <a:srgbClr val="FFFFFF"/>
+              <a:defRPr sz="825" b="0">
+                <a:solidFill>
+                  <a:srgbClr val="667085"/>
                 </a:solidFill>
                 <a:latin typeface="Arial"/>
                 <a:ea typeface="Arial"/>
@@ -4668,37 +5833,105 @@
               </a:defRPr>
             </a:pPr>
             <a:r>
-              <a:rPr sz="1050" b="1">
-                <a:solidFill>
-                  <a:srgbClr val="FFFFFF"/>
+              <a:rPr sz="825" b="0">
+                <a:solidFill>
+                  <a:srgbClr val="667085"/>
                 </a:solidFill>
                 <a:latin typeface="Arial"/>
                 <a:ea typeface="Arial"/>
                 <a:cs typeface="Arial"/>
               </a:rPr>
-              <a:t>1</a:t>
+              <a:t>scene graph</a:t>
             </a:r>
           </a:p>
         </p:txBody>
       </p:sp>
       <p:sp>
         <p:nvSpPr>
-          <p:cNvPr id="81" name="evaluation-step-1-title">
-            <a:extLst xmlns:a="http://schemas.openxmlformats.org/drawingml/2006/main">
-              <a:ext uri="{FF2B5EF4-FFF2-40B4-BE49-F238E27FC236}">
-                <a16:creationId xmlns:a16="http://schemas.microsoft.com/office/drawing/2014/main" id="{2BE85DFE-9823-4982-90E6-3D2018C06C64}"/>
-              </a:ext>
-            </a:extLst>
-          </p:cNvPr>
-          <p:cNvSpPr>
-            <a:spLocks xmlns:a="http://schemas.openxmlformats.org/drawingml/2006/main" noGrp="1"/>
-          </p:cNvSpPr>
-          <p:nvPr/>
-        </p:nvSpPr>
-        <p:spPr>
-          <a:xfrm xmlns:a="http://schemas.openxmlformats.org/drawingml/2006/main">
-            <a:off x="10515600" y="1952625"/>
-            <a:ext cx="1047750" cy="361950"/>
+          <p:cNvPr id="291" name="gemini-step-1">
+            <a:extLst xmlns:a="http://schemas.openxmlformats.org/drawingml/2006/main">
+              <a:ext uri="{FF2B5EF4-FFF2-40B4-BE49-F238E27FC236}">
+                <a16:creationId xmlns:a16="http://schemas.microsoft.com/office/drawing/2014/main" id="{90FDFCF8-4F09-452D-9E51-36E7E9802F73}"/>
+              </a:ext>
+            </a:extLst>
+          </p:cNvPr>
+          <p:cNvSpPr>
+            <a:spLocks xmlns:a="http://schemas.openxmlformats.org/drawingml/2006/main" noGrp="1"/>
+          </p:cNvSpPr>
+          <p:nvPr/>
+        </p:nvSpPr>
+        <p:spPr>
+          <a:xfrm xmlns:a="http://schemas.openxmlformats.org/drawingml/2006/main">
+            <a:off x="3733800" y="3086100"/>
+            <a:ext cx="142875" cy="66675"/>
+          </a:xfrm>
+          <a:prstGeom xmlns:a="http://schemas.openxmlformats.org/drawingml/2006/main" prst="rightArrow">
+            <a:avLst/>
+          </a:prstGeom>
+          <a:solidFill xmlns:a="http://schemas.openxmlformats.org/drawingml/2006/main">
+            <a:srgbClr val="168765"/>
+          </a:solidFill>
+          <a:ln xmlns:a="http://schemas.openxmlformats.org/drawingml/2006/main" w="0">
+            <a:solidFill>
+              <a:srgbClr val="168765"/>
+            </a:solidFill>
+            <a:prstDash val="solid"/>
+          </a:ln>
+        </p:spPr>
+      </p:sp>
+      <p:sp>
+        <p:nvSpPr>
+          <p:cNvPr id="292" name="gemini-scg-box">
+            <a:extLst xmlns:a="http://schemas.openxmlformats.org/drawingml/2006/main">
+              <a:ext uri="{FF2B5EF4-FFF2-40B4-BE49-F238E27FC236}">
+                <a16:creationId xmlns:a16="http://schemas.microsoft.com/office/drawing/2014/main" id="{C66BAEE5-2FDF-4AF9-9B2F-04AA5FCB3123}"/>
+              </a:ext>
+            </a:extLst>
+          </p:cNvPr>
+          <p:cNvSpPr>
+            <a:spLocks xmlns:a="http://schemas.openxmlformats.org/drawingml/2006/main" noGrp="1"/>
+          </p:cNvSpPr>
+          <p:nvPr/>
+        </p:nvSpPr>
+        <p:spPr>
+          <a:xfrm xmlns:a="http://schemas.openxmlformats.org/drawingml/2006/main">
+            <a:off x="3876675" y="2924175"/>
+            <a:ext cx="781050" cy="400050"/>
+          </a:xfrm>
+          <a:prstGeom xmlns:a="http://schemas.openxmlformats.org/drawingml/2006/main" prst="roundRect">
+            <a:avLst>
+              <a:gd name="adj" fmla="val 19048"/>
+            </a:avLst>
+          </a:prstGeom>
+          <a:solidFill xmlns:a="http://schemas.openxmlformats.org/drawingml/2006/main">
+            <a:srgbClr val="FFFFFF"/>
+          </a:solidFill>
+          <a:ln xmlns:a="http://schemas.openxmlformats.org/drawingml/2006/main" w="11430">
+            <a:solidFill>
+              <a:srgbClr val="A8D8C8"/>
+            </a:solidFill>
+            <a:prstDash val="solid"/>
+          </a:ln>
+        </p:spPr>
+      </p:sp>
+      <p:sp>
+        <p:nvSpPr>
+          <p:cNvPr id="293" name="gemini-scg-title">
+            <a:extLst xmlns:a="http://schemas.openxmlformats.org/drawingml/2006/main">
+              <a:ext uri="{FF2B5EF4-FFF2-40B4-BE49-F238E27FC236}">
+                <a16:creationId xmlns:a16="http://schemas.microsoft.com/office/drawing/2014/main" id="{674B8ED6-3D39-4402-AA5B-EE42E067AEAF}"/>
+              </a:ext>
+            </a:extLst>
+          </p:cNvPr>
+          <p:cNvSpPr>
+            <a:spLocks xmlns:a="http://schemas.openxmlformats.org/drawingml/2006/main" noGrp="1"/>
+          </p:cNvSpPr>
+          <p:nvPr/>
+        </p:nvSpPr>
+        <p:spPr>
+          <a:xfrm xmlns:a="http://schemas.openxmlformats.org/drawingml/2006/main">
+            <a:off x="3971925" y="2933700"/>
+            <a:ext cx="590550" cy="190500"/>
           </a:xfrm>
           <a:prstGeom xmlns:a="http://schemas.openxmlformats.org/drawingml/2006/main" prst="rect">
             <a:avLst/>
@@ -4711,14 +5944,14 @@
         </p:spPr>
         <p:txBody>
           <a:bodyPr xmlns:a="http://schemas.openxmlformats.org/drawingml/2006/main" lIns="0" tIns="0" rIns="0" bIns="0" anchor="ctr">
-            <a:normAutofit fontScale="83333"/>
+            <a:normAutofit fontScale="79365"/>
           </a:bodyPr>
           <a:lstStyle xmlns:a="http://schemas.openxmlformats.org/drawingml/2006/main"/>
           <a:p xmlns:a="http://schemas.openxmlformats.org/drawingml/2006/main">
-            <a:pPr algn="l">
-              <a:defRPr sz="1425" b="1">
-                <a:solidFill>
-                  <a:srgbClr val="A85D00"/>
+            <a:pPr algn="ctr">
+              <a:defRPr sz="1575" b="1">
+                <a:solidFill>
+                  <a:srgbClr val="168765"/>
                 </a:solidFill>
                 <a:latin typeface="Arial"/>
                 <a:ea typeface="Arial"/>
@@ -4726,150 +5959,37 @@
               </a:defRPr>
             </a:pPr>
             <a:r>
-              <a:rPr sz="1425" b="1">
-                <a:solidFill>
-                  <a:srgbClr val="A85D00"/>
+              <a:rPr sz="1575" b="1">
+                <a:solidFill>
+                  <a:srgbClr val="168765"/>
                 </a:solidFill>
                 <a:latin typeface="Arial"/>
                 <a:ea typeface="Arial"/>
                 <a:cs typeface="Arial"/>
               </a:rPr>
-              <a:t>Full-catalog ranking</a:t>
+              <a:t>SCG</a:t>
             </a:r>
           </a:p>
         </p:txBody>
       </p:sp>
       <p:sp>
         <p:nvSpPr>
-          <p:cNvPr id="82" name="evaluation-step-1-note">
-            <a:extLst xmlns:a="http://schemas.openxmlformats.org/drawingml/2006/main">
-              <a:ext uri="{FF2B5EF4-FFF2-40B4-BE49-F238E27FC236}">
-                <a16:creationId xmlns:a16="http://schemas.microsoft.com/office/drawing/2014/main" id="{6E7C3889-2A44-46D4-BD13-92737B7C2BF0}"/>
-              </a:ext>
-            </a:extLst>
-          </p:cNvPr>
-          <p:cNvSpPr>
-            <a:spLocks xmlns:a="http://schemas.openxmlformats.org/drawingml/2006/main" noGrp="1"/>
-          </p:cNvSpPr>
-          <p:nvPr/>
-        </p:nvSpPr>
-        <p:spPr>
-          <a:xfrm xmlns:a="http://schemas.openxmlformats.org/drawingml/2006/main">
-            <a:off x="10210800" y="2343150"/>
-            <a:ext cx="1352550" cy="228600"/>
-          </a:xfrm>
-          <a:prstGeom xmlns:a="http://schemas.openxmlformats.org/drawingml/2006/main" prst="rect">
-            <a:avLst/>
-          </a:prstGeom>
-          <a:noFill xmlns:a="http://schemas.openxmlformats.org/drawingml/2006/main"/>
-          <a:ln xmlns:a="http://schemas.openxmlformats.org/drawingml/2006/main" w="0">
-            <a:noFill/>
-            <a:prstDash val="solid"/>
-          </a:ln>
-        </p:spPr>
-        <p:txBody>
-          <a:bodyPr xmlns:a="http://schemas.openxmlformats.org/drawingml/2006/main" lIns="0" tIns="0" rIns="0" bIns="0" anchor="ctr">
-            <a:normAutofit fontScale="94589"/>
-          </a:bodyPr>
-          <a:lstStyle xmlns:a="http://schemas.openxmlformats.org/drawingml/2006/main"/>
-          <a:p xmlns:a="http://schemas.openxmlformats.org/drawingml/2006/main">
-            <a:pPr algn="l">
-              <a:defRPr sz="1050">
-                <a:solidFill>
-                  <a:srgbClr val="667085"/>
-                </a:solidFill>
-                <a:latin typeface="Arial"/>
-                <a:ea typeface="Arial"/>
-                <a:cs typeface="Arial"/>
-              </a:defRPr>
-            </a:pPr>
-            <a:r>
-              <a:rPr sz="1050">
-                <a:solidFill>
-                  <a:srgbClr val="667085"/>
-                </a:solidFill>
-                <a:latin typeface="Arial"/>
-                <a:ea typeface="Arial"/>
-                <a:cs typeface="Arial"/>
-              </a:rPr>
-              <a:t>모든 후보 item을 점수화</a:t>
-            </a:r>
-          </a:p>
-        </p:txBody>
-      </p:sp>
-      <p:cxnSp>
-        <p:nvCxnSpPr>
-          <p:cNvPr id="180" name="evaluation-rule-1"/>
-          <p:cNvCxnSpPr/>
-          <p:nvPr/>
-        </p:nvCxnSpPr>
-        <p:spPr>
-          <a:xfrm xmlns:a="http://schemas.openxmlformats.org/drawingml/2006/main">
-            <a:off x="10210800" y="2667000"/>
-            <a:ext cx="1352550" cy="0"/>
-          </a:xfrm>
-          <a:prstGeom xmlns:a="http://schemas.openxmlformats.org/drawingml/2006/main" prst="straightConnector1">
-            <a:avLst/>
-          </a:prstGeom>
-          <a:ln xmlns:a="http://schemas.openxmlformats.org/drawingml/2006/main" w="11430">
-            <a:solidFill>
-              <a:srgbClr val="D5A55E"/>
-            </a:solidFill>
-            <a:prstDash val="solid"/>
-          </a:ln>
-        </p:spPr>
-      </p:cxnSp>
-      <p:sp>
-        <p:nvSpPr>
-          <p:cNvPr id="84" name="evaluation-step-2-marker">
-            <a:extLst xmlns:a="http://schemas.openxmlformats.org/drawingml/2006/main">
-              <a:ext uri="{FF2B5EF4-FFF2-40B4-BE49-F238E27FC236}">
-                <a16:creationId xmlns:a16="http://schemas.microsoft.com/office/drawing/2014/main" id="{0DCA05AE-E18B-4D39-B01B-E5B87FDAE389}"/>
-              </a:ext>
-            </a:extLst>
-          </p:cNvPr>
-          <p:cNvSpPr>
-            <a:spLocks xmlns:a="http://schemas.openxmlformats.org/drawingml/2006/main" noGrp="1"/>
-          </p:cNvSpPr>
-          <p:nvPr/>
-        </p:nvSpPr>
-        <p:spPr>
-          <a:xfrm xmlns:a="http://schemas.openxmlformats.org/drawingml/2006/main">
-            <a:off x="10210800" y="2800350"/>
-            <a:ext cx="228600" cy="228600"/>
-          </a:xfrm>
-          <a:prstGeom xmlns:a="http://schemas.openxmlformats.org/drawingml/2006/main" prst="ellipse">
-            <a:avLst/>
-          </a:prstGeom>
-          <a:solidFill xmlns:a="http://schemas.openxmlformats.org/drawingml/2006/main">
-            <a:srgbClr val="A85D00"/>
-          </a:solidFill>
-          <a:ln xmlns:a="http://schemas.openxmlformats.org/drawingml/2006/main" w="0">
-            <a:solidFill>
-              <a:srgbClr val="A85D00"/>
-            </a:solidFill>
-            <a:prstDash val="solid"/>
-          </a:ln>
-        </p:spPr>
-      </p:sp>
-      <p:sp>
-        <p:nvSpPr>
-          <p:cNvPr id="85" name="evaluation-step-2-number">
-            <a:extLst xmlns:a="http://schemas.openxmlformats.org/drawingml/2006/main">
-              <a:ext uri="{FF2B5EF4-FFF2-40B4-BE49-F238E27FC236}">
-                <a16:creationId xmlns:a16="http://schemas.microsoft.com/office/drawing/2014/main" id="{7C073C4A-40E6-4517-9FC5-8C4F40C35198}"/>
-              </a:ext>
-            </a:extLst>
-          </p:cNvPr>
-          <p:cNvSpPr>
-            <a:spLocks xmlns:a="http://schemas.openxmlformats.org/drawingml/2006/main" noGrp="1"/>
-          </p:cNvSpPr>
-          <p:nvPr/>
-        </p:nvSpPr>
-        <p:spPr>
-          <a:xfrm xmlns:a="http://schemas.openxmlformats.org/drawingml/2006/main">
-            <a:off x="10210800" y="2800350"/>
-            <a:ext cx="228600" cy="228600"/>
+          <p:cNvPr id="294" name="gemini-scg-subtitle">
+            <a:extLst xmlns:a="http://schemas.openxmlformats.org/drawingml/2006/main">
+              <a:ext uri="{FF2B5EF4-FFF2-40B4-BE49-F238E27FC236}">
+                <a16:creationId xmlns:a16="http://schemas.microsoft.com/office/drawing/2014/main" id="{DF82D877-C814-4339-9DCB-4CA25873FD97}"/>
+              </a:ext>
+            </a:extLst>
+          </p:cNvPr>
+          <p:cNvSpPr>
+            <a:spLocks xmlns:a="http://schemas.openxmlformats.org/drawingml/2006/main" noGrp="1"/>
+          </p:cNvSpPr>
+          <p:nvPr/>
+        </p:nvSpPr>
+        <p:spPr>
+          <a:xfrm xmlns:a="http://schemas.openxmlformats.org/drawingml/2006/main">
+            <a:off x="3924300" y="3124200"/>
+            <a:ext cx="685800" cy="161925"/>
           </a:xfrm>
           <a:prstGeom xmlns:a="http://schemas.openxmlformats.org/drawingml/2006/main" prst="rect">
             <a:avLst/>
@@ -4887,9 +6007,9 @@
           <a:lstStyle xmlns:a="http://schemas.openxmlformats.org/drawingml/2006/main"/>
           <a:p xmlns:a="http://schemas.openxmlformats.org/drawingml/2006/main">
             <a:pPr algn="ctr">
-              <a:defRPr sz="1050" b="1">
-                <a:solidFill>
-                  <a:srgbClr val="FFFFFF"/>
+              <a:defRPr sz="825" b="0">
+                <a:solidFill>
+                  <a:srgbClr val="667085"/>
                 </a:solidFill>
                 <a:latin typeface="Arial"/>
                 <a:ea typeface="Arial"/>
@@ -4897,37 +6017,105 @@
               </a:defRPr>
             </a:pPr>
             <a:r>
-              <a:rPr sz="1050" b="1">
-                <a:solidFill>
-                  <a:srgbClr val="FFFFFF"/>
+              <a:rPr sz="825" b="0">
+                <a:solidFill>
+                  <a:srgbClr val="667085"/>
                 </a:solidFill>
                 <a:latin typeface="Arial"/>
                 <a:ea typeface="Arial"/>
                 <a:cs typeface="Arial"/>
               </a:rPr>
-              <a:t>2</a:t>
+              <a:t>Gemini source</a:t>
             </a:r>
           </a:p>
         </p:txBody>
       </p:sp>
       <p:sp>
         <p:nvSpPr>
-          <p:cNvPr id="86" name="evaluation-step-2-title">
-            <a:extLst xmlns:a="http://schemas.openxmlformats.org/drawingml/2006/main">
-              <a:ext uri="{FF2B5EF4-FFF2-40B4-BE49-F238E27FC236}">
-                <a16:creationId xmlns:a16="http://schemas.microsoft.com/office/drawing/2014/main" id="{AB2E5F0E-A568-4CF5-BDA3-B07A703BC676}"/>
-              </a:ext>
-            </a:extLst>
-          </p:cNvPr>
-          <p:cNvSpPr>
-            <a:spLocks xmlns:a="http://schemas.openxmlformats.org/drawingml/2006/main" noGrp="1"/>
-          </p:cNvSpPr>
-          <p:nvPr/>
-        </p:nvSpPr>
-        <p:spPr>
-          <a:xfrm xmlns:a="http://schemas.openxmlformats.org/drawingml/2006/main">
-            <a:off x="10515600" y="2762250"/>
-            <a:ext cx="1047750" cy="304800"/>
+          <p:cNvPr id="295" name="gemini-step-2">
+            <a:extLst xmlns:a="http://schemas.openxmlformats.org/drawingml/2006/main">
+              <a:ext uri="{FF2B5EF4-FFF2-40B4-BE49-F238E27FC236}">
+                <a16:creationId xmlns:a16="http://schemas.microsoft.com/office/drawing/2014/main" id="{81940B71-CF3B-41F8-9944-54869468FF7B}"/>
+              </a:ext>
+            </a:extLst>
+          </p:cNvPr>
+          <p:cNvSpPr>
+            <a:spLocks xmlns:a="http://schemas.openxmlformats.org/drawingml/2006/main" noGrp="1"/>
+          </p:cNvSpPr>
+          <p:nvPr/>
+        </p:nvSpPr>
+        <p:spPr>
+          <a:xfrm xmlns:a="http://schemas.openxmlformats.org/drawingml/2006/main">
+            <a:off x="4657725" y="3086100"/>
+            <a:ext cx="142875" cy="66675"/>
+          </a:xfrm>
+          <a:prstGeom xmlns:a="http://schemas.openxmlformats.org/drawingml/2006/main" prst="rightArrow">
+            <a:avLst/>
+          </a:prstGeom>
+          <a:solidFill xmlns:a="http://schemas.openxmlformats.org/drawingml/2006/main">
+            <a:srgbClr val="168765"/>
+          </a:solidFill>
+          <a:ln xmlns:a="http://schemas.openxmlformats.org/drawingml/2006/main" w="0">
+            <a:solidFill>
+              <a:srgbClr val="168765"/>
+            </a:solidFill>
+            <a:prstDash val="solid"/>
+          </a:ln>
+        </p:spPr>
+      </p:sp>
+      <p:sp>
+        <p:nvSpPr>
+          <p:cNvPr id="296" name="gemini-summary-box">
+            <a:extLst xmlns:a="http://schemas.openxmlformats.org/drawingml/2006/main">
+              <a:ext uri="{FF2B5EF4-FFF2-40B4-BE49-F238E27FC236}">
+                <a16:creationId xmlns:a16="http://schemas.microsoft.com/office/drawing/2014/main" id="{4B2B71F2-4267-4A16-BE49-9A106AE9CDD1}"/>
+              </a:ext>
+            </a:extLst>
+          </p:cNvPr>
+          <p:cNvSpPr>
+            <a:spLocks xmlns:a="http://schemas.openxmlformats.org/drawingml/2006/main" noGrp="1"/>
+          </p:cNvSpPr>
+          <p:nvPr/>
+        </p:nvSpPr>
+        <p:spPr>
+          <a:xfrm xmlns:a="http://schemas.openxmlformats.org/drawingml/2006/main">
+            <a:off x="4800600" y="2924175"/>
+            <a:ext cx="781050" cy="400050"/>
+          </a:xfrm>
+          <a:prstGeom xmlns:a="http://schemas.openxmlformats.org/drawingml/2006/main" prst="roundRect">
+            <a:avLst>
+              <a:gd name="adj" fmla="val 19048"/>
+            </a:avLst>
+          </a:prstGeom>
+          <a:solidFill xmlns:a="http://schemas.openxmlformats.org/drawingml/2006/main">
+            <a:srgbClr val="FFFFFF"/>
+          </a:solidFill>
+          <a:ln xmlns:a="http://schemas.openxmlformats.org/drawingml/2006/main" w="11430">
+            <a:solidFill>
+              <a:srgbClr val="A8D8C8"/>
+            </a:solidFill>
+            <a:prstDash val="solid"/>
+          </a:ln>
+        </p:spPr>
+      </p:sp>
+      <p:sp>
+        <p:nvSpPr>
+          <p:cNvPr id="297" name="gemini-summary-title">
+            <a:extLst xmlns:a="http://schemas.openxmlformats.org/drawingml/2006/main">
+              <a:ext uri="{FF2B5EF4-FFF2-40B4-BE49-F238E27FC236}">
+                <a16:creationId xmlns:a16="http://schemas.microsoft.com/office/drawing/2014/main" id="{6375D760-5B83-48DA-8F17-FC2EB173C187}"/>
+              </a:ext>
+            </a:extLst>
+          </p:cNvPr>
+          <p:cNvSpPr>
+            <a:spLocks xmlns:a="http://schemas.openxmlformats.org/drawingml/2006/main" noGrp="1"/>
+          </p:cNvSpPr>
+          <p:nvPr/>
+        </p:nvSpPr>
+        <p:spPr>
+          <a:xfrm xmlns:a="http://schemas.openxmlformats.org/drawingml/2006/main">
+            <a:off x="4895850" y="2933700"/>
+            <a:ext cx="590550" cy="190500"/>
           </a:xfrm>
           <a:prstGeom xmlns:a="http://schemas.openxmlformats.org/drawingml/2006/main" prst="rect">
             <a:avLst/>
@@ -4944,10 +6132,10 @@
           </a:bodyPr>
           <a:lstStyle xmlns:a="http://schemas.openxmlformats.org/drawingml/2006/main"/>
           <a:p xmlns:a="http://schemas.openxmlformats.org/drawingml/2006/main">
-            <a:pPr algn="l">
-              <a:defRPr sz="1350" b="1">
-                <a:solidFill>
-                  <a:srgbClr val="111827"/>
+            <a:pPr algn="ctr">
+              <a:defRPr sz="1200" b="1">
+                <a:solidFill>
+                  <a:srgbClr val="168765"/>
                 </a:solidFill>
                 <a:latin typeface="Arial"/>
                 <a:ea typeface="Arial"/>
@@ -4955,37 +6143,37 @@
               </a:defRPr>
             </a:pPr>
             <a:r>
-              <a:rPr sz="1350" b="1">
-                <a:solidFill>
-                  <a:srgbClr val="111827"/>
+              <a:rPr sz="1200" b="1">
+                <a:solidFill>
+                  <a:srgbClr val="168765"/>
                 </a:solidFill>
                 <a:latin typeface="Arial"/>
                 <a:ea typeface="Arial"/>
                 <a:cs typeface="Arial"/>
               </a:rPr>
-              <a:t>Measure</a:t>
+              <a:t>Qwen</a:t>
             </a:r>
           </a:p>
         </p:txBody>
       </p:sp>
       <p:sp>
         <p:nvSpPr>
-          <p:cNvPr id="87" name="rank-quality">
-            <a:extLst xmlns:a="http://schemas.openxmlformats.org/drawingml/2006/main">
-              <a:ext uri="{FF2B5EF4-FFF2-40B4-BE49-F238E27FC236}">
-                <a16:creationId xmlns:a16="http://schemas.microsoft.com/office/drawing/2014/main" id="{2CE7973E-307D-43B8-BC70-BF2B2FE510D6}"/>
-              </a:ext>
-            </a:extLst>
-          </p:cNvPr>
-          <p:cNvSpPr>
-            <a:spLocks xmlns:a="http://schemas.openxmlformats.org/drawingml/2006/main" noGrp="1"/>
-          </p:cNvSpPr>
-          <p:nvPr/>
-        </p:nvSpPr>
-        <p:spPr>
-          <a:xfrm xmlns:a="http://schemas.openxmlformats.org/drawingml/2006/main">
-            <a:off x="10210800" y="3124200"/>
-            <a:ext cx="1352550" cy="457200"/>
+          <p:cNvPr id="298" name="gemini-summary-subtitle">
+            <a:extLst xmlns:a="http://schemas.openxmlformats.org/drawingml/2006/main">
+              <a:ext uri="{FF2B5EF4-FFF2-40B4-BE49-F238E27FC236}">
+                <a16:creationId xmlns:a16="http://schemas.microsoft.com/office/drawing/2014/main" id="{94DFBD11-6A42-4096-A102-9037F51CD8F2}"/>
+              </a:ext>
+            </a:extLst>
+          </p:cNvPr>
+          <p:cNvSpPr>
+            <a:spLocks xmlns:a="http://schemas.openxmlformats.org/drawingml/2006/main" noGrp="1"/>
+          </p:cNvSpPr>
+          <p:nvPr/>
+        </p:nvSpPr>
+        <p:spPr>
+          <a:xfrm xmlns:a="http://schemas.openxmlformats.org/drawingml/2006/main">
+            <a:off x="4848225" y="3124200"/>
+            <a:ext cx="685800" cy="161925"/>
           </a:xfrm>
           <a:prstGeom xmlns:a="http://schemas.openxmlformats.org/drawingml/2006/main" prst="rect">
             <a:avLst/>
@@ -4998,14 +6186,14 @@
         </p:spPr>
         <p:txBody>
           <a:bodyPr xmlns:a="http://schemas.openxmlformats.org/drawingml/2006/main" lIns="0" tIns="0" rIns="0" bIns="0" anchor="ctr">
-            <a:normAutofit fontScale="94434"/>
+            <a:normAutofit fontScale="96668"/>
           </a:bodyPr>
           <a:lstStyle xmlns:a="http://schemas.openxmlformats.org/drawingml/2006/main"/>
           <a:p xmlns:a="http://schemas.openxmlformats.org/drawingml/2006/main">
-            <a:pPr algn="l">
-              <a:defRPr sz="1200" b="1">
-                <a:solidFill>
-                  <a:srgbClr val="111827"/>
+            <a:pPr algn="ctr">
+              <a:defRPr sz="825" b="0">
+                <a:solidFill>
+                  <a:srgbClr val="667085"/>
                 </a:solidFill>
                 <a:latin typeface="Arial"/>
                 <a:ea typeface="Arial"/>
@@ -5013,22 +6201,125 @@
               </a:defRPr>
             </a:pPr>
             <a:r>
-              <a:rPr sz="1200" b="1">
-                <a:solidFill>
-                  <a:srgbClr val="111827"/>
+              <a:rPr sz="825" b="0">
+                <a:solidFill>
+                  <a:srgbClr val="667085"/>
                 </a:solidFill>
                 <a:latin typeface="Arial"/>
                 <a:ea typeface="Arial"/>
                 <a:cs typeface="Arial"/>
               </a:rPr>
-              <a:t>Rank quality</a:t>
-            </a:r>
-          </a:p>
-          <a:p xmlns:a="http://schemas.openxmlformats.org/drawingml/2006/main">
-            <a:pPr algn="l">
-              <a:defRPr sz="1200" b="1">
-                <a:solidFill>
-                  <a:srgbClr val="111827"/>
+              <a:t>video summary</a:t>
+            </a:r>
+          </a:p>
+        </p:txBody>
+      </p:sp>
+      <p:sp>
+        <p:nvSpPr>
+          <p:cNvPr id="299" name="gemini-step-3">
+            <a:extLst xmlns:a="http://schemas.openxmlformats.org/drawingml/2006/main">
+              <a:ext uri="{FF2B5EF4-FFF2-40B4-BE49-F238E27FC236}">
+                <a16:creationId xmlns:a16="http://schemas.microsoft.com/office/drawing/2014/main" id="{83759F80-9B08-486E-BB1D-D907A73346E3}"/>
+              </a:ext>
+            </a:extLst>
+          </p:cNvPr>
+          <p:cNvSpPr>
+            <a:spLocks xmlns:a="http://schemas.openxmlformats.org/drawingml/2006/main" noGrp="1"/>
+          </p:cNvSpPr>
+          <p:nvPr/>
+        </p:nvSpPr>
+        <p:spPr>
+          <a:xfrm xmlns:a="http://schemas.openxmlformats.org/drawingml/2006/main">
+            <a:off x="5581650" y="3086100"/>
+            <a:ext cx="142875" cy="66675"/>
+          </a:xfrm>
+          <a:prstGeom xmlns:a="http://schemas.openxmlformats.org/drawingml/2006/main" prst="rightArrow">
+            <a:avLst/>
+          </a:prstGeom>
+          <a:solidFill xmlns:a="http://schemas.openxmlformats.org/drawingml/2006/main">
+            <a:srgbClr val="168765"/>
+          </a:solidFill>
+          <a:ln xmlns:a="http://schemas.openxmlformats.org/drawingml/2006/main" w="0">
+            <a:solidFill>
+              <a:srgbClr val="168765"/>
+            </a:solidFill>
+            <a:prstDash val="solid"/>
+          </a:ln>
+        </p:spPr>
+      </p:sp>
+      <p:sp>
+        <p:nvSpPr>
+          <p:cNvPr id="300" name="vs-graph-gemini-box">
+            <a:extLst xmlns:a="http://schemas.openxmlformats.org/drawingml/2006/main">
+              <a:ext uri="{FF2B5EF4-FFF2-40B4-BE49-F238E27FC236}">
+                <a16:creationId xmlns:a16="http://schemas.microsoft.com/office/drawing/2014/main" id="{87E03A52-BF87-4400-A5AD-ADD5E2C1F86F}"/>
+              </a:ext>
+            </a:extLst>
+          </p:cNvPr>
+          <p:cNvSpPr>
+            <a:spLocks xmlns:a="http://schemas.openxmlformats.org/drawingml/2006/main" noGrp="1"/>
+          </p:cNvSpPr>
+          <p:nvPr/>
+        </p:nvSpPr>
+        <p:spPr>
+          <a:xfrm xmlns:a="http://schemas.openxmlformats.org/drawingml/2006/main">
+            <a:off x="5724525" y="2924175"/>
+            <a:ext cx="1285875" cy="400050"/>
+          </a:xfrm>
+          <a:prstGeom xmlns:a="http://schemas.openxmlformats.org/drawingml/2006/main" prst="roundRect">
+            <a:avLst>
+              <a:gd name="adj" fmla="val 19048"/>
+            </a:avLst>
+          </a:prstGeom>
+          <a:solidFill xmlns:a="http://schemas.openxmlformats.org/drawingml/2006/main">
+            <a:srgbClr val="168765"/>
+          </a:solidFill>
+          <a:ln xmlns:a="http://schemas.openxmlformats.org/drawingml/2006/main" w="11430">
+            <a:solidFill>
+              <a:srgbClr val="168765"/>
+            </a:solidFill>
+            <a:prstDash val="solid"/>
+          </a:ln>
+        </p:spPr>
+      </p:sp>
+      <p:sp>
+        <p:nvSpPr>
+          <p:cNvPr id="301" name="vs-graph-gemini-title">
+            <a:extLst xmlns:a="http://schemas.openxmlformats.org/drawingml/2006/main">
+              <a:ext uri="{FF2B5EF4-FFF2-40B4-BE49-F238E27FC236}">
+                <a16:creationId xmlns:a16="http://schemas.microsoft.com/office/drawing/2014/main" id="{A0D145AF-88A9-44A1-8FA5-EB42252682FF}"/>
+              </a:ext>
+            </a:extLst>
+          </p:cNvPr>
+          <p:cNvSpPr>
+            <a:spLocks xmlns:a="http://schemas.openxmlformats.org/drawingml/2006/main" noGrp="1"/>
+          </p:cNvSpPr>
+          <p:nvPr/>
+        </p:nvSpPr>
+        <p:spPr>
+          <a:xfrm xmlns:a="http://schemas.openxmlformats.org/drawingml/2006/main">
+            <a:off x="5819775" y="2924175"/>
+            <a:ext cx="1095375" cy="400050"/>
+          </a:xfrm>
+          <a:prstGeom xmlns:a="http://schemas.openxmlformats.org/drawingml/2006/main" prst="rect">
+            <a:avLst/>
+          </a:prstGeom>
+          <a:noFill xmlns:a="http://schemas.openxmlformats.org/drawingml/2006/main"/>
+          <a:ln xmlns:a="http://schemas.openxmlformats.org/drawingml/2006/main" w="0">
+            <a:noFill/>
+            <a:prstDash val="solid"/>
+          </a:ln>
+        </p:spPr>
+        <p:txBody>
+          <a:bodyPr xmlns:a="http://schemas.openxmlformats.org/drawingml/2006/main" lIns="0" tIns="0" rIns="0" bIns="0" anchor="ctr">
+            <a:normAutofit fontScale="97222"/>
+          </a:bodyPr>
+          <a:lstStyle xmlns:a="http://schemas.openxmlformats.org/drawingml/2006/main"/>
+          <a:p xmlns:a="http://schemas.openxmlformats.org/drawingml/2006/main">
+            <a:pPr algn="ctr">
+              <a:defRPr sz="1350" b="1">
+                <a:solidFill>
+                  <a:srgbClr val="FFFFFF"/>
                 </a:solidFill>
                 <a:latin typeface="Arial"/>
                 <a:ea typeface="Arial"/>
@@ -5036,57 +6327,22 @@
               </a:defRPr>
             </a:pPr>
             <a:r>
-              <a:rPr sz="1200" b="1">
-                <a:solidFill>
-                  <a:srgbClr val="111827"/>
+              <a:rPr sz="1350" b="1">
+                <a:solidFill>
+                  <a:srgbClr val="FFFFFF"/>
                 </a:solidFill>
                 <a:latin typeface="Arial"/>
                 <a:ea typeface="Arial"/>
                 <a:cs typeface="Arial"/>
               </a:rPr>
-              <a:t>HR@10 · NDCG@10</a:t>
-            </a:r>
-          </a:p>
-        </p:txBody>
-      </p:sp>
-      <p:sp>
-        <p:nvSpPr>
-          <p:cNvPr id="88" name="catalog-spread">
-            <a:extLst xmlns:a="http://schemas.openxmlformats.org/drawingml/2006/main">
-              <a:ext uri="{FF2B5EF4-FFF2-40B4-BE49-F238E27FC236}">
-                <a16:creationId xmlns:a16="http://schemas.microsoft.com/office/drawing/2014/main" id="{7C96D9E2-210B-4DD3-987D-95EB8989AEF9}"/>
-              </a:ext>
-            </a:extLst>
-          </p:cNvPr>
-          <p:cNvSpPr>
-            <a:spLocks xmlns:a="http://schemas.openxmlformats.org/drawingml/2006/main" noGrp="1"/>
-          </p:cNvSpPr>
-          <p:nvPr/>
-        </p:nvSpPr>
-        <p:spPr>
-          <a:xfrm xmlns:a="http://schemas.openxmlformats.org/drawingml/2006/main">
-            <a:off x="10210800" y="3657600"/>
-            <a:ext cx="1352550" cy="609600"/>
-          </a:xfrm>
-          <a:prstGeom xmlns:a="http://schemas.openxmlformats.org/drawingml/2006/main" prst="rect">
-            <a:avLst/>
-          </a:prstGeom>
-          <a:noFill xmlns:a="http://schemas.openxmlformats.org/drawingml/2006/main"/>
-          <a:ln xmlns:a="http://schemas.openxmlformats.org/drawingml/2006/main" w="0">
-            <a:noFill/>
-            <a:prstDash val="solid"/>
-          </a:ln>
-        </p:spPr>
-        <p:txBody>
-          <a:bodyPr xmlns:a="http://schemas.openxmlformats.org/drawingml/2006/main" lIns="0" tIns="0" rIns="0" bIns="0" anchor="ctr">
-            <a:normAutofit fontScale="99123"/>
-          </a:bodyPr>
-          <a:lstStyle xmlns:a="http://schemas.openxmlformats.org/drawingml/2006/main"/>
-          <a:p xmlns:a="http://schemas.openxmlformats.org/drawingml/2006/main">
-            <a:pPr algn="l">
-              <a:defRPr sz="1125" b="1">
-                <a:solidFill>
-                  <a:srgbClr val="111827"/>
+              <a:t>VS_GRAPH</a:t>
+            </a:r>
+          </a:p>
+          <a:p xmlns:a="http://schemas.openxmlformats.org/drawingml/2006/main">
+            <a:pPr algn="ctr">
+              <a:defRPr sz="1350" b="1">
+                <a:solidFill>
+                  <a:srgbClr val="FFFFFF"/>
                 </a:solidFill>
                 <a:latin typeface="Arial"/>
                 <a:ea typeface="Arial"/>
@@ -5094,138 +6350,128 @@
               </a:defRPr>
             </a:pPr>
             <a:r>
-              <a:rPr sz="1125" b="1">
-                <a:solidFill>
-                  <a:srgbClr val="111827"/>
+              <a:rPr sz="1350" b="1">
+                <a:solidFill>
+                  <a:srgbClr val="FFFFFF"/>
                 </a:solidFill>
                 <a:latin typeface="Arial"/>
                 <a:ea typeface="Arial"/>
                 <a:cs typeface="Arial"/>
               </a:rPr>
-              <a:t>Catalog spread</a:t>
-            </a:r>
-          </a:p>
-          <a:p xmlns:a="http://schemas.openxmlformats.org/drawingml/2006/main">
-            <a:pPr algn="l">
-              <a:defRPr sz="1125" b="1">
-                <a:solidFill>
-                  <a:srgbClr val="111827"/>
-                </a:solidFill>
-                <a:latin typeface="Arial"/>
-                <a:ea typeface="Arial"/>
-                <a:cs typeface="Arial"/>
-              </a:defRPr>
-            </a:pPr>
-            <a:r>
-              <a:rPr sz="1125" b="1">
-                <a:solidFill>
-                  <a:srgbClr val="111827"/>
-                </a:solidFill>
-                <a:latin typeface="Arial"/>
-                <a:ea typeface="Arial"/>
-                <a:cs typeface="Arial"/>
-              </a:rPr>
-              <a:t>Top-20 coverage</a:t>
-            </a:r>
-          </a:p>
-          <a:p xmlns:a="http://schemas.openxmlformats.org/drawingml/2006/main">
-            <a:pPr algn="l">
-              <a:defRPr sz="1125" b="1">
-                <a:solidFill>
-                  <a:srgbClr val="111827"/>
-                </a:solidFill>
-                <a:latin typeface="Arial"/>
-                <a:ea typeface="Arial"/>
-                <a:cs typeface="Arial"/>
-              </a:defRPr>
-            </a:pPr>
-            <a:r>
-              <a:rPr sz="1125" b="1">
-                <a:solidFill>
-                  <a:srgbClr val="111827"/>
-                </a:solidFill>
-                <a:latin typeface="Arial"/>
-                <a:ea typeface="Arial"/>
-                <a:cs typeface="Arial"/>
-              </a:rPr>
-              <a:t>Top-1 concentration</a:t>
+              <a:t>GEMINI</a:t>
             </a:r>
           </a:p>
         </p:txBody>
       </p:sp>
       <p:cxnSp>
         <p:nvCxnSpPr>
-          <p:cNvPr id="186" name="evaluation-rule-2"/>
-          <p:cNvCxnSpPr/>
+          <p:cNvPr id="421" name=""/>
+          <p:cNvCxnSpPr>
+            <a:stCxn xmlns:a="http://schemas.openxmlformats.org/drawingml/2006/main" id="38" idx="3"/>
+            <a:endCxn xmlns:a="http://schemas.openxmlformats.org/drawingml/2006/main" id="288" idx="1"/>
+          </p:cNvCxnSpPr>
           <p:nvPr/>
         </p:nvCxnSpPr>
         <p:spPr>
           <a:xfrm xmlns:a="http://schemas.openxmlformats.org/drawingml/2006/main">
-            <a:off x="10210800" y="4362450"/>
-            <a:ext cx="1352550" cy="0"/>
-          </a:xfrm>
-          <a:prstGeom xmlns:a="http://schemas.openxmlformats.org/drawingml/2006/main" prst="straightConnector1">
-            <a:avLst/>
-          </a:prstGeom>
+            <a:off x="2190750" y="2657475"/>
+            <a:ext cx="762000" cy="466725"/>
+          </a:xfrm>
+          <a:prstGeom xmlns:a="http://schemas.openxmlformats.org/drawingml/2006/main" prst="bentConnector3">
+            <a:avLst>
+              <a:gd name="adj1" fmla="val 50000"/>
+            </a:avLst>
+          </a:prstGeom>
+          <a:ln xmlns:a="http://schemas.openxmlformats.org/drawingml/2006/main" w="23813">
+            <a:solidFill>
+              <a:srgbClr val="168765"/>
+            </a:solidFill>
+            <a:prstDash val="solid"/>
+            <a:headEnd type="arrow" w="med" len="med"/>
+          </a:ln>
+        </p:spPr>
+      </p:cxnSp>
+      <p:cxnSp>
+        <p:nvCxnSpPr>
+          <p:cNvPr id="422" name=""/>
+          <p:cNvCxnSpPr>
+            <a:stCxn xmlns:a="http://schemas.openxmlformats.org/drawingml/2006/main" id="38" idx="3"/>
+            <a:endCxn xmlns:a="http://schemas.openxmlformats.org/drawingml/2006/main" id="56" idx="1"/>
+          </p:cNvCxnSpPr>
+          <p:nvPr/>
+        </p:nvCxnSpPr>
+        <p:spPr>
+          <a:xfrm xmlns:a="http://schemas.openxmlformats.org/drawingml/2006/main">
+            <a:off x="2190750" y="2657475"/>
+            <a:ext cx="762000" cy="2133600"/>
+          </a:xfrm>
+          <a:prstGeom xmlns:a="http://schemas.openxmlformats.org/drawingml/2006/main" prst="bentConnector3">
+            <a:avLst>
+              <a:gd name="adj1" fmla="val 50000"/>
+            </a:avLst>
+          </a:prstGeom>
+          <a:ln xmlns:a="http://schemas.openxmlformats.org/drawingml/2006/main" w="23813">
+            <a:solidFill>
+              <a:srgbClr val="2F78E8"/>
+            </a:solidFill>
+            <a:prstDash val="solid"/>
+            <a:headEnd type="arrow" w="med" len="med"/>
+          </a:ln>
+        </p:spPr>
+      </p:cxnSp>
+      <p:sp>
+        <p:nvSpPr>
+          <p:cNvPr id="304" name="graph-gemini-embed-box">
+            <a:extLst xmlns:a="http://schemas.openxmlformats.org/drawingml/2006/main">
+              <a:ext uri="{FF2B5EF4-FFF2-40B4-BE49-F238E27FC236}">
+                <a16:creationId xmlns:a16="http://schemas.microsoft.com/office/drawing/2014/main" id="{437904B7-6CAB-4F10-93E3-DA5099DBF8A7}"/>
+              </a:ext>
+            </a:extLst>
+          </p:cNvPr>
+          <p:cNvSpPr>
+            <a:spLocks xmlns:a="http://schemas.openxmlformats.org/drawingml/2006/main" noGrp="1"/>
+          </p:cNvSpPr>
+          <p:nvPr/>
+        </p:nvSpPr>
+        <p:spPr>
+          <a:xfrm xmlns:a="http://schemas.openxmlformats.org/drawingml/2006/main">
+            <a:off x="7734300" y="3209925"/>
+            <a:ext cx="1866900" cy="323850"/>
+          </a:xfrm>
+          <a:prstGeom xmlns:a="http://schemas.openxmlformats.org/drawingml/2006/main" prst="roundRect">
+            <a:avLst>
+              <a:gd name="adj" fmla="val 23529"/>
+            </a:avLst>
+          </a:prstGeom>
+          <a:solidFill xmlns:a="http://schemas.openxmlformats.org/drawingml/2006/main">
+            <a:srgbClr val="E7F5F0"/>
+          </a:solidFill>
           <a:ln xmlns:a="http://schemas.openxmlformats.org/drawingml/2006/main" w="11430">
             <a:solidFill>
-              <a:srgbClr val="D5A55E"/>
+              <a:srgbClr val="A8D8C8"/>
             </a:solidFill>
             <a:prstDash val="solid"/>
           </a:ln>
         </p:spPr>
-      </p:cxnSp>
-      <p:sp>
-        <p:nvSpPr>
-          <p:cNvPr id="90" name="evaluation-step-3-marker">
-            <a:extLst xmlns:a="http://schemas.openxmlformats.org/drawingml/2006/main">
-              <a:ext uri="{FF2B5EF4-FFF2-40B4-BE49-F238E27FC236}">
-                <a16:creationId xmlns:a16="http://schemas.microsoft.com/office/drawing/2014/main" id="{B06C640C-C820-419E-825C-1ABF5062C216}"/>
-              </a:ext>
-            </a:extLst>
-          </p:cNvPr>
-          <p:cNvSpPr>
-            <a:spLocks xmlns:a="http://schemas.openxmlformats.org/drawingml/2006/main" noGrp="1"/>
-          </p:cNvSpPr>
-          <p:nvPr/>
-        </p:nvSpPr>
-        <p:spPr>
-          <a:xfrm xmlns:a="http://schemas.openxmlformats.org/drawingml/2006/main">
-            <a:off x="10210800" y="4495800"/>
-            <a:ext cx="228600" cy="228600"/>
-          </a:xfrm>
-          <a:prstGeom xmlns:a="http://schemas.openxmlformats.org/drawingml/2006/main" prst="ellipse">
-            <a:avLst/>
-          </a:prstGeom>
-          <a:solidFill xmlns:a="http://schemas.openxmlformats.org/drawingml/2006/main">
-            <a:srgbClr val="A85D00"/>
-          </a:solidFill>
-          <a:ln xmlns:a="http://schemas.openxmlformats.org/drawingml/2006/main" w="0">
-            <a:solidFill>
-              <a:srgbClr val="A85D00"/>
-            </a:solidFill>
-            <a:prstDash val="solid"/>
-          </a:ln>
-        </p:spPr>
-      </p:sp>
-      <p:sp>
-        <p:nvSpPr>
-          <p:cNvPr id="91" name="evaluation-step-3-number">
-            <a:extLst xmlns:a="http://schemas.openxmlformats.org/drawingml/2006/main">
-              <a:ext uri="{FF2B5EF4-FFF2-40B4-BE49-F238E27FC236}">
-                <a16:creationId xmlns:a16="http://schemas.microsoft.com/office/drawing/2014/main" id="{6213FA49-0F59-49DA-AB76-604965409387}"/>
-              </a:ext>
-            </a:extLst>
-          </p:cNvPr>
-          <p:cNvSpPr>
-            <a:spLocks xmlns:a="http://schemas.openxmlformats.org/drawingml/2006/main" noGrp="1"/>
-          </p:cNvSpPr>
-          <p:nvPr/>
-        </p:nvSpPr>
-        <p:spPr>
-          <a:xfrm xmlns:a="http://schemas.openxmlformats.org/drawingml/2006/main">
-            <a:off x="10210800" y="4495800"/>
-            <a:ext cx="228600" cy="228600"/>
+      </p:sp>
+      <p:sp>
+        <p:nvSpPr>
+          <p:cNvPr id="305" name="graph-gemini-embed-title">
+            <a:extLst xmlns:a="http://schemas.openxmlformats.org/drawingml/2006/main">
+              <a:ext uri="{FF2B5EF4-FFF2-40B4-BE49-F238E27FC236}">
+                <a16:creationId xmlns:a16="http://schemas.microsoft.com/office/drawing/2014/main" id="{43BBD819-A0A5-4FBA-86FC-890116E0A866}"/>
+              </a:ext>
+            </a:extLst>
+          </p:cNvPr>
+          <p:cNvSpPr>
+            <a:spLocks xmlns:a="http://schemas.openxmlformats.org/drawingml/2006/main" noGrp="1"/>
+          </p:cNvSpPr>
+          <p:nvPr/>
+        </p:nvSpPr>
+        <p:spPr>
+          <a:xfrm xmlns:a="http://schemas.openxmlformats.org/drawingml/2006/main">
+            <a:off x="7829550" y="3209925"/>
+            <a:ext cx="1676400" cy="323850"/>
           </a:xfrm>
           <a:prstGeom xmlns:a="http://schemas.openxmlformats.org/drawingml/2006/main" prst="rect">
             <a:avLst/>
@@ -5243,9 +6489,9 @@
           <a:lstStyle xmlns:a="http://schemas.openxmlformats.org/drawingml/2006/main"/>
           <a:p xmlns:a="http://schemas.openxmlformats.org/drawingml/2006/main">
             <a:pPr algn="ctr">
-              <a:defRPr sz="1050" b="1">
-                <a:solidFill>
-                  <a:srgbClr val="FFFFFF"/>
+              <a:defRPr sz="1200" b="1">
+                <a:solidFill>
+                  <a:srgbClr val="168765"/>
                 </a:solidFill>
                 <a:latin typeface="Arial"/>
                 <a:ea typeface="Arial"/>
@@ -5253,37 +6499,105 @@
               </a:defRPr>
             </a:pPr>
             <a:r>
-              <a:rPr sz="1050" b="1">
-                <a:solidFill>
-                  <a:srgbClr val="FFFFFF"/>
+              <a:rPr sz="1200" b="1">
+                <a:solidFill>
+                  <a:srgbClr val="168765"/>
                 </a:solidFill>
                 <a:latin typeface="Arial"/>
                 <a:ea typeface="Arial"/>
                 <a:cs typeface="Arial"/>
               </a:rPr>
-              <a:t>3</a:t>
+              <a:t>BGE 1024D  ·  GEMINI</a:t>
             </a:r>
           </a:p>
         </p:txBody>
       </p:sp>
       <p:sp>
         <p:nvSpPr>
-          <p:cNvPr id="92" name="evaluation-step-3-title">
-            <a:extLst xmlns:a="http://schemas.openxmlformats.org/drawingml/2006/main">
-              <a:ext uri="{FF2B5EF4-FFF2-40B4-BE49-F238E27FC236}">
-                <a16:creationId xmlns:a16="http://schemas.microsoft.com/office/drawing/2014/main" id="{E4CA031C-307A-402B-9BD6-31870CAC5657}"/>
-              </a:ext>
-            </a:extLst>
-          </p:cNvPr>
-          <p:cNvSpPr>
-            <a:spLocks xmlns:a="http://schemas.openxmlformats.org/drawingml/2006/main" noGrp="1"/>
-          </p:cNvSpPr>
-          <p:nvPr/>
-        </p:nvSpPr>
-        <p:spPr>
-          <a:xfrm xmlns:a="http://schemas.openxmlformats.org/drawingml/2006/main">
-            <a:off x="10515600" y="4457700"/>
-            <a:ext cx="1047750" cy="304800"/>
+          <p:cNvPr id="306" name="graph-gemini-embed-to-sasrec">
+            <a:extLst xmlns:a="http://schemas.openxmlformats.org/drawingml/2006/main">
+              <a:ext uri="{FF2B5EF4-FFF2-40B4-BE49-F238E27FC236}">
+                <a16:creationId xmlns:a16="http://schemas.microsoft.com/office/drawing/2014/main" id="{6B99462E-2BDF-46A3-A754-7824343D81CC}"/>
+              </a:ext>
+            </a:extLst>
+          </p:cNvPr>
+          <p:cNvSpPr>
+            <a:spLocks xmlns:a="http://schemas.openxmlformats.org/drawingml/2006/main" noGrp="1"/>
+          </p:cNvSpPr>
+          <p:nvPr/>
+        </p:nvSpPr>
+        <p:spPr>
+          <a:xfrm xmlns:a="http://schemas.openxmlformats.org/drawingml/2006/main">
+            <a:off x="8620125" y="3533775"/>
+            <a:ext cx="95250" cy="76200"/>
+          </a:xfrm>
+          <a:prstGeom xmlns:a="http://schemas.openxmlformats.org/drawingml/2006/main" prst="downArrow">
+            <a:avLst/>
+          </a:prstGeom>
+          <a:solidFill xmlns:a="http://schemas.openxmlformats.org/drawingml/2006/main">
+            <a:srgbClr val="168765"/>
+          </a:solidFill>
+          <a:ln xmlns:a="http://schemas.openxmlformats.org/drawingml/2006/main" w="0">
+            <a:solidFill>
+              <a:srgbClr val="168765"/>
+            </a:solidFill>
+            <a:prstDash val="solid"/>
+          </a:ln>
+        </p:spPr>
+      </p:sp>
+      <p:sp>
+        <p:nvSpPr>
+          <p:cNvPr id="307" name="sasrec-graph-gemini-box">
+            <a:extLst xmlns:a="http://schemas.openxmlformats.org/drawingml/2006/main">
+              <a:ext uri="{FF2B5EF4-FFF2-40B4-BE49-F238E27FC236}">
+                <a16:creationId xmlns:a16="http://schemas.microsoft.com/office/drawing/2014/main" id="{97E580C6-935D-4674-8100-D7D9744976FE}"/>
+              </a:ext>
+            </a:extLst>
+          </p:cNvPr>
+          <p:cNvSpPr>
+            <a:spLocks xmlns:a="http://schemas.openxmlformats.org/drawingml/2006/main" noGrp="1"/>
+          </p:cNvSpPr>
+          <p:nvPr/>
+        </p:nvSpPr>
+        <p:spPr>
+          <a:xfrm xmlns:a="http://schemas.openxmlformats.org/drawingml/2006/main">
+            <a:off x="7734300" y="3590925"/>
+            <a:ext cx="1866900" cy="361950"/>
+          </a:xfrm>
+          <a:prstGeom xmlns:a="http://schemas.openxmlformats.org/drawingml/2006/main" prst="roundRect">
+            <a:avLst>
+              <a:gd name="adj" fmla="val 21053"/>
+            </a:avLst>
+          </a:prstGeom>
+          <a:solidFill xmlns:a="http://schemas.openxmlformats.org/drawingml/2006/main">
+            <a:srgbClr val="168765"/>
+          </a:solidFill>
+          <a:ln xmlns:a="http://schemas.openxmlformats.org/drawingml/2006/main" w="11430">
+            <a:solidFill>
+              <a:srgbClr val="168765"/>
+            </a:solidFill>
+            <a:prstDash val="solid"/>
+          </a:ln>
+        </p:spPr>
+      </p:sp>
+      <p:sp>
+        <p:nvSpPr>
+          <p:cNvPr id="308" name="sasrec-graph-gemini-title">
+            <a:extLst xmlns:a="http://schemas.openxmlformats.org/drawingml/2006/main">
+              <a:ext uri="{FF2B5EF4-FFF2-40B4-BE49-F238E27FC236}">
+                <a16:creationId xmlns:a16="http://schemas.microsoft.com/office/drawing/2014/main" id="{A71C181C-3382-4FB4-ABF1-4808807649CA}"/>
+              </a:ext>
+            </a:extLst>
+          </p:cNvPr>
+          <p:cNvSpPr>
+            <a:spLocks xmlns:a="http://schemas.openxmlformats.org/drawingml/2006/main" noGrp="1"/>
+          </p:cNvSpPr>
+          <p:nvPr/>
+        </p:nvSpPr>
+        <p:spPr>
+          <a:xfrm xmlns:a="http://schemas.openxmlformats.org/drawingml/2006/main">
+            <a:off x="7829550" y="3590925"/>
+            <a:ext cx="1676400" cy="361950"/>
           </a:xfrm>
           <a:prstGeom xmlns:a="http://schemas.openxmlformats.org/drawingml/2006/main" prst="rect">
             <a:avLst/>
@@ -5296,14 +6610,14 @@
         </p:spPr>
         <p:txBody>
           <a:bodyPr xmlns:a="http://schemas.openxmlformats.org/drawingml/2006/main" lIns="0" tIns="0" rIns="0" bIns="0" anchor="ctr">
-            <a:normAutofit fontScale="87358"/>
+            <a:normAutofit fontScale="98958"/>
           </a:bodyPr>
           <a:lstStyle xmlns:a="http://schemas.openxmlformats.org/drawingml/2006/main"/>
           <a:p xmlns:a="http://schemas.openxmlformats.org/drawingml/2006/main">
-            <a:pPr algn="l">
-              <a:defRPr sz="1350" b="1">
-                <a:solidFill>
-                  <a:srgbClr val="A85D00"/>
+            <a:pPr algn="ctr">
+              <a:defRPr sz="1200" b="1">
+                <a:solidFill>
+                  <a:srgbClr val="FFFFFF"/>
                 </a:solidFill>
                 <a:latin typeface="Arial"/>
                 <a:ea typeface="Arial"/>
@@ -5311,57 +6625,22 @@
               </a:defRPr>
             </a:pPr>
             <a:r>
-              <a:rPr sz="1350" b="1">
-                <a:solidFill>
-                  <a:srgbClr val="A85D00"/>
+              <a:rPr sz="1200" b="1">
+                <a:solidFill>
+                  <a:srgbClr val="FFFFFF"/>
                 </a:solidFill>
                 <a:latin typeface="Arial"/>
                 <a:ea typeface="Arial"/>
                 <a:cs typeface="Arial"/>
               </a:rPr>
-              <a:t>Compare arms</a:t>
-            </a:r>
-          </a:p>
-        </p:txBody>
-      </p:sp>
-      <p:sp>
-        <p:nvSpPr>
-          <p:cNvPr id="93" name="arm-comparisons">
-            <a:extLst xmlns:a="http://schemas.openxmlformats.org/drawingml/2006/main">
-              <a:ext uri="{FF2B5EF4-FFF2-40B4-BE49-F238E27FC236}">
-                <a16:creationId xmlns:a16="http://schemas.microsoft.com/office/drawing/2014/main" id="{64C72BED-58D2-4F21-9C49-1F995D767D93}"/>
-              </a:ext>
-            </a:extLst>
-          </p:cNvPr>
-          <p:cNvSpPr>
-            <a:spLocks xmlns:a="http://schemas.openxmlformats.org/drawingml/2006/main" noGrp="1"/>
-          </p:cNvSpPr>
-          <p:nvPr/>
-        </p:nvSpPr>
-        <p:spPr>
-          <a:xfrm xmlns:a="http://schemas.openxmlformats.org/drawingml/2006/main">
-            <a:off x="10210800" y="4819650"/>
-            <a:ext cx="1352550" cy="590550"/>
-          </a:xfrm>
-          <a:prstGeom xmlns:a="http://schemas.openxmlformats.org/drawingml/2006/main" prst="rect">
-            <a:avLst/>
-          </a:prstGeom>
-          <a:noFill xmlns:a="http://schemas.openxmlformats.org/drawingml/2006/main"/>
-          <a:ln xmlns:a="http://schemas.openxmlformats.org/drawingml/2006/main" w="0">
-            <a:noFill/>
-            <a:prstDash val="solid"/>
-          </a:ln>
-        </p:spPr>
-        <p:txBody>
-          <a:bodyPr xmlns:a="http://schemas.openxmlformats.org/drawingml/2006/main" lIns="0" tIns="0" rIns="0" bIns="0" anchor="ctr">
-            <a:normAutofit fontScale="100000"/>
-          </a:bodyPr>
-          <a:lstStyle xmlns:a="http://schemas.openxmlformats.org/drawingml/2006/main"/>
-          <a:p xmlns:a="http://schemas.openxmlformats.org/drawingml/2006/main">
-            <a:pPr algn="l">
+              <a:t>SASRec_GRAPH</a:t>
+            </a:r>
+          </a:p>
+          <a:p xmlns:a="http://schemas.openxmlformats.org/drawingml/2006/main">
+            <a:pPr algn="ctr">
               <a:defRPr sz="1200" b="1">
                 <a:solidFill>
-                  <a:srgbClr val="111827"/>
+                  <a:srgbClr val="FFFFFF"/>
                 </a:solidFill>
                 <a:latin typeface="Arial"/>
                 <a:ea typeface="Arial"/>
@@ -5371,259 +6650,72 @@
             <a:r>
               <a:rPr sz="1200" b="1">
                 <a:solidFill>
-                  <a:srgbClr val="111827"/>
+                  <a:srgbClr val="FFFFFF"/>
                 </a:solidFill>
                 <a:latin typeface="Arial"/>
                 <a:ea typeface="Arial"/>
                 <a:cs typeface="Arial"/>
               </a:rPr>
-              <a:t>GRAPH vs ID</a:t>
-            </a:r>
-          </a:p>
-          <a:p xmlns:a="http://schemas.openxmlformats.org/drawingml/2006/main">
-            <a:pPr algn="l">
-              <a:defRPr sz="1200" b="1">
-                <a:solidFill>
-                  <a:srgbClr val="111827"/>
-                </a:solidFill>
-                <a:latin typeface="Arial"/>
-                <a:ea typeface="Arial"/>
-                <a:cs typeface="Arial"/>
-              </a:defRPr>
-            </a:pPr>
-            <a:r>
-              <a:rPr sz="1200" b="1">
-                <a:solidFill>
-                  <a:srgbClr val="111827"/>
-                </a:solidFill>
-                <a:latin typeface="Arial"/>
-                <a:ea typeface="Arial"/>
-                <a:cs typeface="Arial"/>
-              </a:rPr>
-              <a:t>DESC vs ID</a:t>
-            </a:r>
-          </a:p>
-          <a:p xmlns:a="http://schemas.openxmlformats.org/drawingml/2006/main">
-            <a:pPr algn="l">
-              <a:defRPr sz="1200" b="1">
-                <a:solidFill>
-                  <a:srgbClr val="111827"/>
-                </a:solidFill>
-                <a:latin typeface="Arial"/>
-                <a:ea typeface="Arial"/>
-                <a:cs typeface="Arial"/>
-              </a:defRPr>
-            </a:pPr>
-            <a:r>
-              <a:rPr sz="1200" b="1">
-                <a:solidFill>
-                  <a:srgbClr val="111827"/>
-                </a:solidFill>
-                <a:latin typeface="Arial"/>
-                <a:ea typeface="Arial"/>
-                <a:cs typeface="Arial"/>
-              </a:rPr>
-              <a:t>GRAPH ↔ DESC</a:t>
+              <a:t>GEMINI</a:t>
             </a:r>
           </a:p>
         </p:txBody>
       </p:sp>
       <p:sp>
         <p:nvSpPr>
-          <p:cNvPr id="94" name="diagnosis">
-            <a:extLst xmlns:a="http://schemas.openxmlformats.org/drawingml/2006/main">
-              <a:ext uri="{FF2B5EF4-FFF2-40B4-BE49-F238E27FC236}">
-                <a16:creationId xmlns:a16="http://schemas.microsoft.com/office/drawing/2014/main" id="{9C220A0E-16D0-49BE-A4ED-ADFA8D6D5658}"/>
-              </a:ext>
-            </a:extLst>
-          </p:cNvPr>
-          <p:cNvSpPr>
-            <a:spLocks xmlns:a="http://schemas.openxmlformats.org/drawingml/2006/main" noGrp="1"/>
-          </p:cNvSpPr>
-          <p:nvPr/>
-        </p:nvSpPr>
-        <p:spPr>
-          <a:xfrm xmlns:a="http://schemas.openxmlformats.org/drawingml/2006/main">
-            <a:off x="10210800" y="5467350"/>
-            <a:ext cx="1352550" cy="171450"/>
-          </a:xfrm>
-          <a:prstGeom xmlns:a="http://schemas.openxmlformats.org/drawingml/2006/main" prst="rect">
-            <a:avLst/>
-          </a:prstGeom>
-          <a:noFill xmlns:a="http://schemas.openxmlformats.org/drawingml/2006/main"/>
-          <a:ln xmlns:a="http://schemas.openxmlformats.org/drawingml/2006/main" w="0">
-            <a:noFill/>
-            <a:prstDash val="solid"/>
-          </a:ln>
-        </p:spPr>
-        <p:txBody>
-          <a:bodyPr xmlns:a="http://schemas.openxmlformats.org/drawingml/2006/main" lIns="0" tIns="0" rIns="0" bIns="0" anchor="ctr">
-            <a:normAutofit fontScale="73604"/>
-          </a:bodyPr>
-          <a:lstStyle xmlns:a="http://schemas.openxmlformats.org/drawingml/2006/main"/>
-          <a:p xmlns:a="http://schemas.openxmlformats.org/drawingml/2006/main">
-            <a:pPr algn="l">
-              <a:defRPr sz="900">
-                <a:solidFill>
-                  <a:srgbClr val="667085"/>
-                </a:solidFill>
-                <a:latin typeface="Arial"/>
-                <a:ea typeface="Arial"/>
-                <a:cs typeface="Arial"/>
-              </a:defRPr>
-            </a:pPr>
-            <a:r>
-              <a:rPr sz="900">
-                <a:solidFill>
-                  <a:srgbClr val="667085"/>
-                </a:solidFill>
-                <a:latin typeface="Arial"/>
-                <a:ea typeface="Arial"/>
-                <a:cs typeface="Arial"/>
-              </a:rPr>
-              <a:t>paired bootstrap → diagnosis/report</a:t>
-            </a:r>
-          </a:p>
-        </p:txBody>
+          <p:cNvPr id="309" name="gemini-to-rec">
+            <a:extLst xmlns:a="http://schemas.openxmlformats.org/drawingml/2006/main">
+              <a:ext uri="{FF2B5EF4-FFF2-40B4-BE49-F238E27FC236}">
+                <a16:creationId xmlns:a16="http://schemas.microsoft.com/office/drawing/2014/main" id="{1E0A4EDA-9122-4844-9B0C-0C250E650E00}"/>
+              </a:ext>
+            </a:extLst>
+          </p:cNvPr>
+          <p:cNvSpPr>
+            <a:spLocks xmlns:a="http://schemas.openxmlformats.org/drawingml/2006/main" noGrp="1"/>
+          </p:cNvSpPr>
+          <p:nvPr/>
+        </p:nvSpPr>
+        <p:spPr>
+          <a:xfrm xmlns:a="http://schemas.openxmlformats.org/drawingml/2006/main">
+            <a:off x="7010400" y="3333750"/>
+            <a:ext cx="723900" cy="85725"/>
+          </a:xfrm>
+          <a:prstGeom xmlns:a="http://schemas.openxmlformats.org/drawingml/2006/main" prst="rightArrow">
+            <a:avLst/>
+          </a:prstGeom>
+          <a:solidFill xmlns:a="http://schemas.openxmlformats.org/drawingml/2006/main">
+            <a:srgbClr val="168765"/>
+          </a:solidFill>
+          <a:ln xmlns:a="http://schemas.openxmlformats.org/drawingml/2006/main" w="0">
+            <a:solidFill>
+              <a:srgbClr val="168765"/>
+            </a:solidFill>
+            <a:prstDash val="solid"/>
+          </a:ln>
+        </p:spPr>
       </p:sp>
       <p:cxnSp>
         <p:nvCxnSpPr>
-          <p:cNvPr id="192" name="footer-rule"/>
+          <p:cNvPr id="429" name="gemini-to-evaluation-collector"/>
           <p:cNvCxnSpPr/>
           <p:nvPr/>
         </p:nvCxnSpPr>
         <p:spPr>
           <a:xfrm xmlns:a="http://schemas.openxmlformats.org/drawingml/2006/main">
-            <a:off x="457200" y="5953125"/>
-            <a:ext cx="11277600" cy="0"/>
+            <a:off x="9601200" y="3771900"/>
+            <a:ext cx="285750" cy="0"/>
           </a:xfrm>
           <a:prstGeom xmlns:a="http://schemas.openxmlformats.org/drawingml/2006/main" prst="straightConnector1">
             <a:avLst/>
           </a:prstGeom>
-          <a:ln xmlns:a="http://schemas.openxmlformats.org/drawingml/2006/main" w="9525">
+          <a:ln xmlns:a="http://schemas.openxmlformats.org/drawingml/2006/main" w="28575">
             <a:solidFill>
-              <a:srgbClr val="C8CDD5"/>
+              <a:srgbClr val="168765"/>
             </a:solidFill>
             <a:prstDash val="solid"/>
           </a:ln>
         </p:spPr>
       </p:cxnSp>
-      <p:sp>
-        <p:nvSpPr>
-          <p:cNvPr id="96" name="footer">
-            <a:extLst xmlns:a="http://schemas.openxmlformats.org/drawingml/2006/main">
-              <a:ext uri="{FF2B5EF4-FFF2-40B4-BE49-F238E27FC236}">
-                <a16:creationId xmlns:a16="http://schemas.microsoft.com/office/drawing/2014/main" id="{01969799-C872-46C3-AB6E-B550B117557D}"/>
-              </a:ext>
-            </a:extLst>
-          </p:cNvPr>
-          <p:cNvSpPr>
-            <a:spLocks xmlns:a="http://schemas.openxmlformats.org/drawingml/2006/main" noGrp="1"/>
-          </p:cNvSpPr>
-          <p:nvPr/>
-        </p:nvSpPr>
-        <p:spPr>
-          <a:xfrm xmlns:a="http://schemas.openxmlformats.org/drawingml/2006/main">
-            <a:off x="457200" y="6076950"/>
-            <a:ext cx="11277600" cy="304800"/>
-          </a:xfrm>
-          <a:prstGeom xmlns:a="http://schemas.openxmlformats.org/drawingml/2006/main" prst="rect">
-            <a:avLst/>
-          </a:prstGeom>
-          <a:noFill xmlns:a="http://schemas.openxmlformats.org/drawingml/2006/main"/>
-          <a:ln xmlns:a="http://schemas.openxmlformats.org/drawingml/2006/main" w="0">
-            <a:noFill/>
-            <a:prstDash val="solid"/>
-          </a:ln>
-        </p:spPr>
-        <p:txBody>
-          <a:bodyPr xmlns:a="http://schemas.openxmlformats.org/drawingml/2006/main" lIns="0" tIns="0" rIns="0" bIns="0" anchor="ctr">
-            <a:normAutofit fontScale="100000"/>
-          </a:bodyPr>
-          <a:lstStyle xmlns:a="http://schemas.openxmlformats.org/drawingml/2006/main"/>
-          <a:p xmlns:a="http://schemas.openxmlformats.org/drawingml/2006/main">
-            <a:pPr algn="l">
-              <a:defRPr sz="1200">
-                <a:solidFill>
-                  <a:srgbClr val="667085"/>
-                </a:solidFill>
-                <a:latin typeface="Arial"/>
-                <a:ea typeface="Arial"/>
-                <a:cs typeface="Arial"/>
-              </a:defRPr>
-            </a:pPr>
-            <a:r>
-              <a:rPr sz="1200">
-                <a:solidFill>
-                  <a:srgbClr val="667085"/>
-                </a:solidFill>
-                <a:latin typeface="Arial"/>
-                <a:ea typeface="Arial"/>
-                <a:cs typeface="Arial"/>
-              </a:rPr>
-              <a:t>통제 조건  ·  split, seeds, candidate scoring과 SASRec protocol은 고정하고 representation arm만 비교</a:t>
-            </a:r>
-          </a:p>
-        </p:txBody>
-      </p:sp>
-      <p:sp>
-        <p:nvSpPr>
-          <p:cNvPr id="97" name="acronym-note">
-            <a:extLst xmlns:a="http://schemas.openxmlformats.org/drawingml/2006/main">
-              <a:ext uri="{FF2B5EF4-FFF2-40B4-BE49-F238E27FC236}">
-                <a16:creationId xmlns:a16="http://schemas.microsoft.com/office/drawing/2014/main" id="{AF89D02D-4889-4FE2-8DFC-C5DE42F48D5B}"/>
-              </a:ext>
-            </a:extLst>
-          </p:cNvPr>
-          <p:cNvSpPr>
-            <a:spLocks xmlns:a="http://schemas.openxmlformats.org/drawingml/2006/main" noGrp="1"/>
-          </p:cNvSpPr>
-          <p:nvPr/>
-        </p:nvSpPr>
-        <p:spPr>
-          <a:xfrm xmlns:a="http://schemas.openxmlformats.org/drawingml/2006/main">
-            <a:off x="457200" y="6419850"/>
-            <a:ext cx="11277600" cy="228600"/>
-          </a:xfrm>
-          <a:prstGeom xmlns:a="http://schemas.openxmlformats.org/drawingml/2006/main" prst="rect">
-            <a:avLst/>
-          </a:prstGeom>
-          <a:noFill xmlns:a="http://schemas.openxmlformats.org/drawingml/2006/main"/>
-          <a:ln xmlns:a="http://schemas.openxmlformats.org/drawingml/2006/main" w="0">
-            <a:noFill/>
-            <a:prstDash val="solid"/>
-          </a:ln>
-        </p:spPr>
-        <p:txBody>
-          <a:bodyPr xmlns:a="http://schemas.openxmlformats.org/drawingml/2006/main" lIns="0" tIns="0" rIns="0" bIns="0" anchor="ctr">
-            <a:normAutofit fontScale="100000"/>
-          </a:bodyPr>
-          <a:lstStyle xmlns:a="http://schemas.openxmlformats.org/drawingml/2006/main"/>
-          <a:p xmlns:a="http://schemas.openxmlformats.org/drawingml/2006/main">
-            <a:pPr algn="l">
-              <a:defRPr sz="975">
-                <a:solidFill>
-                  <a:srgbClr val="8A919C"/>
-                </a:solidFill>
-                <a:latin typeface="Arial"/>
-                <a:ea typeface="Arial"/>
-                <a:cs typeface="Arial"/>
-              </a:defRPr>
-            </a:pPr>
-            <a:r>
-              <a:rPr sz="975">
-                <a:solidFill>
-                  <a:srgbClr val="8A919C"/>
-                </a:solidFill>
-                <a:latin typeface="Arial"/>
-                <a:ea typeface="Arial"/>
-                <a:cs typeface="Arial"/>
-              </a:rPr>
-              <a:t>SCG = Scene Context Graph  ·  SD = Scene Description  ·  VS_Graph = Graph-based Video Summary  ·  VS_desc = Description-based Video Summary</a:t>
-            </a:r>
-          </a:p>
-        </p:txBody>
-      </p:sp>
     </p:spTree>
     <p:extLst>
       <p:ext uri="{BB962C8B-B14F-4D97-AF65-F5344CB8AC3E}">
